--- a/Presentation/Unrealengine pp.pptx
+++ b/Presentation/Unrealengine pp.pptx
@@ -2,10 +2,19 @@
 <file path=ppt/presentation.xml><?xml version="1.0" encoding="utf-8"?>
 <p:presentation xmlns:a="http://schemas.openxmlformats.org/drawingml/2006/main" xmlns:r="http://schemas.openxmlformats.org/officeDocument/2006/relationships" xmlns:p="http://schemas.openxmlformats.org/presentationml/2006/main" saveSubsetFonts="1">
   <p:sldMasterIdLst>
-    <p:sldMasterId id="2147483648" r:id="rId1"/>
+    <p:sldMasterId id="2147483648" r:id="rId4"/>
   </p:sldMasterIdLst>
   <p:sldIdLst>
-    <p:sldId id="256" r:id="rId2"/>
+    <p:sldId id="256" r:id="rId5"/>
+    <p:sldId id="263" r:id="rId6"/>
+    <p:sldId id="258" r:id="rId7"/>
+    <p:sldId id="257" r:id="rId8"/>
+    <p:sldId id="264" r:id="rId9"/>
+    <p:sldId id="265" r:id="rId10"/>
+    <p:sldId id="266" r:id="rId11"/>
+    <p:sldId id="267" r:id="rId12"/>
+    <p:sldId id="268" r:id="rId13"/>
+    <p:sldId id="269" r:id="rId14"/>
   </p:sldIdLst>
   <p:sldSz cx="12192000" cy="6858000"/>
   <p:notesSz cx="6858000" cy="9144000"/>
@@ -107,6 +116,336 @@
 </p:presentation>
 </file>
 
+<file path=ppt/revisionInfo.xml><?xml version="1.0" encoding="utf-8"?>
+<p1510:revInfo xmlns:a="http://schemas.openxmlformats.org/drawingml/2006/main" xmlns:r="http://schemas.openxmlformats.org/officeDocument/2006/relationships" xmlns:p1510="http://schemas.microsoft.com/office/powerpoint/2015/10/main">
+  <p1510:revLst>
+    <p1510:client id="{918DEC33-A8E2-5D84-CA76-58650E82AC50}" v="308" dt="2026-02-11T08:06:33.058"/>
+  </p1510:revLst>
+</p1510:revInfo>
+</file>
+
+<file path=ppt/changesInfos/changesInfo1.xml><?xml version="1.0" encoding="utf-8"?>
+<pc:chgInfo xmlns:a="http://schemas.openxmlformats.org/drawingml/2006/main" xmlns:r="http://schemas.openxmlformats.org/officeDocument/2006/relationships" xmlns:ac="http://schemas.microsoft.com/office/drawing/2013/main/command" xmlns:pc="http://schemas.microsoft.com/office/powerpoint/2013/main/command">
+  <pc:docChgLst>
+    <pc:chgData name="ŠPIONJAK Tadej (STD)" userId="S::tadej.spionjak@edu.vs.ch::65c42695-ef25-4ae5-8123-204466087ecd" providerId="AD" clId="Web-{918DEC33-A8E2-5D84-CA76-58650E82AC50}"/>
+    <pc:docChg chg="addSld delSld modSld sldOrd">
+      <pc:chgData name="ŠPIONJAK Tadej (STD)" userId="S::tadej.spionjak@edu.vs.ch::65c42695-ef25-4ae5-8123-204466087ecd" providerId="AD" clId="Web-{918DEC33-A8E2-5D84-CA76-58650E82AC50}" dt="2026-02-11T08:06:32.886" v="298" actId="20577"/>
+      <pc:docMkLst>
+        <pc:docMk/>
+      </pc:docMkLst>
+      <pc:sldChg chg="modSp">
+        <pc:chgData name="ŠPIONJAK Tadej (STD)" userId="S::tadej.spionjak@edu.vs.ch::65c42695-ef25-4ae5-8123-204466087ecd" providerId="AD" clId="Web-{918DEC33-A8E2-5D84-CA76-58650E82AC50}" dt="2026-02-11T07:54:07.736" v="7" actId="20577"/>
+        <pc:sldMkLst>
+          <pc:docMk/>
+          <pc:sldMk cId="2029217326" sldId="256"/>
+        </pc:sldMkLst>
+        <pc:spChg chg="mod">
+          <ac:chgData name="ŠPIONJAK Tadej (STD)" userId="S::tadej.spionjak@edu.vs.ch::65c42695-ef25-4ae5-8123-204466087ecd" providerId="AD" clId="Web-{918DEC33-A8E2-5D84-CA76-58650E82AC50}" dt="2026-02-11T07:54:07.736" v="7" actId="20577"/>
+          <ac:spMkLst>
+            <pc:docMk/>
+            <pc:sldMk cId="2029217326" sldId="256"/>
+            <ac:spMk id="2" creationId="{744A0D3F-507C-F9EE-F752-69059CCD8BEB}"/>
+          </ac:spMkLst>
+        </pc:spChg>
+      </pc:sldChg>
+      <pc:sldChg chg="modSp">
+        <pc:chgData name="ŠPIONJAK Tadej (STD)" userId="S::tadej.spionjak@edu.vs.ch::65c42695-ef25-4ae5-8123-204466087ecd" providerId="AD" clId="Web-{918DEC33-A8E2-5D84-CA76-58650E82AC50}" dt="2026-02-11T08:02:44.602" v="137" actId="20577"/>
+        <pc:sldMkLst>
+          <pc:docMk/>
+          <pc:sldMk cId="4019893897" sldId="257"/>
+        </pc:sldMkLst>
+        <pc:spChg chg="mod">
+          <ac:chgData name="ŠPIONJAK Tadej (STD)" userId="S::tadej.spionjak@edu.vs.ch::65c42695-ef25-4ae5-8123-204466087ecd" providerId="AD" clId="Web-{918DEC33-A8E2-5D84-CA76-58650E82AC50}" dt="2026-02-11T08:02:13.321" v="77" actId="20577"/>
+          <ac:spMkLst>
+            <pc:docMk/>
+            <pc:sldMk cId="4019893897" sldId="257"/>
+            <ac:spMk id="2" creationId="{4C692BE9-8C30-670D-2F7C-DF1A66FF0829}"/>
+          </ac:spMkLst>
+        </pc:spChg>
+        <pc:spChg chg="mod">
+          <ac:chgData name="ŠPIONJAK Tadej (STD)" userId="S::tadej.spionjak@edu.vs.ch::65c42695-ef25-4ae5-8123-204466087ecd" providerId="AD" clId="Web-{918DEC33-A8E2-5D84-CA76-58650E82AC50}" dt="2026-02-11T08:02:44.602" v="137" actId="20577"/>
+          <ac:spMkLst>
+            <pc:docMk/>
+            <pc:sldMk cId="4019893897" sldId="257"/>
+            <ac:spMk id="3" creationId="{8C2E2611-94B1-0136-17CD-48A7DC2FA698}"/>
+          </ac:spMkLst>
+        </pc:spChg>
+      </pc:sldChg>
+      <pc:sldChg chg="modSp ord">
+        <pc:chgData name="ŠPIONJAK Tadej (STD)" userId="S::tadej.spionjak@edu.vs.ch::65c42695-ef25-4ae5-8123-204466087ecd" providerId="AD" clId="Web-{918DEC33-A8E2-5D84-CA76-58650E82AC50}" dt="2026-02-11T08:01:49.430" v="54" actId="20577"/>
+        <pc:sldMkLst>
+          <pc:docMk/>
+          <pc:sldMk cId="4025588667" sldId="258"/>
+        </pc:sldMkLst>
+        <pc:spChg chg="mod">
+          <ac:chgData name="ŠPIONJAK Tadej (STD)" userId="S::tadej.spionjak@edu.vs.ch::65c42695-ef25-4ae5-8123-204466087ecd" providerId="AD" clId="Web-{918DEC33-A8E2-5D84-CA76-58650E82AC50}" dt="2026-02-11T08:01:49.430" v="54" actId="20577"/>
+          <ac:spMkLst>
+            <pc:docMk/>
+            <pc:sldMk cId="4025588667" sldId="258"/>
+            <ac:spMk id="2" creationId="{318F1F6D-40C5-1BD9-423A-1B72E93E2327}"/>
+          </ac:spMkLst>
+        </pc:spChg>
+      </pc:sldChg>
+      <pc:sldChg chg="del">
+        <pc:chgData name="ŠPIONJAK Tadej (STD)" userId="S::tadej.spionjak@edu.vs.ch::65c42695-ef25-4ae5-8123-204466087ecd" providerId="AD" clId="Web-{918DEC33-A8E2-5D84-CA76-58650E82AC50}" dt="2026-02-11T08:03:43.618" v="186"/>
+        <pc:sldMkLst>
+          <pc:docMk/>
+          <pc:sldMk cId="2961897491" sldId="259"/>
+        </pc:sldMkLst>
+      </pc:sldChg>
+      <pc:sldChg chg="del">
+        <pc:chgData name="ŠPIONJAK Tadej (STD)" userId="S::tadej.spionjak@edu.vs.ch::65c42695-ef25-4ae5-8123-204466087ecd" providerId="AD" clId="Web-{918DEC33-A8E2-5D84-CA76-58650E82AC50}" dt="2026-02-11T08:03:44.353" v="187"/>
+        <pc:sldMkLst>
+          <pc:docMk/>
+          <pc:sldMk cId="216781419" sldId="260"/>
+        </pc:sldMkLst>
+      </pc:sldChg>
+      <pc:sldChg chg="del">
+        <pc:chgData name="ŠPIONJAK Tadej (STD)" userId="S::tadej.spionjak@edu.vs.ch::65c42695-ef25-4ae5-8123-204466087ecd" providerId="AD" clId="Web-{918DEC33-A8E2-5D84-CA76-58650E82AC50}" dt="2026-02-11T08:03:41.587" v="184"/>
+        <pc:sldMkLst>
+          <pc:docMk/>
+          <pc:sldMk cId="1478531844" sldId="261"/>
+        </pc:sldMkLst>
+      </pc:sldChg>
+      <pc:sldChg chg="del">
+        <pc:chgData name="ŠPIONJAK Tadej (STD)" userId="S::tadej.spionjak@edu.vs.ch::65c42695-ef25-4ae5-8123-204466087ecd" providerId="AD" clId="Web-{918DEC33-A8E2-5D84-CA76-58650E82AC50}" dt="2026-02-11T08:03:42.478" v="185"/>
+        <pc:sldMkLst>
+          <pc:docMk/>
+          <pc:sldMk cId="1287495847" sldId="262"/>
+        </pc:sldMkLst>
+      </pc:sldChg>
+      <pc:sldChg chg="modSp new">
+        <pc:chgData name="ŠPIONJAK Tadej (STD)" userId="S::tadej.spionjak@edu.vs.ch::65c42695-ef25-4ae5-8123-204466087ecd" providerId="AD" clId="Web-{918DEC33-A8E2-5D84-CA76-58650E82AC50}" dt="2026-02-11T07:57:33.335" v="17" actId="20577"/>
+        <pc:sldMkLst>
+          <pc:docMk/>
+          <pc:sldMk cId="457691454" sldId="263"/>
+        </pc:sldMkLst>
+        <pc:spChg chg="mod">
+          <ac:chgData name="ŠPIONJAK Tadej (STD)" userId="S::tadej.spionjak@edu.vs.ch::65c42695-ef25-4ae5-8123-204466087ecd" providerId="AD" clId="Web-{918DEC33-A8E2-5D84-CA76-58650E82AC50}" dt="2026-02-11T07:57:33.335" v="17" actId="20577"/>
+          <ac:spMkLst>
+            <pc:docMk/>
+            <pc:sldMk cId="457691454" sldId="263"/>
+            <ac:spMk id="2" creationId="{80FD0B04-68E0-2ACA-2FCA-3336E5FA4BE4}"/>
+          </ac:spMkLst>
+        </pc:spChg>
+      </pc:sldChg>
+      <pc:sldChg chg="modSp new">
+        <pc:chgData name="ŠPIONJAK Tadej (STD)" userId="S::tadej.spionjak@edu.vs.ch::65c42695-ef25-4ae5-8123-204466087ecd" providerId="AD" clId="Web-{918DEC33-A8E2-5D84-CA76-58650E82AC50}" dt="2026-02-11T08:03:40.525" v="183" actId="20577"/>
+        <pc:sldMkLst>
+          <pc:docMk/>
+          <pc:sldMk cId="2396213657" sldId="264"/>
+        </pc:sldMkLst>
+        <pc:spChg chg="mod">
+          <ac:chgData name="ŠPIONJAK Tadej (STD)" userId="S::tadej.spionjak@edu.vs.ch::65c42695-ef25-4ae5-8123-204466087ecd" providerId="AD" clId="Web-{918DEC33-A8E2-5D84-CA76-58650E82AC50}" dt="2026-02-11T08:03:40.525" v="183" actId="20577"/>
+          <ac:spMkLst>
+            <pc:docMk/>
+            <pc:sldMk cId="2396213657" sldId="264"/>
+            <ac:spMk id="2" creationId="{3DB50063-4FF0-00D5-65F4-4D9CE7CEBEA7}"/>
+          </ac:spMkLst>
+        </pc:spChg>
+      </pc:sldChg>
+      <pc:sldChg chg="modSp new">
+        <pc:chgData name="ŠPIONJAK Tadej (STD)" userId="S::tadej.spionjak@edu.vs.ch::65c42695-ef25-4ae5-8123-204466087ecd" providerId="AD" clId="Web-{918DEC33-A8E2-5D84-CA76-58650E82AC50}" dt="2026-02-11T08:05:33.042" v="221" actId="20577"/>
+        <pc:sldMkLst>
+          <pc:docMk/>
+          <pc:sldMk cId="297389937" sldId="265"/>
+        </pc:sldMkLst>
+        <pc:spChg chg="mod">
+          <ac:chgData name="ŠPIONJAK Tadej (STD)" userId="S::tadej.spionjak@edu.vs.ch::65c42695-ef25-4ae5-8123-204466087ecd" providerId="AD" clId="Web-{918DEC33-A8E2-5D84-CA76-58650E82AC50}" dt="2026-02-11T08:05:08.198" v="220" actId="20577"/>
+          <ac:spMkLst>
+            <pc:docMk/>
+            <pc:sldMk cId="297389937" sldId="265"/>
+            <ac:spMk id="2" creationId="{F561AD8C-36DD-7829-BD8E-DA31B4195134}"/>
+          </ac:spMkLst>
+        </pc:spChg>
+        <pc:spChg chg="mod">
+          <ac:chgData name="ŠPIONJAK Tadej (STD)" userId="S::tadej.spionjak@edu.vs.ch::65c42695-ef25-4ae5-8123-204466087ecd" providerId="AD" clId="Web-{918DEC33-A8E2-5D84-CA76-58650E82AC50}" dt="2026-02-11T08:05:33.042" v="221" actId="20577"/>
+          <ac:spMkLst>
+            <pc:docMk/>
+            <pc:sldMk cId="297389937" sldId="265"/>
+            <ac:spMk id="3" creationId="{5C0E5C13-2F42-8335-E515-AB0AED9C2F34}"/>
+          </ac:spMkLst>
+        </pc:spChg>
+      </pc:sldChg>
+      <pc:sldChg chg="modSp new del">
+        <pc:chgData name="ŠPIONJAK Tadej (STD)" userId="S::tadej.spionjak@edu.vs.ch::65c42695-ef25-4ae5-8123-204466087ecd" providerId="AD" clId="Web-{918DEC33-A8E2-5D84-CA76-58650E82AC50}" dt="2026-02-11T08:03:16.680" v="167"/>
+        <pc:sldMkLst>
+          <pc:docMk/>
+          <pc:sldMk cId="2196810591" sldId="265"/>
+        </pc:sldMkLst>
+        <pc:spChg chg="mod">
+          <ac:chgData name="ŠPIONJAK Tadej (STD)" userId="S::tadej.spionjak@edu.vs.ch::65c42695-ef25-4ae5-8123-204466087ecd" providerId="AD" clId="Web-{918DEC33-A8E2-5D84-CA76-58650E82AC50}" dt="2026-02-11T08:03:12.399" v="166" actId="20577"/>
+          <ac:spMkLst>
+            <pc:docMk/>
+            <pc:sldMk cId="2196810591" sldId="265"/>
+            <ac:spMk id="2" creationId="{DF9796E8-3CBA-B547-836B-E35F03820CA7}"/>
+          </ac:spMkLst>
+        </pc:spChg>
+      </pc:sldChg>
+      <pc:sldChg chg="modSp new">
+        <pc:chgData name="ŠPIONJAK Tadej (STD)" userId="S::tadej.spionjak@edu.vs.ch::65c42695-ef25-4ae5-8123-204466087ecd" providerId="AD" clId="Web-{918DEC33-A8E2-5D84-CA76-58650E82AC50}" dt="2026-02-11T08:05:48.823" v="244" actId="20577"/>
+        <pc:sldMkLst>
+          <pc:docMk/>
+          <pc:sldMk cId="2624086703" sldId="266"/>
+        </pc:sldMkLst>
+        <pc:spChg chg="mod">
+          <ac:chgData name="ŠPIONJAK Tadej (STD)" userId="S::tadej.spionjak@edu.vs.ch::65c42695-ef25-4ae5-8123-204466087ecd" providerId="AD" clId="Web-{918DEC33-A8E2-5D84-CA76-58650E82AC50}" dt="2026-02-11T08:05:48.823" v="244" actId="20577"/>
+          <ac:spMkLst>
+            <pc:docMk/>
+            <pc:sldMk cId="2624086703" sldId="266"/>
+            <ac:spMk id="2" creationId="{1E28AFB1-8A7A-B172-D7B1-90A824228172}"/>
+          </ac:spMkLst>
+        </pc:spChg>
+      </pc:sldChg>
+      <pc:sldChg chg="modSp new">
+        <pc:chgData name="ŠPIONJAK Tadej (STD)" userId="S::tadej.spionjak@edu.vs.ch::65c42695-ef25-4ae5-8123-204466087ecd" providerId="AD" clId="Web-{918DEC33-A8E2-5D84-CA76-58650E82AC50}" dt="2026-02-11T08:06:07.386" v="264" actId="20577"/>
+        <pc:sldMkLst>
+          <pc:docMk/>
+          <pc:sldMk cId="761157137" sldId="267"/>
+        </pc:sldMkLst>
+        <pc:spChg chg="mod">
+          <ac:chgData name="ŠPIONJAK Tadej (STD)" userId="S::tadej.spionjak@edu.vs.ch::65c42695-ef25-4ae5-8123-204466087ecd" providerId="AD" clId="Web-{918DEC33-A8E2-5D84-CA76-58650E82AC50}" dt="2026-02-11T08:06:07.386" v="264" actId="20577"/>
+          <ac:spMkLst>
+            <pc:docMk/>
+            <pc:sldMk cId="761157137" sldId="267"/>
+            <ac:spMk id="2" creationId="{112B59C9-D7A8-0317-1968-38B52CCB7530}"/>
+          </ac:spMkLst>
+        </pc:spChg>
+      </pc:sldChg>
+      <pc:sldChg chg="modSp new">
+        <pc:chgData name="ŠPIONJAK Tadej (STD)" userId="S::tadej.spionjak@edu.vs.ch::65c42695-ef25-4ae5-8123-204466087ecd" providerId="AD" clId="Web-{918DEC33-A8E2-5D84-CA76-58650E82AC50}" dt="2026-02-11T08:06:19.245" v="272" actId="20577"/>
+        <pc:sldMkLst>
+          <pc:docMk/>
+          <pc:sldMk cId="4211665210" sldId="268"/>
+        </pc:sldMkLst>
+        <pc:spChg chg="mod">
+          <ac:chgData name="ŠPIONJAK Tadej (STD)" userId="S::tadej.spionjak@edu.vs.ch::65c42695-ef25-4ae5-8123-204466087ecd" providerId="AD" clId="Web-{918DEC33-A8E2-5D84-CA76-58650E82AC50}" dt="2026-02-11T08:06:19.245" v="272" actId="20577"/>
+          <ac:spMkLst>
+            <pc:docMk/>
+            <pc:sldMk cId="4211665210" sldId="268"/>
+            <ac:spMk id="2" creationId="{AFF46E95-2E97-E61B-88B9-6E1A97F1EF1D}"/>
+          </ac:spMkLst>
+        </pc:spChg>
+      </pc:sldChg>
+      <pc:sldChg chg="modSp new">
+        <pc:chgData name="ŠPIONJAK Tadej (STD)" userId="S::tadej.spionjak@edu.vs.ch::65c42695-ef25-4ae5-8123-204466087ecd" providerId="AD" clId="Web-{918DEC33-A8E2-5D84-CA76-58650E82AC50}" dt="2026-02-11T08:06:32.886" v="298" actId="20577"/>
+        <pc:sldMkLst>
+          <pc:docMk/>
+          <pc:sldMk cId="991167436" sldId="269"/>
+        </pc:sldMkLst>
+        <pc:spChg chg="mod">
+          <ac:chgData name="ŠPIONJAK Tadej (STD)" userId="S::tadej.spionjak@edu.vs.ch::65c42695-ef25-4ae5-8123-204466087ecd" providerId="AD" clId="Web-{918DEC33-A8E2-5D84-CA76-58650E82AC50}" dt="2026-02-11T08:06:32.886" v="298" actId="20577"/>
+          <ac:spMkLst>
+            <pc:docMk/>
+            <pc:sldMk cId="991167436" sldId="269"/>
+            <ac:spMk id="2" creationId="{1429A97F-47BB-2EB8-B91D-07FC48C2C457}"/>
+          </ac:spMkLst>
+        </pc:spChg>
+      </pc:sldChg>
+    </pc:docChg>
+  </pc:docChgLst>
+  <pc:docChgLst>
+    <pc:chgData name="ANTHAMATTEN Elia (STD)" userId="de2ee9bd-2372-4e59-8057-983727246ceb" providerId="ADAL" clId="{1288FD62-7F38-4A17-9B9B-563BBA360915}"/>
+    <pc:docChg chg="custSel addSld modSld sldOrd">
+      <pc:chgData name="ANTHAMATTEN Elia (STD)" userId="de2ee9bd-2372-4e59-8057-983727246ceb" providerId="ADAL" clId="{1288FD62-7F38-4A17-9B9B-563BBA360915}" dt="2026-02-11T07:50:43.287" v="87" actId="20577"/>
+      <pc:docMkLst>
+        <pc:docMk/>
+      </pc:docMkLst>
+      <pc:sldChg chg="modSp new mod">
+        <pc:chgData name="ANTHAMATTEN Elia (STD)" userId="de2ee9bd-2372-4e59-8057-983727246ceb" providerId="ADAL" clId="{1288FD62-7F38-4A17-9B9B-563BBA360915}" dt="2026-02-11T07:40:19.464" v="21" actId="20577"/>
+        <pc:sldMkLst>
+          <pc:docMk/>
+          <pc:sldMk cId="4019893897" sldId="257"/>
+        </pc:sldMkLst>
+        <pc:spChg chg="mod">
+          <ac:chgData name="ANTHAMATTEN Elia (STD)" userId="de2ee9bd-2372-4e59-8057-983727246ceb" providerId="ADAL" clId="{1288FD62-7F38-4A17-9B9B-563BBA360915}" dt="2026-02-11T07:40:19.464" v="21" actId="20577"/>
+          <ac:spMkLst>
+            <pc:docMk/>
+            <pc:sldMk cId="4019893897" sldId="257"/>
+            <ac:spMk id="2" creationId="{4C692BE9-8C30-670D-2F7C-DF1A66FF0829}"/>
+          </ac:spMkLst>
+        </pc:spChg>
+      </pc:sldChg>
+      <pc:sldChg chg="modSp new mod">
+        <pc:chgData name="ANTHAMATTEN Elia (STD)" userId="de2ee9bd-2372-4e59-8057-983727246ceb" providerId="ADAL" clId="{1288FD62-7F38-4A17-9B9B-563BBA360915}" dt="2026-02-11T07:40:45.578" v="27" actId="20577"/>
+        <pc:sldMkLst>
+          <pc:docMk/>
+          <pc:sldMk cId="4025588667" sldId="258"/>
+        </pc:sldMkLst>
+        <pc:spChg chg="mod">
+          <ac:chgData name="ANTHAMATTEN Elia (STD)" userId="de2ee9bd-2372-4e59-8057-983727246ceb" providerId="ADAL" clId="{1288FD62-7F38-4A17-9B9B-563BBA360915}" dt="2026-02-11T07:40:45.578" v="27" actId="20577"/>
+          <ac:spMkLst>
+            <pc:docMk/>
+            <pc:sldMk cId="4025588667" sldId="258"/>
+            <ac:spMk id="2" creationId="{318F1F6D-40C5-1BD9-423A-1B72E93E2327}"/>
+          </ac:spMkLst>
+        </pc:spChg>
+      </pc:sldChg>
+      <pc:sldChg chg="modSp new mod">
+        <pc:chgData name="ANTHAMATTEN Elia (STD)" userId="de2ee9bd-2372-4e59-8057-983727246ceb" providerId="ADAL" clId="{1288FD62-7F38-4A17-9B9B-563BBA360915}" dt="2026-02-11T07:41:24.797" v="41" actId="20577"/>
+        <pc:sldMkLst>
+          <pc:docMk/>
+          <pc:sldMk cId="2961897491" sldId="259"/>
+        </pc:sldMkLst>
+        <pc:spChg chg="mod">
+          <ac:chgData name="ANTHAMATTEN Elia (STD)" userId="de2ee9bd-2372-4e59-8057-983727246ceb" providerId="ADAL" clId="{1288FD62-7F38-4A17-9B9B-563BBA360915}" dt="2026-02-11T07:41:24.797" v="41" actId="20577"/>
+          <ac:spMkLst>
+            <pc:docMk/>
+            <pc:sldMk cId="2961897491" sldId="259"/>
+            <ac:spMk id="2" creationId="{8461C079-D0FD-3993-2767-40BBB60EAAAF}"/>
+          </ac:spMkLst>
+        </pc:spChg>
+      </pc:sldChg>
+      <pc:sldChg chg="modSp new mod">
+        <pc:chgData name="ANTHAMATTEN Elia (STD)" userId="de2ee9bd-2372-4e59-8057-983727246ceb" providerId="ADAL" clId="{1288FD62-7F38-4A17-9B9B-563BBA360915}" dt="2026-02-11T07:42:58.623" v="48" actId="20577"/>
+        <pc:sldMkLst>
+          <pc:docMk/>
+          <pc:sldMk cId="216781419" sldId="260"/>
+        </pc:sldMkLst>
+        <pc:spChg chg="mod">
+          <ac:chgData name="ANTHAMATTEN Elia (STD)" userId="de2ee9bd-2372-4e59-8057-983727246ceb" providerId="ADAL" clId="{1288FD62-7F38-4A17-9B9B-563BBA360915}" dt="2026-02-11T07:42:58.623" v="48" actId="20577"/>
+          <ac:spMkLst>
+            <pc:docMk/>
+            <pc:sldMk cId="216781419" sldId="260"/>
+            <ac:spMk id="2" creationId="{5190FB22-4AED-DD55-E2A7-4C202C6A7395}"/>
+          </ac:spMkLst>
+        </pc:spChg>
+      </pc:sldChg>
+      <pc:sldChg chg="modSp new mod">
+        <pc:chgData name="ANTHAMATTEN Elia (STD)" userId="de2ee9bd-2372-4e59-8057-983727246ceb" providerId="ADAL" clId="{1288FD62-7F38-4A17-9B9B-563BBA360915}" dt="2026-02-11T07:49:20.487" v="65" actId="20577"/>
+        <pc:sldMkLst>
+          <pc:docMk/>
+          <pc:sldMk cId="1478531844" sldId="261"/>
+        </pc:sldMkLst>
+        <pc:spChg chg="mod">
+          <ac:chgData name="ANTHAMATTEN Elia (STD)" userId="de2ee9bd-2372-4e59-8057-983727246ceb" providerId="ADAL" clId="{1288FD62-7F38-4A17-9B9B-563BBA360915}" dt="2026-02-11T07:49:20.487" v="65" actId="20577"/>
+          <ac:spMkLst>
+            <pc:docMk/>
+            <pc:sldMk cId="1478531844" sldId="261"/>
+            <ac:spMk id="2" creationId="{7E9DCE9B-B8F2-F4AE-993C-BFF09D8EAD3F}"/>
+          </ac:spMkLst>
+        </pc:spChg>
+      </pc:sldChg>
+      <pc:sldChg chg="modSp new mod ord">
+        <pc:chgData name="ANTHAMATTEN Elia (STD)" userId="de2ee9bd-2372-4e59-8057-983727246ceb" providerId="ADAL" clId="{1288FD62-7F38-4A17-9B9B-563BBA360915}" dt="2026-02-11T07:50:43.287" v="87" actId="20577"/>
+        <pc:sldMkLst>
+          <pc:docMk/>
+          <pc:sldMk cId="1287495847" sldId="262"/>
+        </pc:sldMkLst>
+        <pc:spChg chg="mod">
+          <ac:chgData name="ANTHAMATTEN Elia (STD)" userId="de2ee9bd-2372-4e59-8057-983727246ceb" providerId="ADAL" clId="{1288FD62-7F38-4A17-9B9B-563BBA360915}" dt="2026-02-11T07:50:43.287" v="87" actId="20577"/>
+          <ac:spMkLst>
+            <pc:docMk/>
+            <pc:sldMk cId="1287495847" sldId="262"/>
+            <ac:spMk id="2" creationId="{247F65E4-99AE-9F05-F841-F6B2844D15AF}"/>
+          </ac:spMkLst>
+        </pc:spChg>
+      </pc:sldChg>
+    </pc:docChg>
+  </pc:docChgLst>
+</pc:chgInfo>
+</file>
+
 <file path=ppt/slideLayouts/slideLayout1.xml><?xml version="1.0" encoding="utf-8"?>
 <p:sldLayout xmlns:a="http://schemas.openxmlformats.org/drawingml/2006/main" xmlns:r="http://schemas.openxmlformats.org/officeDocument/2006/relationships" xmlns:p="http://schemas.openxmlformats.org/presentationml/2006/main" type="title" preserve="1">
   <p:cSld name="Titelfolie">
@@ -310,7 +649,7 @@
           <a:p>
             <a:fld id="{D7696558-CB45-4C08-9B26-34B99B57B641}" type="slidenum">
               <a:rPr lang="de-CH" smtClean="0"/>
-              <a:t>‹Nr.›</a:t>
+              <a:t>‹#›</a:t>
             </a:fld>
             <a:endParaRPr lang="de-CH"/>
           </a:p>
@@ -510,7 +849,7 @@
           <a:p>
             <a:fld id="{D7696558-CB45-4C08-9B26-34B99B57B641}" type="slidenum">
               <a:rPr lang="de-CH" smtClean="0"/>
-              <a:t>‹Nr.›</a:t>
+              <a:t>‹#›</a:t>
             </a:fld>
             <a:endParaRPr lang="de-CH"/>
           </a:p>
@@ -720,7 +1059,7 @@
           <a:p>
             <a:fld id="{D7696558-CB45-4C08-9B26-34B99B57B641}" type="slidenum">
               <a:rPr lang="de-CH" smtClean="0"/>
-              <a:t>‹Nr.›</a:t>
+              <a:t>‹#›</a:t>
             </a:fld>
             <a:endParaRPr lang="de-CH"/>
           </a:p>
@@ -920,7 +1259,7 @@
           <a:p>
             <a:fld id="{D7696558-CB45-4C08-9B26-34B99B57B641}" type="slidenum">
               <a:rPr lang="de-CH" smtClean="0"/>
-              <a:t>‹Nr.›</a:t>
+              <a:t>‹#›</a:t>
             </a:fld>
             <a:endParaRPr lang="de-CH"/>
           </a:p>
@@ -1196,7 +1535,7 @@
           <a:p>
             <a:fld id="{D7696558-CB45-4C08-9B26-34B99B57B641}" type="slidenum">
               <a:rPr lang="de-CH" smtClean="0"/>
-              <a:t>‹Nr.›</a:t>
+              <a:t>‹#›</a:t>
             </a:fld>
             <a:endParaRPr lang="de-CH"/>
           </a:p>
@@ -1464,7 +1803,7 @@
           <a:p>
             <a:fld id="{D7696558-CB45-4C08-9B26-34B99B57B641}" type="slidenum">
               <a:rPr lang="de-CH" smtClean="0"/>
-              <a:t>‹Nr.›</a:t>
+              <a:t>‹#›</a:t>
             </a:fld>
             <a:endParaRPr lang="de-CH"/>
           </a:p>
@@ -1879,7 +2218,7 @@
           <a:p>
             <a:fld id="{D7696558-CB45-4C08-9B26-34B99B57B641}" type="slidenum">
               <a:rPr lang="de-CH" smtClean="0"/>
-              <a:t>‹Nr.›</a:t>
+              <a:t>‹#›</a:t>
             </a:fld>
             <a:endParaRPr lang="de-CH"/>
           </a:p>
@@ -2021,7 +2360,7 @@
           <a:p>
             <a:fld id="{D7696558-CB45-4C08-9B26-34B99B57B641}" type="slidenum">
               <a:rPr lang="de-CH" smtClean="0"/>
-              <a:t>‹Nr.›</a:t>
+              <a:t>‹#›</a:t>
             </a:fld>
             <a:endParaRPr lang="de-CH"/>
           </a:p>
@@ -2134,7 +2473,7 @@
           <a:p>
             <a:fld id="{D7696558-CB45-4C08-9B26-34B99B57B641}" type="slidenum">
               <a:rPr lang="de-CH" smtClean="0"/>
-              <a:t>‹Nr.›</a:t>
+              <a:t>‹#›</a:t>
             </a:fld>
             <a:endParaRPr lang="de-CH"/>
           </a:p>
@@ -2447,7 +2786,7 @@
           <a:p>
             <a:fld id="{D7696558-CB45-4C08-9B26-34B99B57B641}" type="slidenum">
               <a:rPr lang="de-CH" smtClean="0"/>
-              <a:t>‹Nr.›</a:t>
+              <a:t>‹#›</a:t>
             </a:fld>
             <a:endParaRPr lang="de-CH"/>
           </a:p>
@@ -2736,7 +3075,7 @@
           <a:p>
             <a:fld id="{D7696558-CB45-4C08-9B26-34B99B57B641}" type="slidenum">
               <a:rPr lang="de-CH" smtClean="0"/>
-              <a:t>‹Nr.›</a:t>
+              <a:t>‹#›</a:t>
             </a:fld>
             <a:endParaRPr lang="de-CH"/>
           </a:p>
@@ -3015,7 +3354,7 @@
           <a:p>
             <a:fld id="{D7696558-CB45-4C08-9B26-34B99B57B641}" type="slidenum">
               <a:rPr lang="de-CH" smtClean="0"/>
-              <a:t>‹Nr.›</a:t>
+              <a:t>‹#›</a:t>
             </a:fld>
             <a:endParaRPr lang="de-CH"/>
           </a:p>
@@ -3365,7 +3704,7 @@
           <a:p>
             <a:r>
               <a:rPr lang="de-CH"/>
-              <a:t>VR Game</a:t>
+              <a:t>VR Game(Name)</a:t>
             </a:r>
           </a:p>
         </p:txBody>
@@ -3391,6 +3730,22 @@
           <a:bodyPr/>
           <a:lstStyle/>
           <a:p>
+            <a:r>
+              <a:rPr lang="de-CH"/>
+              <a:t>Elia, Tadej, Ben, </a:t>
+            </a:r>
+            <a:r>
+              <a:rPr lang="de-CH" err="1"/>
+              <a:t>Aurelien</a:t>
+            </a:r>
+            <a:r>
+              <a:rPr lang="de-CH"/>
+              <a:t>, </a:t>
+            </a:r>
+            <a:r>
+              <a:rPr lang="de-CH" err="1"/>
+              <a:t>Safal</a:t>
+            </a:r>
             <a:endParaRPr lang="de-CH"/>
           </a:p>
         </p:txBody>
@@ -3399,6 +3754,866 @@
     <p:extLst>
       <p:ext uri="{BB962C8B-B14F-4D97-AF65-F5344CB8AC3E}">
         <p14:creationId xmlns:p14="http://schemas.microsoft.com/office/powerpoint/2010/main" val="2029217326"/>
+      </p:ext>
+    </p:extLst>
+  </p:cSld>
+  <p:clrMapOvr>
+    <a:masterClrMapping/>
+  </p:clrMapOvr>
+</p:sld>
+</file>
+
+<file path=ppt/slides/slide10.xml><?xml version="1.0" encoding="utf-8"?>
+<p:sld xmlns:a="http://schemas.openxmlformats.org/drawingml/2006/main" xmlns:r="http://schemas.openxmlformats.org/officeDocument/2006/relationships" xmlns:p="http://schemas.openxmlformats.org/presentationml/2006/main">
+  <p:cSld>
+    <p:spTree>
+      <p:nvGrpSpPr>
+        <p:cNvPr id="1" name=""/>
+        <p:cNvGrpSpPr/>
+        <p:nvPr/>
+      </p:nvGrpSpPr>
+      <p:grpSpPr>
+        <a:xfrm>
+          <a:off x="0" y="0"/>
+          <a:ext cx="0" cy="0"/>
+          <a:chOff x="0" y="0"/>
+          <a:chExt cx="0" cy="0"/>
+        </a:xfrm>
+      </p:grpSpPr>
+      <p:sp>
+        <p:nvSpPr>
+          <p:cNvPr id="2" name="Title 1">
+            <a:extLst>
+              <a:ext uri="{FF2B5EF4-FFF2-40B4-BE49-F238E27FC236}">
+                <a16:creationId xmlns:a16="http://schemas.microsoft.com/office/drawing/2014/main" id="{1429A97F-47BB-2EB8-B91D-07FC48C2C457}"/>
+              </a:ext>
+            </a:extLst>
+          </p:cNvPr>
+          <p:cNvSpPr>
+            <a:spLocks noGrp="1"/>
+          </p:cNvSpPr>
+          <p:nvPr>
+            <p:ph type="title"/>
+          </p:nvPr>
+        </p:nvSpPr>
+        <p:spPr/>
+        <p:txBody>
+          <a:bodyPr/>
+          <a:lstStyle/>
+          <a:p>
+            <a:r>
+              <a:rPr lang="en-US"/>
+              <a:t>Was </a:t>
+            </a:r>
+            <a:r>
+              <a:rPr lang="en-US" err="1"/>
+              <a:t>würden</a:t>
+            </a:r>
+            <a:r>
+              <a:rPr lang="en-US"/>
+              <a:t> </a:t>
+            </a:r>
+            <a:r>
+              <a:rPr lang="en-US" err="1"/>
+              <a:t>wir</a:t>
+            </a:r>
+            <a:r>
+              <a:rPr lang="en-US"/>
+              <a:t> </a:t>
+            </a:r>
+            <a:r>
+              <a:rPr lang="en-US" err="1"/>
+              <a:t>anders</a:t>
+            </a:r>
+            <a:r>
+              <a:rPr lang="en-US"/>
+              <a:t> </a:t>
+            </a:r>
+            <a:r>
+              <a:rPr lang="en-US" err="1"/>
+              <a:t>machen</a:t>
+            </a:r>
+            <a:r>
+              <a:rPr lang="en-US"/>
+              <a:t>?</a:t>
+            </a:r>
+          </a:p>
+        </p:txBody>
+      </p:sp>
+      <p:sp>
+        <p:nvSpPr>
+          <p:cNvPr id="3" name="Content Placeholder 2">
+            <a:extLst>
+              <a:ext uri="{FF2B5EF4-FFF2-40B4-BE49-F238E27FC236}">
+                <a16:creationId xmlns:a16="http://schemas.microsoft.com/office/drawing/2014/main" id="{C322F353-13D9-4C37-0D57-9E91B9047B6D}"/>
+              </a:ext>
+            </a:extLst>
+          </p:cNvPr>
+          <p:cNvSpPr>
+            <a:spLocks noGrp="1"/>
+          </p:cNvSpPr>
+          <p:nvPr>
+            <p:ph idx="1"/>
+          </p:nvPr>
+        </p:nvSpPr>
+        <p:spPr/>
+        <p:txBody>
+          <a:bodyPr/>
+          <a:lstStyle/>
+          <a:p>
+            <a:endParaRPr lang="en-US"/>
+          </a:p>
+        </p:txBody>
+      </p:sp>
+    </p:spTree>
+    <p:extLst>
+      <p:ext uri="{BB962C8B-B14F-4D97-AF65-F5344CB8AC3E}">
+        <p14:creationId xmlns:p14="http://schemas.microsoft.com/office/powerpoint/2010/main" val="991167436"/>
+      </p:ext>
+    </p:extLst>
+  </p:cSld>
+  <p:clrMapOvr>
+    <a:masterClrMapping/>
+  </p:clrMapOvr>
+</p:sld>
+</file>
+
+<file path=ppt/slides/slide2.xml><?xml version="1.0" encoding="utf-8"?>
+<p:sld xmlns:a="http://schemas.openxmlformats.org/drawingml/2006/main" xmlns:r="http://schemas.openxmlformats.org/officeDocument/2006/relationships" xmlns:p="http://schemas.openxmlformats.org/presentationml/2006/main">
+  <p:cSld>
+    <p:spTree>
+      <p:nvGrpSpPr>
+        <p:cNvPr id="1" name=""/>
+        <p:cNvGrpSpPr/>
+        <p:nvPr/>
+      </p:nvGrpSpPr>
+      <p:grpSpPr>
+        <a:xfrm>
+          <a:off x="0" y="0"/>
+          <a:ext cx="0" cy="0"/>
+          <a:chOff x="0" y="0"/>
+          <a:chExt cx="0" cy="0"/>
+        </a:xfrm>
+      </p:grpSpPr>
+      <p:sp>
+        <p:nvSpPr>
+          <p:cNvPr id="2" name="Title 1">
+            <a:extLst>
+              <a:ext uri="{FF2B5EF4-FFF2-40B4-BE49-F238E27FC236}">
+                <a16:creationId xmlns:a16="http://schemas.microsoft.com/office/drawing/2014/main" id="{80FD0B04-68E0-2ACA-2FCA-3336E5FA4BE4}"/>
+              </a:ext>
+            </a:extLst>
+          </p:cNvPr>
+          <p:cNvSpPr>
+            <a:spLocks noGrp="1"/>
+          </p:cNvSpPr>
+          <p:nvPr>
+            <p:ph type="title"/>
+          </p:nvPr>
+        </p:nvSpPr>
+        <p:spPr/>
+        <p:txBody>
+          <a:bodyPr/>
+          <a:lstStyle/>
+          <a:p>
+            <a:r>
+              <a:rPr lang="en-US"/>
+              <a:t>Live-Demo</a:t>
+            </a:r>
+          </a:p>
+        </p:txBody>
+      </p:sp>
+      <p:sp>
+        <p:nvSpPr>
+          <p:cNvPr id="3" name="Content Placeholder 2">
+            <a:extLst>
+              <a:ext uri="{FF2B5EF4-FFF2-40B4-BE49-F238E27FC236}">
+                <a16:creationId xmlns:a16="http://schemas.microsoft.com/office/drawing/2014/main" id="{6005CFE2-6CFE-DEFC-4FED-736CF2D286F5}"/>
+              </a:ext>
+            </a:extLst>
+          </p:cNvPr>
+          <p:cNvSpPr>
+            <a:spLocks noGrp="1"/>
+          </p:cNvSpPr>
+          <p:nvPr>
+            <p:ph idx="1"/>
+          </p:nvPr>
+        </p:nvSpPr>
+        <p:spPr/>
+        <p:txBody>
+          <a:bodyPr/>
+          <a:lstStyle/>
+          <a:p>
+            <a:endParaRPr lang="en-US"/>
+          </a:p>
+        </p:txBody>
+      </p:sp>
+    </p:spTree>
+    <p:extLst>
+      <p:ext uri="{BB962C8B-B14F-4D97-AF65-F5344CB8AC3E}">
+        <p14:creationId xmlns:p14="http://schemas.microsoft.com/office/powerpoint/2010/main" val="457691454"/>
+      </p:ext>
+    </p:extLst>
+  </p:cSld>
+  <p:clrMapOvr>
+    <a:masterClrMapping/>
+  </p:clrMapOvr>
+</p:sld>
+</file>
+
+<file path=ppt/slides/slide3.xml><?xml version="1.0" encoding="utf-8"?>
+<p:sld xmlns:a="http://schemas.openxmlformats.org/drawingml/2006/main" xmlns:r="http://schemas.openxmlformats.org/officeDocument/2006/relationships" xmlns:p="http://schemas.openxmlformats.org/presentationml/2006/main">
+  <p:cSld>
+    <p:spTree>
+      <p:nvGrpSpPr>
+        <p:cNvPr id="1" name=""/>
+        <p:cNvGrpSpPr/>
+        <p:nvPr/>
+      </p:nvGrpSpPr>
+      <p:grpSpPr>
+        <a:xfrm>
+          <a:off x="0" y="0"/>
+          <a:ext cx="0" cy="0"/>
+          <a:chOff x="0" y="0"/>
+          <a:chExt cx="0" cy="0"/>
+        </a:xfrm>
+      </p:grpSpPr>
+      <p:sp>
+        <p:nvSpPr>
+          <p:cNvPr id="2" name="Titel 1">
+            <a:extLst>
+              <a:ext uri="{FF2B5EF4-FFF2-40B4-BE49-F238E27FC236}">
+                <a16:creationId xmlns:a16="http://schemas.microsoft.com/office/drawing/2014/main" id="{318F1F6D-40C5-1BD9-423A-1B72E93E2327}"/>
+              </a:ext>
+            </a:extLst>
+          </p:cNvPr>
+          <p:cNvSpPr>
+            <a:spLocks noGrp="1"/>
+          </p:cNvSpPr>
+          <p:nvPr>
+            <p:ph type="title"/>
+          </p:nvPr>
+        </p:nvSpPr>
+        <p:spPr/>
+        <p:txBody>
+          <a:bodyPr/>
+          <a:lstStyle/>
+          <a:p>
+            <a:r>
+              <a:rPr lang="de-CH"/>
+              <a:t>Tools (Gebraucht, Ungebraucht)</a:t>
+            </a:r>
+          </a:p>
+        </p:txBody>
+      </p:sp>
+      <p:sp>
+        <p:nvSpPr>
+          <p:cNvPr id="3" name="Inhaltsplatzhalter 2">
+            <a:extLst>
+              <a:ext uri="{FF2B5EF4-FFF2-40B4-BE49-F238E27FC236}">
+                <a16:creationId xmlns:a16="http://schemas.microsoft.com/office/drawing/2014/main" id="{CED2D7B6-A038-20F8-8D13-6A3B6506ABBD}"/>
+              </a:ext>
+            </a:extLst>
+          </p:cNvPr>
+          <p:cNvSpPr>
+            <a:spLocks noGrp="1"/>
+          </p:cNvSpPr>
+          <p:nvPr>
+            <p:ph idx="1"/>
+          </p:nvPr>
+        </p:nvSpPr>
+        <p:spPr/>
+        <p:txBody>
+          <a:bodyPr/>
+          <a:lstStyle/>
+          <a:p>
+            <a:endParaRPr lang="de-CH"/>
+          </a:p>
+        </p:txBody>
+      </p:sp>
+    </p:spTree>
+    <p:extLst>
+      <p:ext uri="{BB962C8B-B14F-4D97-AF65-F5344CB8AC3E}">
+        <p14:creationId xmlns:p14="http://schemas.microsoft.com/office/powerpoint/2010/main" val="4025588667"/>
+      </p:ext>
+    </p:extLst>
+  </p:cSld>
+  <p:clrMapOvr>
+    <a:masterClrMapping/>
+  </p:clrMapOvr>
+</p:sld>
+</file>
+
+<file path=ppt/slides/slide4.xml><?xml version="1.0" encoding="utf-8"?>
+<p:sld xmlns:a="http://schemas.openxmlformats.org/drawingml/2006/main" xmlns:r="http://schemas.openxmlformats.org/officeDocument/2006/relationships" xmlns:p="http://schemas.openxmlformats.org/presentationml/2006/main">
+  <p:cSld>
+    <p:spTree>
+      <p:nvGrpSpPr>
+        <p:cNvPr id="1" name=""/>
+        <p:cNvGrpSpPr/>
+        <p:nvPr/>
+      </p:nvGrpSpPr>
+      <p:grpSpPr>
+        <a:xfrm>
+          <a:off x="0" y="0"/>
+          <a:ext cx="0" cy="0"/>
+          <a:chOff x="0" y="0"/>
+          <a:chExt cx="0" cy="0"/>
+        </a:xfrm>
+      </p:grpSpPr>
+      <p:sp>
+        <p:nvSpPr>
+          <p:cNvPr id="2" name="Titel 1">
+            <a:extLst>
+              <a:ext uri="{FF2B5EF4-FFF2-40B4-BE49-F238E27FC236}">
+                <a16:creationId xmlns:a16="http://schemas.microsoft.com/office/drawing/2014/main" id="{4C692BE9-8C30-670D-2F7C-DF1A66FF0829}"/>
+              </a:ext>
+            </a:extLst>
+          </p:cNvPr>
+          <p:cNvSpPr>
+            <a:spLocks noGrp="1"/>
+          </p:cNvSpPr>
+          <p:nvPr>
+            <p:ph type="title"/>
+          </p:nvPr>
+        </p:nvSpPr>
+        <p:spPr/>
+        <p:txBody>
+          <a:bodyPr/>
+          <a:lstStyle/>
+          <a:p>
+            <a:r>
+              <a:rPr lang="de-CH"/>
+              <a:t>Endresultat vs. Zielsetzung</a:t>
+            </a:r>
+          </a:p>
+        </p:txBody>
+      </p:sp>
+      <p:sp>
+        <p:nvSpPr>
+          <p:cNvPr id="3" name="Inhaltsplatzhalter 2">
+            <a:extLst>
+              <a:ext uri="{FF2B5EF4-FFF2-40B4-BE49-F238E27FC236}">
+                <a16:creationId xmlns:a16="http://schemas.microsoft.com/office/drawing/2014/main" id="{8C2E2611-94B1-0136-17CD-48A7DC2FA698}"/>
+              </a:ext>
+            </a:extLst>
+          </p:cNvPr>
+          <p:cNvSpPr>
+            <a:spLocks noGrp="1"/>
+          </p:cNvSpPr>
+          <p:nvPr>
+            <p:ph idx="1"/>
+          </p:nvPr>
+        </p:nvSpPr>
+        <p:spPr/>
+        <p:txBody>
+          <a:bodyPr vert="horz" lIns="91440" tIns="45720" rIns="91440" bIns="45720" rtlCol="0" anchor="t">
+            <a:normAutofit/>
+          </a:bodyPr>
+          <a:lstStyle/>
+          <a:p>
+            <a:r>
+              <a:rPr lang="de-CH"/>
+              <a:t>Wie hat sich das Projekt entwickelt?</a:t>
+            </a:r>
+          </a:p>
+          <a:p>
+            <a:r>
+              <a:rPr lang="de-CH"/>
+              <a:t>Was wurde erreicht? Was nicht?</a:t>
+            </a:r>
+          </a:p>
+        </p:txBody>
+      </p:sp>
+    </p:spTree>
+    <p:extLst>
+      <p:ext uri="{BB962C8B-B14F-4D97-AF65-F5344CB8AC3E}">
+        <p14:creationId xmlns:p14="http://schemas.microsoft.com/office/powerpoint/2010/main" val="4019893897"/>
+      </p:ext>
+    </p:extLst>
+  </p:cSld>
+  <p:clrMapOvr>
+    <a:masterClrMapping/>
+  </p:clrMapOvr>
+</p:sld>
+</file>
+
+<file path=ppt/slides/slide5.xml><?xml version="1.0" encoding="utf-8"?>
+<p:sld xmlns:a="http://schemas.openxmlformats.org/drawingml/2006/main" xmlns:r="http://schemas.openxmlformats.org/officeDocument/2006/relationships" xmlns:p="http://schemas.openxmlformats.org/presentationml/2006/main">
+  <p:cSld>
+    <p:spTree>
+      <p:nvGrpSpPr>
+        <p:cNvPr id="1" name=""/>
+        <p:cNvGrpSpPr/>
+        <p:nvPr/>
+      </p:nvGrpSpPr>
+      <p:grpSpPr>
+        <a:xfrm>
+          <a:off x="0" y="0"/>
+          <a:ext cx="0" cy="0"/>
+          <a:chOff x="0" y="0"/>
+          <a:chExt cx="0" cy="0"/>
+        </a:xfrm>
+      </p:grpSpPr>
+      <p:sp>
+        <p:nvSpPr>
+          <p:cNvPr id="2" name="Title 1">
+            <a:extLst>
+              <a:ext uri="{FF2B5EF4-FFF2-40B4-BE49-F238E27FC236}">
+                <a16:creationId xmlns:a16="http://schemas.microsoft.com/office/drawing/2014/main" id="{3DB50063-4FF0-00D5-65F4-4D9CE7CEBEA7}"/>
+              </a:ext>
+            </a:extLst>
+          </p:cNvPr>
+          <p:cNvSpPr>
+            <a:spLocks noGrp="1"/>
+          </p:cNvSpPr>
+          <p:nvPr>
+            <p:ph type="title"/>
+          </p:nvPr>
+        </p:nvSpPr>
+        <p:spPr/>
+        <p:txBody>
+          <a:bodyPr/>
+          <a:lstStyle/>
+          <a:p>
+            <a:r>
+              <a:rPr lang="en-US"/>
+              <a:t>Was lief gut? / Wo gab es </a:t>
+            </a:r>
+            <a:r>
+              <a:rPr lang="en-US" err="1"/>
+              <a:t>Probleme</a:t>
+            </a:r>
+            <a:r>
+              <a:rPr lang="en-US"/>
+              <a:t>?</a:t>
+            </a:r>
+          </a:p>
+        </p:txBody>
+      </p:sp>
+      <p:sp>
+        <p:nvSpPr>
+          <p:cNvPr id="3" name="Content Placeholder 2">
+            <a:extLst>
+              <a:ext uri="{FF2B5EF4-FFF2-40B4-BE49-F238E27FC236}">
+                <a16:creationId xmlns:a16="http://schemas.microsoft.com/office/drawing/2014/main" id="{1C7C46DD-AC74-255F-912D-68F4AD95857D}"/>
+              </a:ext>
+            </a:extLst>
+          </p:cNvPr>
+          <p:cNvSpPr>
+            <a:spLocks noGrp="1"/>
+          </p:cNvSpPr>
+          <p:nvPr>
+            <p:ph idx="1"/>
+          </p:nvPr>
+        </p:nvSpPr>
+        <p:spPr/>
+        <p:txBody>
+          <a:bodyPr/>
+          <a:lstStyle/>
+          <a:p>
+            <a:endParaRPr lang="en-US"/>
+          </a:p>
+        </p:txBody>
+      </p:sp>
+    </p:spTree>
+    <p:extLst>
+      <p:ext uri="{BB962C8B-B14F-4D97-AF65-F5344CB8AC3E}">
+        <p14:creationId xmlns:p14="http://schemas.microsoft.com/office/powerpoint/2010/main" val="2396213657"/>
+      </p:ext>
+    </p:extLst>
+  </p:cSld>
+  <p:clrMapOvr>
+    <a:masterClrMapping/>
+  </p:clrMapOvr>
+</p:sld>
+</file>
+
+<file path=ppt/slides/slide6.xml><?xml version="1.0" encoding="utf-8"?>
+<p:sld xmlns:a="http://schemas.openxmlformats.org/drawingml/2006/main" xmlns:r="http://schemas.openxmlformats.org/officeDocument/2006/relationships" xmlns:p="http://schemas.openxmlformats.org/presentationml/2006/main">
+  <p:cSld>
+    <p:spTree>
+      <p:nvGrpSpPr>
+        <p:cNvPr id="1" name=""/>
+        <p:cNvGrpSpPr/>
+        <p:nvPr/>
+      </p:nvGrpSpPr>
+      <p:grpSpPr>
+        <a:xfrm>
+          <a:off x="0" y="0"/>
+          <a:ext cx="0" cy="0"/>
+          <a:chOff x="0" y="0"/>
+          <a:chExt cx="0" cy="0"/>
+        </a:xfrm>
+      </p:grpSpPr>
+      <p:sp>
+        <p:nvSpPr>
+          <p:cNvPr id="2" name="Title 1">
+            <a:extLst>
+              <a:ext uri="{FF2B5EF4-FFF2-40B4-BE49-F238E27FC236}">
+                <a16:creationId xmlns:a16="http://schemas.microsoft.com/office/drawing/2014/main" id="{F561AD8C-36DD-7829-BD8E-DA31B4195134}"/>
+              </a:ext>
+            </a:extLst>
+          </p:cNvPr>
+          <p:cNvSpPr>
+            <a:spLocks noGrp="1"/>
+          </p:cNvSpPr>
+          <p:nvPr>
+            <p:ph type="title"/>
+          </p:nvPr>
+        </p:nvSpPr>
+        <p:spPr/>
+        <p:txBody>
+          <a:bodyPr/>
+          <a:lstStyle/>
+          <a:p>
+            <a:r>
+              <a:rPr lang="en-US" err="1"/>
+              <a:t>Worauf</a:t>
+            </a:r>
+            <a:r>
+              <a:rPr lang="en-US"/>
+              <a:t> </a:t>
+            </a:r>
+            <a:r>
+              <a:rPr lang="en-US" err="1"/>
+              <a:t>sind</a:t>
+            </a:r>
+            <a:r>
+              <a:rPr lang="en-US"/>
+              <a:t> </a:t>
+            </a:r>
+            <a:r>
+              <a:rPr lang="en-US" err="1"/>
+              <a:t>wir</a:t>
+            </a:r>
+            <a:r>
+              <a:rPr lang="en-US"/>
+              <a:t> </a:t>
+            </a:r>
+            <a:r>
+              <a:rPr lang="de-CH"/>
+              <a:t>stolz</a:t>
+            </a:r>
+            <a:r>
+              <a:rPr lang="en-US"/>
+              <a:t> (</a:t>
+            </a:r>
+            <a:r>
+              <a:rPr lang="en-US" err="1"/>
+              <a:t>Lösungen</a:t>
+            </a:r>
+            <a:r>
+              <a:rPr lang="en-US"/>
+              <a:t>)?</a:t>
+            </a:r>
+          </a:p>
+        </p:txBody>
+      </p:sp>
+      <p:sp>
+        <p:nvSpPr>
+          <p:cNvPr id="3" name="Content Placeholder 2">
+            <a:extLst>
+              <a:ext uri="{FF2B5EF4-FFF2-40B4-BE49-F238E27FC236}">
+                <a16:creationId xmlns:a16="http://schemas.microsoft.com/office/drawing/2014/main" id="{5C0E5C13-2F42-8335-E515-AB0AED9C2F34}"/>
+              </a:ext>
+            </a:extLst>
+          </p:cNvPr>
+          <p:cNvSpPr>
+            <a:spLocks noGrp="1"/>
+          </p:cNvSpPr>
+          <p:nvPr>
+            <p:ph idx="1"/>
+          </p:nvPr>
+        </p:nvSpPr>
+        <p:spPr/>
+        <p:txBody>
+          <a:bodyPr vert="horz" lIns="91440" tIns="45720" rIns="91440" bIns="45720" rtlCol="0" anchor="t">
+            <a:normAutofit/>
+          </a:bodyPr>
+          <a:lstStyle/>
+          <a:p>
+            <a:endParaRPr lang="en-US" noProof="1"/>
+          </a:p>
+        </p:txBody>
+      </p:sp>
+    </p:spTree>
+    <p:extLst>
+      <p:ext uri="{BB962C8B-B14F-4D97-AF65-F5344CB8AC3E}">
+        <p14:creationId xmlns:p14="http://schemas.microsoft.com/office/powerpoint/2010/main" val="297389937"/>
+      </p:ext>
+    </p:extLst>
+  </p:cSld>
+  <p:clrMapOvr>
+    <a:masterClrMapping/>
+  </p:clrMapOvr>
+</p:sld>
+</file>
+
+<file path=ppt/slides/slide7.xml><?xml version="1.0" encoding="utf-8"?>
+<p:sld xmlns:a="http://schemas.openxmlformats.org/drawingml/2006/main" xmlns:r="http://schemas.openxmlformats.org/officeDocument/2006/relationships" xmlns:p="http://schemas.openxmlformats.org/presentationml/2006/main">
+  <p:cSld>
+    <p:spTree>
+      <p:nvGrpSpPr>
+        <p:cNvPr id="1" name=""/>
+        <p:cNvGrpSpPr/>
+        <p:nvPr/>
+      </p:nvGrpSpPr>
+      <p:grpSpPr>
+        <a:xfrm>
+          <a:off x="0" y="0"/>
+          <a:ext cx="0" cy="0"/>
+          <a:chOff x="0" y="0"/>
+          <a:chExt cx="0" cy="0"/>
+        </a:xfrm>
+      </p:grpSpPr>
+      <p:sp>
+        <p:nvSpPr>
+          <p:cNvPr id="2" name="Title 1">
+            <a:extLst>
+              <a:ext uri="{FF2B5EF4-FFF2-40B4-BE49-F238E27FC236}">
+                <a16:creationId xmlns:a16="http://schemas.microsoft.com/office/drawing/2014/main" id="{1E28AFB1-8A7A-B172-D7B1-90A824228172}"/>
+              </a:ext>
+            </a:extLst>
+          </p:cNvPr>
+          <p:cNvSpPr>
+            <a:spLocks noGrp="1"/>
+          </p:cNvSpPr>
+          <p:nvPr>
+            <p:ph type="title"/>
+          </p:nvPr>
+        </p:nvSpPr>
+        <p:spPr/>
+        <p:txBody>
+          <a:bodyPr/>
+          <a:lstStyle/>
+          <a:p>
+            <a:r>
+              <a:rPr lang="en-US"/>
+              <a:t>Was </a:t>
+            </a:r>
+            <a:r>
+              <a:rPr lang="en-US" err="1"/>
+              <a:t>haben</a:t>
+            </a:r>
+            <a:r>
+              <a:rPr lang="en-US"/>
+              <a:t> </a:t>
+            </a:r>
+            <a:r>
+              <a:rPr lang="en-US" err="1"/>
+              <a:t>wir</a:t>
+            </a:r>
+            <a:r>
+              <a:rPr lang="en-US"/>
+              <a:t> gelernt?</a:t>
+            </a:r>
+          </a:p>
+        </p:txBody>
+      </p:sp>
+      <p:sp>
+        <p:nvSpPr>
+          <p:cNvPr id="3" name="Content Placeholder 2">
+            <a:extLst>
+              <a:ext uri="{FF2B5EF4-FFF2-40B4-BE49-F238E27FC236}">
+                <a16:creationId xmlns:a16="http://schemas.microsoft.com/office/drawing/2014/main" id="{A8AA9383-4EBA-9EBE-396A-538380AE735F}"/>
+              </a:ext>
+            </a:extLst>
+          </p:cNvPr>
+          <p:cNvSpPr>
+            <a:spLocks noGrp="1"/>
+          </p:cNvSpPr>
+          <p:nvPr>
+            <p:ph idx="1"/>
+          </p:nvPr>
+        </p:nvSpPr>
+        <p:spPr/>
+        <p:txBody>
+          <a:bodyPr/>
+          <a:lstStyle/>
+          <a:p>
+            <a:endParaRPr lang="en-US"/>
+          </a:p>
+        </p:txBody>
+      </p:sp>
+    </p:spTree>
+    <p:extLst>
+      <p:ext uri="{BB962C8B-B14F-4D97-AF65-F5344CB8AC3E}">
+        <p14:creationId xmlns:p14="http://schemas.microsoft.com/office/powerpoint/2010/main" val="2624086703"/>
+      </p:ext>
+    </p:extLst>
+  </p:cSld>
+  <p:clrMapOvr>
+    <a:masterClrMapping/>
+  </p:clrMapOvr>
+</p:sld>
+</file>
+
+<file path=ppt/slides/slide8.xml><?xml version="1.0" encoding="utf-8"?>
+<p:sld xmlns:a="http://schemas.openxmlformats.org/drawingml/2006/main" xmlns:r="http://schemas.openxmlformats.org/officeDocument/2006/relationships" xmlns:p="http://schemas.openxmlformats.org/presentationml/2006/main">
+  <p:cSld>
+    <p:spTree>
+      <p:nvGrpSpPr>
+        <p:cNvPr id="1" name=""/>
+        <p:cNvGrpSpPr/>
+        <p:nvPr/>
+      </p:nvGrpSpPr>
+      <p:grpSpPr>
+        <a:xfrm>
+          <a:off x="0" y="0"/>
+          <a:ext cx="0" cy="0"/>
+          <a:chOff x="0" y="0"/>
+          <a:chExt cx="0" cy="0"/>
+        </a:xfrm>
+      </p:grpSpPr>
+      <p:sp>
+        <p:nvSpPr>
+          <p:cNvPr id="2" name="Title 1">
+            <a:extLst>
+              <a:ext uri="{FF2B5EF4-FFF2-40B4-BE49-F238E27FC236}">
+                <a16:creationId xmlns:a16="http://schemas.microsoft.com/office/drawing/2014/main" id="{112B59C9-D7A8-0317-1968-38B52CCB7530}"/>
+              </a:ext>
+            </a:extLst>
+          </p:cNvPr>
+          <p:cNvSpPr>
+            <a:spLocks noGrp="1"/>
+          </p:cNvSpPr>
+          <p:nvPr>
+            <p:ph type="title"/>
+          </p:nvPr>
+        </p:nvSpPr>
+        <p:spPr/>
+        <p:txBody>
+          <a:bodyPr/>
+          <a:lstStyle/>
+          <a:p>
+            <a:r>
+              <a:rPr lang="en-US"/>
+              <a:t>Was hat </a:t>
+            </a:r>
+            <a:r>
+              <a:rPr lang="en-US" err="1"/>
+              <a:t>uns</a:t>
+            </a:r>
+            <a:r>
+              <a:rPr lang="en-US"/>
+              <a:t> überrascht?</a:t>
+            </a:r>
+          </a:p>
+        </p:txBody>
+      </p:sp>
+      <p:sp>
+        <p:nvSpPr>
+          <p:cNvPr id="3" name="Content Placeholder 2">
+            <a:extLst>
+              <a:ext uri="{FF2B5EF4-FFF2-40B4-BE49-F238E27FC236}">
+                <a16:creationId xmlns:a16="http://schemas.microsoft.com/office/drawing/2014/main" id="{2EDFF1AB-8964-7212-8FB4-CB8CDB97FAE3}"/>
+              </a:ext>
+            </a:extLst>
+          </p:cNvPr>
+          <p:cNvSpPr>
+            <a:spLocks noGrp="1"/>
+          </p:cNvSpPr>
+          <p:nvPr>
+            <p:ph idx="1"/>
+          </p:nvPr>
+        </p:nvSpPr>
+        <p:spPr/>
+        <p:txBody>
+          <a:bodyPr/>
+          <a:lstStyle/>
+          <a:p>
+            <a:endParaRPr lang="en-US"/>
+          </a:p>
+        </p:txBody>
+      </p:sp>
+    </p:spTree>
+    <p:extLst>
+      <p:ext uri="{BB962C8B-B14F-4D97-AF65-F5344CB8AC3E}">
+        <p14:creationId xmlns:p14="http://schemas.microsoft.com/office/powerpoint/2010/main" val="761157137"/>
+      </p:ext>
+    </p:extLst>
+  </p:cSld>
+  <p:clrMapOvr>
+    <a:masterClrMapping/>
+  </p:clrMapOvr>
+</p:sld>
+</file>
+
+<file path=ppt/slides/slide9.xml><?xml version="1.0" encoding="utf-8"?>
+<p:sld xmlns:a="http://schemas.openxmlformats.org/drawingml/2006/main" xmlns:r="http://schemas.openxmlformats.org/officeDocument/2006/relationships" xmlns:p="http://schemas.openxmlformats.org/presentationml/2006/main">
+  <p:cSld>
+    <p:spTree>
+      <p:nvGrpSpPr>
+        <p:cNvPr id="1" name=""/>
+        <p:cNvGrpSpPr/>
+        <p:nvPr/>
+      </p:nvGrpSpPr>
+      <p:grpSpPr>
+        <a:xfrm>
+          <a:off x="0" y="0"/>
+          <a:ext cx="0" cy="0"/>
+          <a:chOff x="0" y="0"/>
+          <a:chExt cx="0" cy="0"/>
+        </a:xfrm>
+      </p:grpSpPr>
+      <p:sp>
+        <p:nvSpPr>
+          <p:cNvPr id="2" name="Title 1">
+            <a:extLst>
+              <a:ext uri="{FF2B5EF4-FFF2-40B4-BE49-F238E27FC236}">
+                <a16:creationId xmlns:a16="http://schemas.microsoft.com/office/drawing/2014/main" id="{AFF46E95-2E97-E61B-88B9-6E1A97F1EF1D}"/>
+              </a:ext>
+            </a:extLst>
+          </p:cNvPr>
+          <p:cNvSpPr>
+            <a:spLocks noGrp="1"/>
+          </p:cNvSpPr>
+          <p:nvPr>
+            <p:ph type="title"/>
+          </p:nvPr>
+        </p:nvSpPr>
+        <p:spPr/>
+        <p:txBody>
+          <a:bodyPr/>
+          <a:lstStyle/>
+          <a:p>
+            <a:r>
+              <a:rPr lang="en-US"/>
+              <a:t>Reflektion</a:t>
+            </a:r>
+          </a:p>
+        </p:txBody>
+      </p:sp>
+      <p:sp>
+        <p:nvSpPr>
+          <p:cNvPr id="3" name="Content Placeholder 2">
+            <a:extLst>
+              <a:ext uri="{FF2B5EF4-FFF2-40B4-BE49-F238E27FC236}">
+                <a16:creationId xmlns:a16="http://schemas.microsoft.com/office/drawing/2014/main" id="{617DA1C0-367D-6611-4054-E45F28C96540}"/>
+              </a:ext>
+            </a:extLst>
+          </p:cNvPr>
+          <p:cNvSpPr>
+            <a:spLocks noGrp="1"/>
+          </p:cNvSpPr>
+          <p:nvPr>
+            <p:ph idx="1"/>
+          </p:nvPr>
+        </p:nvSpPr>
+        <p:spPr/>
+        <p:txBody>
+          <a:bodyPr/>
+          <a:lstStyle/>
+          <a:p>
+            <a:endParaRPr lang="en-US"/>
+          </a:p>
+        </p:txBody>
+      </p:sp>
+    </p:spTree>
+    <p:extLst>
+      <p:ext uri="{BB962C8B-B14F-4D97-AF65-F5344CB8AC3E}">
+        <p14:creationId xmlns:p14="http://schemas.microsoft.com/office/powerpoint/2010/main" val="4211665210"/>
       </p:ext>
     </p:extLst>
   </p:cSld>
@@ -3721,4 +4936,306 @@
     </a:ext>
   </a:extLst>
 </a:theme>
+</file>
+
+<file path=customXml/item1.xml><?xml version="1.0" encoding="utf-8"?>
+<?mso-contentType ?>
+<FormTemplates xmlns="http://schemas.microsoft.com/sharepoint/v3/contenttype/forms">
+  <Display>DocumentLibraryForm</Display>
+  <Edit>DocumentLibraryForm</Edit>
+  <New>DocumentLibraryForm</New>
+</FormTemplates>
+</file>
+
+<file path=customXml/item2.xml><?xml version="1.0" encoding="utf-8"?>
+<p:properties xmlns:p="http://schemas.microsoft.com/office/2006/metadata/properties" xmlns:xsi="http://www.w3.org/2001/XMLSchema-instance" xmlns:pc="http://schemas.microsoft.com/office/infopath/2007/PartnerControls">
+  <documentManagement>
+    <_activity xmlns="7b482e70-4f35-40a3-b75e-ffa04ee0c79f" xsi:nil="true"/>
+  </documentManagement>
+</p:properties>
+</file>
+
+<file path=customXml/item3.xml><?xml version="1.0" encoding="utf-8"?>
+<ct:contentTypeSchema xmlns:ct="http://schemas.microsoft.com/office/2006/metadata/contentType" xmlns:ma="http://schemas.microsoft.com/office/2006/metadata/properties/metaAttributes" ct:_="" ma:_="" ma:contentTypeName="Document" ma:contentTypeID="0x0101003A7443C7252A364EA82FF0EDB3C44616" ma:contentTypeVersion="16" ma:contentTypeDescription="Crée un document." ma:contentTypeScope="" ma:versionID="99dd13c5d007134322681d689c73e4af">
+  <xsd:schema xmlns:xsd="http://www.w3.org/2001/XMLSchema" xmlns:xs="http://www.w3.org/2001/XMLSchema" xmlns:p="http://schemas.microsoft.com/office/2006/metadata/properties" xmlns:ns3="7b482e70-4f35-40a3-b75e-ffa04ee0c79f" xmlns:ns4="4582224d-bab5-40fa-bd6d-5f2de2104ce9" targetNamespace="http://schemas.microsoft.com/office/2006/metadata/properties" ma:root="true" ma:fieldsID="b16fc3d7505b8814540dfc36f1e50148" ns3:_="" ns4:_="">
+    <xsd:import namespace="7b482e70-4f35-40a3-b75e-ffa04ee0c79f"/>
+    <xsd:import namespace="4582224d-bab5-40fa-bd6d-5f2de2104ce9"/>
+    <xsd:element name="properties">
+      <xsd:complexType>
+        <xsd:sequence>
+          <xsd:element name="documentManagement">
+            <xsd:complexType>
+              <xsd:all>
+                <xsd:element ref="ns3:MediaServiceMetadata" minOccurs="0"/>
+                <xsd:element ref="ns3:MediaServiceFastMetadata" minOccurs="0"/>
+                <xsd:element ref="ns3:MediaServiceAutoKeyPoints" minOccurs="0"/>
+                <xsd:element ref="ns3:MediaServiceKeyPoints" minOccurs="0"/>
+                <xsd:element ref="ns3:_activity" minOccurs="0"/>
+                <xsd:element ref="ns4:SharedWithUsers" minOccurs="0"/>
+                <xsd:element ref="ns4:SharedWithDetails" minOccurs="0"/>
+                <xsd:element ref="ns4:SharingHintHash" minOccurs="0"/>
+                <xsd:element ref="ns3:MediaServiceObjectDetectorVersions" minOccurs="0"/>
+                <xsd:element ref="ns3:MediaServiceSearchProperties" minOccurs="0"/>
+                <xsd:element ref="ns3:MediaServiceDateTaken" minOccurs="0"/>
+                <xsd:element ref="ns3:MediaServiceSystemTags" minOccurs="0"/>
+                <xsd:element ref="ns3:MediaServiceGenerationTime" minOccurs="0"/>
+                <xsd:element ref="ns3:MediaServiceEventHashCode" minOccurs="0"/>
+                <xsd:element ref="ns3:MediaServiceOCR" minOccurs="0"/>
+                <xsd:element ref="ns3:MediaLengthInSeconds" minOccurs="0"/>
+              </xsd:all>
+            </xsd:complexType>
+          </xsd:element>
+        </xsd:sequence>
+      </xsd:complexType>
+    </xsd:element>
+  </xsd:schema>
+  <xsd:schema xmlns:xsd="http://www.w3.org/2001/XMLSchema" xmlns:xs="http://www.w3.org/2001/XMLSchema" xmlns:dms="http://schemas.microsoft.com/office/2006/documentManagement/types" xmlns:pc="http://schemas.microsoft.com/office/infopath/2007/PartnerControls" targetNamespace="7b482e70-4f35-40a3-b75e-ffa04ee0c79f" elementFormDefault="qualified">
+    <xsd:import namespace="http://schemas.microsoft.com/office/2006/documentManagement/types"/>
+    <xsd:import namespace="http://schemas.microsoft.com/office/infopath/2007/PartnerControls"/>
+    <xsd:element name="MediaServiceMetadata" ma:index="8" nillable="true" ma:displayName="MediaServiceMetadata" ma:hidden="true" ma:internalName="MediaServiceMetadata" ma:readOnly="true">
+      <xsd:simpleType>
+        <xsd:restriction base="dms:Note"/>
+      </xsd:simpleType>
+    </xsd:element>
+    <xsd:element name="MediaServiceFastMetadata" ma:index="9" nillable="true" ma:displayName="MediaServiceFastMetadata" ma:hidden="true" ma:internalName="MediaServiceFastMetadata" ma:readOnly="true">
+      <xsd:simpleType>
+        <xsd:restriction base="dms:Note"/>
+      </xsd:simpleType>
+    </xsd:element>
+    <xsd:element name="MediaServiceAutoKeyPoints" ma:index="10" nillable="true" ma:displayName="MediaServiceAutoKeyPoints" ma:hidden="true" ma:internalName="MediaServiceAutoKeyPoints" ma:readOnly="true">
+      <xsd:simpleType>
+        <xsd:restriction base="dms:Note"/>
+      </xsd:simpleType>
+    </xsd:element>
+    <xsd:element name="MediaServiceKeyPoints" ma:index="11" nillable="true" ma:displayName="KeyPoints" ma:internalName="MediaServiceKeyPoints" ma:readOnly="true">
+      <xsd:simpleType>
+        <xsd:restriction base="dms:Note">
+          <xsd:maxLength value="255"/>
+        </xsd:restriction>
+      </xsd:simpleType>
+    </xsd:element>
+    <xsd:element name="_activity" ma:index="12" nillable="true" ma:displayName="_activity" ma:hidden="true" ma:internalName="_activity">
+      <xsd:simpleType>
+        <xsd:restriction base="dms:Note"/>
+      </xsd:simpleType>
+    </xsd:element>
+    <xsd:element name="MediaServiceObjectDetectorVersions" ma:index="16" nillable="true" ma:displayName="MediaServiceObjectDetectorVersions" ma:hidden="true" ma:indexed="true" ma:internalName="MediaServiceObjectDetectorVersions" ma:readOnly="true">
+      <xsd:simpleType>
+        <xsd:restriction base="dms:Text"/>
+      </xsd:simpleType>
+    </xsd:element>
+    <xsd:element name="MediaServiceSearchProperties" ma:index="17" nillable="true" ma:displayName="MediaServiceSearchProperties" ma:hidden="true" ma:internalName="MediaServiceSearchProperties" ma:readOnly="true">
+      <xsd:simpleType>
+        <xsd:restriction base="dms:Note"/>
+      </xsd:simpleType>
+    </xsd:element>
+    <xsd:element name="MediaServiceDateTaken" ma:index="18" nillable="true" ma:displayName="MediaServiceDateTaken" ma:hidden="true" ma:indexed="true" ma:internalName="MediaServiceDateTaken" ma:readOnly="true">
+      <xsd:simpleType>
+        <xsd:restriction base="dms:Text"/>
+      </xsd:simpleType>
+    </xsd:element>
+    <xsd:element name="MediaServiceSystemTags" ma:index="19" nillable="true" ma:displayName="MediaServiceSystemTags" ma:hidden="true" ma:internalName="MediaServiceSystemTags" ma:readOnly="true">
+      <xsd:simpleType>
+        <xsd:restriction base="dms:Note"/>
+      </xsd:simpleType>
+    </xsd:element>
+    <xsd:element name="MediaServiceGenerationTime" ma:index="20" nillable="true" ma:displayName="MediaServiceGenerationTime" ma:hidden="true" ma:internalName="MediaServiceGenerationTime" ma:readOnly="true">
+      <xsd:simpleType>
+        <xsd:restriction base="dms:Text"/>
+      </xsd:simpleType>
+    </xsd:element>
+    <xsd:element name="MediaServiceEventHashCode" ma:index="21" nillable="true" ma:displayName="MediaServiceEventHashCode" ma:hidden="true" ma:internalName="MediaServiceEventHashCode" ma:readOnly="true">
+      <xsd:simpleType>
+        <xsd:restriction base="dms:Text"/>
+      </xsd:simpleType>
+    </xsd:element>
+    <xsd:element name="MediaServiceOCR" ma:index="22" nillable="true" ma:displayName="Extracted Text" ma:internalName="MediaServiceOCR" ma:readOnly="true">
+      <xsd:simpleType>
+        <xsd:restriction base="dms:Note">
+          <xsd:maxLength value="255"/>
+        </xsd:restriction>
+      </xsd:simpleType>
+    </xsd:element>
+    <xsd:element name="MediaLengthInSeconds" ma:index="23" nillable="true" ma:displayName="MediaLengthInSeconds" ma:hidden="true" ma:internalName="MediaLengthInSeconds" ma:readOnly="true">
+      <xsd:simpleType>
+        <xsd:restriction base="dms:Unknown"/>
+      </xsd:simpleType>
+    </xsd:element>
+  </xsd:schema>
+  <xsd:schema xmlns:xsd="http://www.w3.org/2001/XMLSchema" xmlns:xs="http://www.w3.org/2001/XMLSchema" xmlns:dms="http://schemas.microsoft.com/office/2006/documentManagement/types" xmlns:pc="http://schemas.microsoft.com/office/infopath/2007/PartnerControls" targetNamespace="4582224d-bab5-40fa-bd6d-5f2de2104ce9" elementFormDefault="qualified">
+    <xsd:import namespace="http://schemas.microsoft.com/office/2006/documentManagement/types"/>
+    <xsd:import namespace="http://schemas.microsoft.com/office/infopath/2007/PartnerControls"/>
+    <xsd:element name="SharedWithUsers" ma:index="13" nillable="true" ma:displayName="Partagé avec" ma:internalName="SharedWithUsers" ma:readOnly="true">
+      <xsd:complexType>
+        <xsd:complexContent>
+          <xsd:extension base="dms:UserMulti">
+            <xsd:sequence>
+              <xsd:element name="UserInfo" minOccurs="0" maxOccurs="unbounded">
+                <xsd:complexType>
+                  <xsd:sequence>
+                    <xsd:element name="DisplayName" type="xsd:string" minOccurs="0"/>
+                    <xsd:element name="AccountId" type="dms:UserId" minOccurs="0" nillable="true"/>
+                    <xsd:element name="AccountType" type="xsd:string" minOccurs="0"/>
+                  </xsd:sequence>
+                </xsd:complexType>
+              </xsd:element>
+            </xsd:sequence>
+          </xsd:extension>
+        </xsd:complexContent>
+      </xsd:complexType>
+    </xsd:element>
+    <xsd:element name="SharedWithDetails" ma:index="14" nillable="true" ma:displayName="Partagé avec détails" ma:internalName="SharedWithDetails" ma:readOnly="true">
+      <xsd:simpleType>
+        <xsd:restriction base="dms:Note">
+          <xsd:maxLength value="255"/>
+        </xsd:restriction>
+      </xsd:simpleType>
+    </xsd:element>
+    <xsd:element name="SharingHintHash" ma:index="15" nillable="true" ma:displayName="Partage du hachage d’indicateur" ma:hidden="true" ma:internalName="SharingHintHash" ma:readOnly="true">
+      <xsd:simpleType>
+        <xsd:restriction base="dms:Text"/>
+      </xsd:simpleType>
+    </xsd:element>
+  </xsd:schema>
+  <xsd:schema xmlns="http://schemas.openxmlformats.org/package/2006/metadata/core-properties" xmlns:xsd="http://www.w3.org/2001/XMLSchema" xmlns:xsi="http://www.w3.org/2001/XMLSchema-instance" xmlns:dc="http://purl.org/dc/elements/1.1/" xmlns:dcterms="http://purl.org/dc/terms/" xmlns:odoc="http://schemas.microsoft.com/internal/obd" targetNamespace="http://schemas.openxmlformats.org/package/2006/metadata/core-properties" elementFormDefault="qualified" attributeFormDefault="unqualified" blockDefault="#all">
+    <xsd:import namespace="http://purl.org/dc/elements/1.1/" schemaLocation="http://dublincore.org/schemas/xmls/qdc/2003/04/02/dc.xsd"/>
+    <xsd:import namespace="http://purl.org/dc/terms/" schemaLocation="http://dublincore.org/schemas/xmls/qdc/2003/04/02/dcterms.xsd"/>
+    <xsd:element name="coreProperties" type="CT_coreProperties"/>
+    <xsd:complexType name="CT_coreProperties">
+      <xsd:all>
+        <xsd:element ref="dc:creator" minOccurs="0" maxOccurs="1"/>
+        <xsd:element ref="dcterms:created" minOccurs="0" maxOccurs="1"/>
+        <xsd:element ref="dc:identifier" minOccurs="0" maxOccurs="1"/>
+        <xsd:element name="contentType" minOccurs="0" maxOccurs="1" type="xsd:string" ma:index="0" ma:displayName="Type de contenu"/>
+        <xsd:element ref="dc:title" minOccurs="0" maxOccurs="1" ma:index="4" ma:displayName="Titre"/>
+        <xsd:element ref="dc:subject" minOccurs="0" maxOccurs="1"/>
+        <xsd:element ref="dc:description" minOccurs="0" maxOccurs="1"/>
+        <xsd:element name="keywords" minOccurs="0" maxOccurs="1" type="xsd:string"/>
+        <xsd:element ref="dc:language" minOccurs="0" maxOccurs="1"/>
+        <xsd:element name="category" minOccurs="0" maxOccurs="1" type="xsd:string"/>
+        <xsd:element name="version" minOccurs="0" maxOccurs="1" type="xsd:string"/>
+        <xsd:element name="revision" minOccurs="0" maxOccurs="1" type="xsd:string">
+          <xsd:annotation>
+            <xsd:documentation>
+                        This value indicates the number of saves or revisions. The application is responsible for updating this value after each revision.
+                    </xsd:documentation>
+          </xsd:annotation>
+        </xsd:element>
+        <xsd:element name="lastModifiedBy" minOccurs="0" maxOccurs="1" type="xsd:string"/>
+        <xsd:element ref="dcterms:modified" minOccurs="0" maxOccurs="1"/>
+        <xsd:element name="contentStatus" minOccurs="0" maxOccurs="1" type="xsd:string"/>
+      </xsd:all>
+    </xsd:complexType>
+  </xsd:schema>
+  <xs:schema xmlns:pc="http://schemas.microsoft.com/office/infopath/2007/PartnerControls" xmlns:xs="http://www.w3.org/2001/XMLSchema" targetNamespace="http://schemas.microsoft.com/office/infopath/2007/PartnerControls" elementFormDefault="qualified" attributeFormDefault="unqualified">
+    <xs:element name="Person">
+      <xs:complexType>
+        <xs:sequence>
+          <xs:element ref="pc:DisplayName" minOccurs="0"/>
+          <xs:element ref="pc:AccountId" minOccurs="0"/>
+          <xs:element ref="pc:AccountType" minOccurs="0"/>
+        </xs:sequence>
+      </xs:complexType>
+    </xs:element>
+    <xs:element name="DisplayName" type="xs:string"/>
+    <xs:element name="AccountId" type="xs:string"/>
+    <xs:element name="AccountType" type="xs:string"/>
+    <xs:element name="BDCAssociatedEntity">
+      <xs:complexType>
+        <xs:sequence>
+          <xs:element ref="pc:BDCEntity" minOccurs="0" maxOccurs="unbounded"/>
+        </xs:sequence>
+        <xs:attribute ref="pc:EntityNamespace"/>
+        <xs:attribute ref="pc:EntityName"/>
+        <xs:attribute ref="pc:SystemInstanceName"/>
+        <xs:attribute ref="pc:AssociationName"/>
+      </xs:complexType>
+    </xs:element>
+    <xs:attribute name="EntityNamespace" type="xs:string"/>
+    <xs:attribute name="EntityName" type="xs:string"/>
+    <xs:attribute name="SystemInstanceName" type="xs:string"/>
+    <xs:attribute name="AssociationName" type="xs:string"/>
+    <xs:element name="BDCEntity">
+      <xs:complexType>
+        <xs:sequence>
+          <xs:element ref="pc:EntityDisplayName" minOccurs="0"/>
+          <xs:element ref="pc:EntityInstanceReference" minOccurs="0"/>
+          <xs:element ref="pc:EntityId1" minOccurs="0"/>
+          <xs:element ref="pc:EntityId2" minOccurs="0"/>
+          <xs:element ref="pc:EntityId3" minOccurs="0"/>
+          <xs:element ref="pc:EntityId4" minOccurs="0"/>
+          <xs:element ref="pc:EntityId5" minOccurs="0"/>
+        </xs:sequence>
+      </xs:complexType>
+    </xs:element>
+    <xs:element name="EntityDisplayName" type="xs:string"/>
+    <xs:element name="EntityInstanceReference" type="xs:string"/>
+    <xs:element name="EntityId1" type="xs:string"/>
+    <xs:element name="EntityId2" type="xs:string"/>
+    <xs:element name="EntityId3" type="xs:string"/>
+    <xs:element name="EntityId4" type="xs:string"/>
+    <xs:element name="EntityId5" type="xs:string"/>
+    <xs:element name="Terms">
+      <xs:complexType>
+        <xs:sequence>
+          <xs:element ref="pc:TermInfo" minOccurs="0" maxOccurs="unbounded"/>
+        </xs:sequence>
+      </xs:complexType>
+    </xs:element>
+    <xs:element name="TermInfo">
+      <xs:complexType>
+        <xs:sequence>
+          <xs:element ref="pc:TermName" minOccurs="0"/>
+          <xs:element ref="pc:TermId" minOccurs="0"/>
+        </xs:sequence>
+      </xs:complexType>
+    </xs:element>
+    <xs:element name="TermName" type="xs:string"/>
+    <xs:element name="TermId" type="xs:string"/>
+  </xs:schema>
+</ct:contentTypeSchema>
+</file>
+
+<file path=customXml/itemProps1.xml><?xml version="1.0" encoding="utf-8"?>
+<ds:datastoreItem xmlns:ds="http://schemas.openxmlformats.org/officeDocument/2006/customXml" ds:itemID="{671C1D4C-DDB7-40E3-8640-20852E4CEA3E}">
+  <ds:schemaRefs>
+    <ds:schemaRef ds:uri="http://schemas.microsoft.com/sharepoint/v3/contenttype/forms"/>
+  </ds:schemaRefs>
+</ds:datastoreItem>
+</file>
+
+<file path=customXml/itemProps2.xml><?xml version="1.0" encoding="utf-8"?>
+<ds:datastoreItem xmlns:ds="http://schemas.openxmlformats.org/officeDocument/2006/customXml" ds:itemID="{1061F33B-DBCF-4D99-8A24-A37E84CD3907}">
+  <ds:schemaRefs>
+    <ds:schemaRef ds:uri="4582224d-bab5-40fa-bd6d-5f2de2104ce9"/>
+    <ds:schemaRef ds:uri="7b482e70-4f35-40a3-b75e-ffa04ee0c79f"/>
+    <ds:schemaRef ds:uri="http://purl.org/dc/dcmitype/"/>
+    <ds:schemaRef ds:uri="http://purl.org/dc/elements/1.1/"/>
+    <ds:schemaRef ds:uri="http://purl.org/dc/terms/"/>
+    <ds:schemaRef ds:uri="http://schemas.microsoft.com/office/2006/documentManagement/types"/>
+    <ds:schemaRef ds:uri="http://schemas.microsoft.com/office/2006/metadata/properties"/>
+    <ds:schemaRef ds:uri="http://schemas.microsoft.com/office/infopath/2007/PartnerControls"/>
+    <ds:schemaRef ds:uri="http://schemas.openxmlformats.org/package/2006/metadata/core-properties"/>
+    <ds:schemaRef ds:uri="http://www.w3.org/XML/1998/namespace"/>
+  </ds:schemaRefs>
+</ds:datastoreItem>
+</file>
+
+<file path=customXml/itemProps3.xml><?xml version="1.0" encoding="utf-8"?>
+<ds:datastoreItem xmlns:ds="http://schemas.openxmlformats.org/officeDocument/2006/customXml" ds:itemID="{8419668F-5759-4465-9DD6-CB2CD64ED883}">
+  <ds:schemaRefs>
+    <ds:schemaRef ds:uri="4582224d-bab5-40fa-bd6d-5f2de2104ce9"/>
+    <ds:schemaRef ds:uri="7b482e70-4f35-40a3-b75e-ffa04ee0c79f"/>
+    <ds:schemaRef ds:uri="http://purl.org/dc/elements/1.1/"/>
+    <ds:schemaRef ds:uri="http://purl.org/dc/terms/"/>
+    <ds:schemaRef ds:uri="http://schemas.microsoft.com/internal/obd"/>
+    <ds:schemaRef ds:uri="http://schemas.microsoft.com/office/2006/documentManagement/types"/>
+    <ds:schemaRef ds:uri="http://schemas.microsoft.com/office/2006/metadata/contentType"/>
+    <ds:schemaRef ds:uri="http://schemas.microsoft.com/office/2006/metadata/properties"/>
+    <ds:schemaRef ds:uri="http://schemas.microsoft.com/office/2006/metadata/properties/metaAttributes"/>
+    <ds:schemaRef ds:uri="http://schemas.microsoft.com/office/infopath/2007/PartnerControls"/>
+    <ds:schemaRef ds:uri="http://schemas.openxmlformats.org/package/2006/metadata/core-properties"/>
+    <ds:schemaRef ds:uri="http://www.w3.org/2001/XMLSchema"/>
+  </ds:schemaRefs>
+</ds:datastoreItem>
 </file>
--- a/Presentation/Unrealengine pp.pptx
+++ b/Presentation/Unrealengine pp.pptx
@@ -119,6 +119,8 @@
 <file path=ppt/revisionInfo.xml><?xml version="1.0" encoding="utf-8"?>
 <p1510:revInfo xmlns:a="http://schemas.openxmlformats.org/drawingml/2006/main" xmlns:r="http://schemas.openxmlformats.org/officeDocument/2006/relationships" xmlns:p1510="http://schemas.microsoft.com/office/powerpoint/2015/10/main">
   <p1510:revLst>
+    <p1510:client id="{36B2C5DC-E5B3-43AD-BF8E-818D79EAC076}" v="91" dt="2026-02-11T08:45:21.541"/>
+    <p1510:client id="{37EE9FFA-8993-D4E8-A8CC-9F5D025F23B2}" v="228" dt="2026-02-11T08:45:08.616"/>
     <p1510:client id="{918DEC33-A8E2-5D84-CA76-58650E82AC50}" v="308" dt="2026-02-11T08:06:33.058"/>
   </p1510:revLst>
 </p1510:revInfo>
@@ -345,9 +347,160 @@
     </pc:docChg>
   </pc:docChgLst>
   <pc:docChgLst>
+    <pc:chgData name="ŠPIONJAK Tadej (STD)" userId="S::tadej.spionjak@edu.vs.ch::65c42695-ef25-4ae5-8123-204466087ecd" providerId="AD" clId="Web-{37EE9FFA-8993-D4E8-A8CC-9F5D025F23B2}"/>
+    <pc:docChg chg="modSld">
+      <pc:chgData name="ŠPIONJAK Tadej (STD)" userId="S::tadej.spionjak@edu.vs.ch::65c42695-ef25-4ae5-8123-204466087ecd" providerId="AD" clId="Web-{37EE9FFA-8993-D4E8-A8CC-9F5D025F23B2}" dt="2026-02-11T08:45:08.616" v="224" actId="20577"/>
+      <pc:docMkLst>
+        <pc:docMk/>
+      </pc:docMkLst>
+      <pc:sldChg chg="addSp delSp modSp">
+        <pc:chgData name="ŠPIONJAK Tadej (STD)" userId="S::tadej.spionjak@edu.vs.ch::65c42695-ef25-4ae5-8123-204466087ecd" providerId="AD" clId="Web-{37EE9FFA-8993-D4E8-A8CC-9F5D025F23B2}" dt="2026-02-11T08:44:40.334" v="216" actId="1076"/>
+        <pc:sldMkLst>
+          <pc:docMk/>
+          <pc:sldMk cId="4025588667" sldId="258"/>
+        </pc:sldMkLst>
+        <pc:spChg chg="mod">
+          <ac:chgData name="ŠPIONJAK Tadej (STD)" userId="S::tadej.spionjak@edu.vs.ch::65c42695-ef25-4ae5-8123-204466087ecd" providerId="AD" clId="Web-{37EE9FFA-8993-D4E8-A8CC-9F5D025F23B2}" dt="2026-02-11T08:27:23.271" v="183" actId="20577"/>
+          <ac:spMkLst>
+            <pc:docMk/>
+            <pc:sldMk cId="4025588667" sldId="258"/>
+            <ac:spMk id="3" creationId="{CED2D7B6-A038-20F8-8D13-6A3B6506ABBD}"/>
+          </ac:spMkLst>
+        </pc:spChg>
+        <pc:spChg chg="add mod">
+          <ac:chgData name="ŠPIONJAK Tadej (STD)" userId="S::tadej.spionjak@edu.vs.ch::65c42695-ef25-4ae5-8123-204466087ecd" providerId="AD" clId="Web-{37EE9FFA-8993-D4E8-A8CC-9F5D025F23B2}" dt="2026-02-11T08:25:15.362" v="145" actId="20577"/>
+          <ac:spMkLst>
+            <pc:docMk/>
+            <pc:sldMk cId="4025588667" sldId="258"/>
+            <ac:spMk id="6" creationId="{9FB268C8-0FC4-4D48-DF3D-D03B5D380208}"/>
+          </ac:spMkLst>
+        </pc:spChg>
+        <pc:picChg chg="add mod">
+          <ac:chgData name="ŠPIONJAK Tadej (STD)" userId="S::tadej.spionjak@edu.vs.ch::65c42695-ef25-4ae5-8123-204466087ecd" providerId="AD" clId="Web-{37EE9FFA-8993-D4E8-A8CC-9F5D025F23B2}" dt="2026-02-11T08:44:40.334" v="216" actId="1076"/>
+          <ac:picMkLst>
+            <pc:docMk/>
+            <pc:sldMk cId="4025588667" sldId="258"/>
+            <ac:picMk id="4" creationId="{04BB6119-5ECC-0138-AF03-DC7F663871CF}"/>
+          </ac:picMkLst>
+        </pc:picChg>
+        <pc:picChg chg="add del mod">
+          <ac:chgData name="ŠPIONJAK Tadej (STD)" userId="S::tadej.spionjak@edu.vs.ch::65c42695-ef25-4ae5-8123-204466087ecd" providerId="AD" clId="Web-{37EE9FFA-8993-D4E8-A8CC-9F5D025F23B2}" dt="2026-02-11T08:16:39.266" v="6"/>
+          <ac:picMkLst>
+            <pc:docMk/>
+            <pc:sldMk cId="4025588667" sldId="258"/>
+            <ac:picMk id="4" creationId="{CC232044-F620-1200-1C45-168A3312881D}"/>
+          </ac:picMkLst>
+        </pc:picChg>
+        <pc:picChg chg="add mod">
+          <ac:chgData name="ŠPIONJAK Tadej (STD)" userId="S::tadej.spionjak@edu.vs.ch::65c42695-ef25-4ae5-8123-204466087ecd" providerId="AD" clId="Web-{37EE9FFA-8993-D4E8-A8CC-9F5D025F23B2}" dt="2026-02-11T08:26:16.895" v="171" actId="1076"/>
+          <ac:picMkLst>
+            <pc:docMk/>
+            <pc:sldMk cId="4025588667" sldId="258"/>
+            <ac:picMk id="7" creationId="{D68F789F-672A-A77D-FC51-F190FF9FD261}"/>
+          </ac:picMkLst>
+        </pc:picChg>
+        <pc:picChg chg="add mod">
+          <ac:chgData name="ŠPIONJAK Tadej (STD)" userId="S::tadej.spionjak@edu.vs.ch::65c42695-ef25-4ae5-8123-204466087ecd" providerId="AD" clId="Web-{37EE9FFA-8993-D4E8-A8CC-9F5D025F23B2}" dt="2026-02-11T08:26:30.520" v="176" actId="1076"/>
+          <ac:picMkLst>
+            <pc:docMk/>
+            <pc:sldMk cId="4025588667" sldId="258"/>
+            <ac:picMk id="8" creationId="{55442423-804C-E40A-7D91-E1682D0E84A4}"/>
+          </ac:picMkLst>
+        </pc:picChg>
+        <pc:picChg chg="add mod">
+          <ac:chgData name="ŠPIONJAK Tadej (STD)" userId="S::tadej.spionjak@edu.vs.ch::65c42695-ef25-4ae5-8123-204466087ecd" providerId="AD" clId="Web-{37EE9FFA-8993-D4E8-A8CC-9F5D025F23B2}" dt="2026-02-11T08:26:49.099" v="182" actId="1076"/>
+          <ac:picMkLst>
+            <pc:docMk/>
+            <pc:sldMk cId="4025588667" sldId="258"/>
+            <ac:picMk id="9" creationId="{4C2AF0A9-D44E-09DD-C353-5565B48A3A7F}"/>
+          </ac:picMkLst>
+        </pc:picChg>
+        <pc:picChg chg="add mod">
+          <ac:chgData name="ŠPIONJAK Tadej (STD)" userId="S::tadej.spionjak@edu.vs.ch::65c42695-ef25-4ae5-8123-204466087ecd" providerId="AD" clId="Web-{37EE9FFA-8993-D4E8-A8CC-9F5D025F23B2}" dt="2026-02-11T08:27:29.568" v="188" actId="1076"/>
+          <ac:picMkLst>
+            <pc:docMk/>
+            <pc:sldMk cId="4025588667" sldId="258"/>
+            <ac:picMk id="10" creationId="{838D10CE-40F1-8C01-FDE2-42595FFF49C0}"/>
+          </ac:picMkLst>
+        </pc:picChg>
+        <pc:picChg chg="add del mod">
+          <ac:chgData name="ŠPIONJAK Tadej (STD)" userId="S::tadej.spionjak@edu.vs.ch::65c42695-ef25-4ae5-8123-204466087ecd" providerId="AD" clId="Web-{37EE9FFA-8993-D4E8-A8CC-9F5D025F23B2}" dt="2026-02-11T08:28:21.476" v="209"/>
+          <ac:picMkLst>
+            <pc:docMk/>
+            <pc:sldMk cId="4025588667" sldId="258"/>
+            <ac:picMk id="11" creationId="{6DDA52B3-A522-79A4-64EA-2AAC1ABD1948}"/>
+          </ac:picMkLst>
+        </pc:picChg>
+        <pc:picChg chg="add del mod">
+          <ac:chgData name="ŠPIONJAK Tadej (STD)" userId="S::tadej.spionjak@edu.vs.ch::65c42695-ef25-4ae5-8123-204466087ecd" providerId="AD" clId="Web-{37EE9FFA-8993-D4E8-A8CC-9F5D025F23B2}" dt="2026-02-11T08:27:53.303" v="203"/>
+          <ac:picMkLst>
+            <pc:docMk/>
+            <pc:sldMk cId="4025588667" sldId="258"/>
+            <ac:picMk id="12" creationId="{2F801C71-2436-26A6-B400-D77B600C9AD9}"/>
+          </ac:picMkLst>
+        </pc:picChg>
+        <pc:picChg chg="add del mod">
+          <ac:chgData name="ŠPIONJAK Tadej (STD)" userId="S::tadej.spionjak@edu.vs.ch::65c42695-ef25-4ae5-8123-204466087ecd" providerId="AD" clId="Web-{37EE9FFA-8993-D4E8-A8CC-9F5D025F23B2}" dt="2026-02-11T08:27:52.866" v="202"/>
+          <ac:picMkLst>
+            <pc:docMk/>
+            <pc:sldMk cId="4025588667" sldId="258"/>
+            <ac:picMk id="13" creationId="{E56820C4-642D-D42D-52D1-2A76D5B4D304}"/>
+          </ac:picMkLst>
+        </pc:picChg>
+        <pc:picChg chg="add del mod">
+          <ac:chgData name="ŠPIONJAK Tadej (STD)" userId="S::tadej.spionjak@edu.vs.ch::65c42695-ef25-4ae5-8123-204466087ecd" providerId="AD" clId="Web-{37EE9FFA-8993-D4E8-A8CC-9F5D025F23B2}" dt="2026-02-11T08:27:51.772" v="201"/>
+          <ac:picMkLst>
+            <pc:docMk/>
+            <pc:sldMk cId="4025588667" sldId="258"/>
+            <ac:picMk id="14" creationId="{C7FA094C-5940-6551-345E-2CF2C80D3C8C}"/>
+          </ac:picMkLst>
+        </pc:picChg>
+        <pc:picChg chg="add del mod">
+          <ac:chgData name="ŠPIONJAK Tadej (STD)" userId="S::tadej.spionjak@edu.vs.ch::65c42695-ef25-4ae5-8123-204466087ecd" providerId="AD" clId="Web-{37EE9FFA-8993-D4E8-A8CC-9F5D025F23B2}" dt="2026-02-11T08:27:50.678" v="200"/>
+          <ac:picMkLst>
+            <pc:docMk/>
+            <pc:sldMk cId="4025588667" sldId="258"/>
+            <ac:picMk id="15" creationId="{5D511FE3-C902-F003-EA3D-64042FCB49C9}"/>
+          </ac:picMkLst>
+        </pc:picChg>
+        <pc:picChg chg="add del mod">
+          <ac:chgData name="ŠPIONJAK Tadej (STD)" userId="S::tadej.spionjak@edu.vs.ch::65c42695-ef25-4ae5-8123-204466087ecd" providerId="AD" clId="Web-{37EE9FFA-8993-D4E8-A8CC-9F5D025F23B2}" dt="2026-02-11T08:27:49.475" v="199"/>
+          <ac:picMkLst>
+            <pc:docMk/>
+            <pc:sldMk cId="4025588667" sldId="258"/>
+            <ac:picMk id="16" creationId="{0C0F9B7A-C0D3-E2B3-F28C-31D987118D81}"/>
+          </ac:picMkLst>
+        </pc:picChg>
+        <pc:picChg chg="add mod">
+          <ac:chgData name="ŠPIONJAK Tadej (STD)" userId="S::tadej.spionjak@edu.vs.ch::65c42695-ef25-4ae5-8123-204466087ecd" providerId="AD" clId="Web-{37EE9FFA-8993-D4E8-A8CC-9F5D025F23B2}" dt="2026-02-11T08:28:24.241" v="211" actId="1076"/>
+          <ac:picMkLst>
+            <pc:docMk/>
+            <pc:sldMk cId="4025588667" sldId="258"/>
+            <ac:picMk id="17" creationId="{F2B624DA-FCDE-A429-B7CF-8077A665D396}"/>
+          </ac:picMkLst>
+        </pc:picChg>
+      </pc:sldChg>
+      <pc:sldChg chg="modSp">
+        <pc:chgData name="ŠPIONJAK Tadej (STD)" userId="S::tadej.spionjak@edu.vs.ch::65c42695-ef25-4ae5-8123-204466087ecd" providerId="AD" clId="Web-{37EE9FFA-8993-D4E8-A8CC-9F5D025F23B2}" dt="2026-02-11T08:45:08.616" v="224" actId="20577"/>
+        <pc:sldMkLst>
+          <pc:docMk/>
+          <pc:sldMk cId="2624086703" sldId="266"/>
+        </pc:sldMkLst>
+        <pc:spChg chg="mod">
+          <ac:chgData name="ŠPIONJAK Tadej (STD)" userId="S::tadej.spionjak@edu.vs.ch::65c42695-ef25-4ae5-8123-204466087ecd" providerId="AD" clId="Web-{37EE9FFA-8993-D4E8-A8CC-9F5D025F23B2}" dt="2026-02-11T08:45:08.616" v="224" actId="20577"/>
+          <ac:spMkLst>
+            <pc:docMk/>
+            <pc:sldMk cId="2624086703" sldId="266"/>
+            <ac:spMk id="3" creationId="{A8AA9383-4EBA-9EBE-396A-538380AE735F}"/>
+          </ac:spMkLst>
+        </pc:spChg>
+      </pc:sldChg>
+    </pc:docChg>
+  </pc:docChgLst>
+  <pc:docChgLst>
     <pc:chgData name="ANTHAMATTEN Elia (STD)" userId="de2ee9bd-2372-4e59-8057-983727246ceb" providerId="ADAL" clId="{1288FD62-7F38-4A17-9B9B-563BBA360915}"/>
     <pc:docChg chg="custSel addSld modSld sldOrd">
-      <pc:chgData name="ANTHAMATTEN Elia (STD)" userId="de2ee9bd-2372-4e59-8057-983727246ceb" providerId="ADAL" clId="{1288FD62-7F38-4A17-9B9B-563BBA360915}" dt="2026-02-11T07:50:43.287" v="87" actId="20577"/>
+      <pc:chgData name="ANTHAMATTEN Elia (STD)" userId="de2ee9bd-2372-4e59-8057-983727246ceb" providerId="ADAL" clId="{1288FD62-7F38-4A17-9B9B-563BBA360915}" dt="2026-02-11T08:45:21.541" v="178" actId="732"/>
       <pc:docMkLst>
         <pc:docMk/>
       </pc:docMkLst>
@@ -367,7 +520,7 @@
         </pc:spChg>
       </pc:sldChg>
       <pc:sldChg chg="modSp new mod">
-        <pc:chgData name="ANTHAMATTEN Elia (STD)" userId="de2ee9bd-2372-4e59-8057-983727246ceb" providerId="ADAL" clId="{1288FD62-7F38-4A17-9B9B-563BBA360915}" dt="2026-02-11T07:40:45.578" v="27" actId="20577"/>
+        <pc:chgData name="ANTHAMATTEN Elia (STD)" userId="de2ee9bd-2372-4e59-8057-983727246ceb" providerId="ADAL" clId="{1288FD62-7F38-4A17-9B9B-563BBA360915}" dt="2026-02-11T08:45:21.541" v="178" actId="732"/>
         <pc:sldMkLst>
           <pc:docMk/>
           <pc:sldMk cId="4025588667" sldId="258"/>
@@ -380,6 +533,30 @@
             <ac:spMk id="2" creationId="{318F1F6D-40C5-1BD9-423A-1B72E93E2327}"/>
           </ac:spMkLst>
         </pc:spChg>
+        <pc:spChg chg="mod">
+          <ac:chgData name="ANTHAMATTEN Elia (STD)" userId="de2ee9bd-2372-4e59-8057-983727246ceb" providerId="ADAL" clId="{1288FD62-7F38-4A17-9B9B-563BBA360915}" dt="2026-02-11T08:23:54.898" v="170" actId="20577"/>
+          <ac:spMkLst>
+            <pc:docMk/>
+            <pc:sldMk cId="4025588667" sldId="258"/>
+            <ac:spMk id="3" creationId="{CED2D7B6-A038-20F8-8D13-6A3B6506ABBD}"/>
+          </ac:spMkLst>
+        </pc:spChg>
+        <pc:picChg chg="mod modCrop">
+          <ac:chgData name="ANTHAMATTEN Elia (STD)" userId="de2ee9bd-2372-4e59-8057-983727246ceb" providerId="ADAL" clId="{1288FD62-7F38-4A17-9B9B-563BBA360915}" dt="2026-02-11T08:45:21.541" v="178" actId="732"/>
+          <ac:picMkLst>
+            <pc:docMk/>
+            <pc:sldMk cId="4025588667" sldId="258"/>
+            <ac:picMk id="4" creationId="{04BB6119-5ECC-0138-AF03-DC7F663871CF}"/>
+          </ac:picMkLst>
+        </pc:picChg>
+        <pc:picChg chg="mod modCrop">
+          <ac:chgData name="ANTHAMATTEN Elia (STD)" userId="de2ee9bd-2372-4e59-8057-983727246ceb" providerId="ADAL" clId="{1288FD62-7F38-4A17-9B9B-563BBA360915}" dt="2026-02-11T08:26:10.841" v="172" actId="732"/>
+          <ac:picMkLst>
+            <pc:docMk/>
+            <pc:sldMk cId="4025588667" sldId="258"/>
+            <ac:picMk id="7" creationId="{D68F789F-672A-A77D-FC51-F190FF9FD261}"/>
+          </ac:picMkLst>
+        </pc:picChg>
       </pc:sldChg>
       <pc:sldChg chg="modSp new mod">
         <pc:chgData name="ANTHAMATTEN Elia (STD)" userId="de2ee9bd-2372-4e59-8057-983727246ceb" providerId="ADAL" clId="{1288FD62-7F38-4A17-9B9B-563BBA360915}" dt="2026-02-11T07:41:24.797" v="41" actId="20577"/>
@@ -4022,15 +4199,513 @@
             <p:ph idx="1"/>
           </p:nvPr>
         </p:nvSpPr>
-        <p:spPr/>
-        <p:txBody>
-          <a:bodyPr/>
-          <a:lstStyle/>
-          <a:p>
-            <a:endParaRPr lang="de-CH"/>
-          </a:p>
-        </p:txBody>
-      </p:sp>
+        <p:spPr>
+          <a:xfrm>
+            <a:off x="838200" y="1825625"/>
+            <a:ext cx="4580965" cy="4351338"/>
+          </a:xfrm>
+        </p:spPr>
+        <p:txBody>
+          <a:bodyPr vert="horz" lIns="91440" tIns="45720" rIns="91440" bIns="45720" rtlCol="0" anchor="t">
+            <a:normAutofit/>
+          </a:bodyPr>
+          <a:lstStyle/>
+          <a:p>
+            <a:r>
+              <a:rPr lang="de-CH"/>
+              <a:t>Gebraucht:</a:t>
+            </a:r>
+          </a:p>
+          <a:p>
+            <a:pPr lvl="1">
+              <a:buAutoNum type="arabicPeriod"/>
+            </a:pPr>
+            <a:r>
+              <a:rPr lang="de-CH"/>
+              <a:t>Unreal Engine</a:t>
+            </a:r>
+          </a:p>
+          <a:p>
+            <a:pPr lvl="1">
+              <a:buAutoNum type="arabicPeriod"/>
+            </a:pPr>
+            <a:r>
+              <a:rPr lang="de-CH" err="1"/>
+              <a:t>Github</a:t>
+            </a:r>
+            <a:endParaRPr lang="de-CH"/>
+          </a:p>
+          <a:p>
+            <a:pPr lvl="1">
+              <a:buAutoNum type="arabicPeriod"/>
+            </a:pPr>
+            <a:r>
+              <a:rPr lang="de-CH" err="1"/>
+              <a:t>Sketchfab</a:t>
+            </a:r>
+            <a:endParaRPr lang="de-CH"/>
+          </a:p>
+          <a:p>
+            <a:pPr lvl="1">
+              <a:buAutoNum type="arabicPeriod"/>
+            </a:pPr>
+            <a:r>
+              <a:rPr lang="de-CH" err="1"/>
+              <a:t>Meta</a:t>
+            </a:r>
+            <a:r>
+              <a:rPr lang="de-CH"/>
+              <a:t> Quest Link</a:t>
+            </a:r>
+          </a:p>
+          <a:p>
+            <a:pPr lvl="1">
+              <a:buAutoNum type="arabicPeriod"/>
+            </a:pPr>
+            <a:endParaRPr lang="de-CH"/>
+          </a:p>
+          <a:p>
+            <a:pPr lvl="1">
+              <a:buAutoNum type="arabicPeriod"/>
+            </a:pPr>
+            <a:endParaRPr lang="de-CH"/>
+          </a:p>
+          <a:p>
+            <a:pPr marL="914400" lvl="1" indent="-457200">
+              <a:buAutoNum type="arabicPeriod"/>
+            </a:pPr>
+            <a:endParaRPr lang="de-CH"/>
+          </a:p>
+        </p:txBody>
+      </p:sp>
+      <p:sp>
+        <p:nvSpPr>
+          <p:cNvPr id="6" name="Inhaltsplatzhalter 2">
+            <a:extLst>
+              <a:ext uri="{FF2B5EF4-FFF2-40B4-BE49-F238E27FC236}">
+                <a16:creationId xmlns:a16="http://schemas.microsoft.com/office/drawing/2014/main" id="{9FB268C8-0FC4-4D48-DF3D-D03B5D380208}"/>
+              </a:ext>
+            </a:extLst>
+          </p:cNvPr>
+          <p:cNvSpPr txBox="1">
+            <a:spLocks/>
+          </p:cNvSpPr>
+          <p:nvPr/>
+        </p:nvSpPr>
+        <p:spPr>
+          <a:xfrm>
+            <a:off x="6091518" y="1718048"/>
+            <a:ext cx="4580965" cy="4351338"/>
+          </a:xfrm>
+          <a:prstGeom prst="rect">
+            <a:avLst/>
+          </a:prstGeom>
+        </p:spPr>
+        <p:txBody>
+          <a:bodyPr vert="horz" lIns="91440" tIns="45720" rIns="91440" bIns="45720" rtlCol="0" anchor="t">
+            <a:normAutofit/>
+          </a:bodyPr>
+          <a:lstStyle>
+            <a:lvl1pPr marL="228600" indent="-228600" algn="l" defTabSz="914400" rtl="0" eaLnBrk="1" latinLnBrk="0" hangingPunct="1">
+              <a:lnSpc>
+                <a:spcPct val="90000"/>
+              </a:lnSpc>
+              <a:spcBef>
+                <a:spcPts val="1000"/>
+              </a:spcBef>
+              <a:buFont typeface="Arial" panose="020B0604020202020204" pitchFamily="34" charset="0"/>
+              <a:buChar char="•"/>
+              <a:defRPr sz="2800" kern="1200">
+                <a:solidFill>
+                  <a:schemeClr val="tx1"/>
+                </a:solidFill>
+                <a:latin typeface="+mn-lt"/>
+                <a:ea typeface="+mn-ea"/>
+                <a:cs typeface="+mn-cs"/>
+              </a:defRPr>
+            </a:lvl1pPr>
+            <a:lvl2pPr marL="685800" indent="-228600" algn="l" defTabSz="914400" rtl="0" eaLnBrk="1" latinLnBrk="0" hangingPunct="1">
+              <a:lnSpc>
+                <a:spcPct val="90000"/>
+              </a:lnSpc>
+              <a:spcBef>
+                <a:spcPts val="500"/>
+              </a:spcBef>
+              <a:buFont typeface="Arial" panose="020B0604020202020204" pitchFamily="34" charset="0"/>
+              <a:buChar char="•"/>
+              <a:defRPr sz="2400" kern="1200">
+                <a:solidFill>
+                  <a:schemeClr val="tx1"/>
+                </a:solidFill>
+                <a:latin typeface="+mn-lt"/>
+                <a:ea typeface="+mn-ea"/>
+                <a:cs typeface="+mn-cs"/>
+              </a:defRPr>
+            </a:lvl2pPr>
+            <a:lvl3pPr marL="1143000" indent="-228600" algn="l" defTabSz="914400" rtl="0" eaLnBrk="1" latinLnBrk="0" hangingPunct="1">
+              <a:lnSpc>
+                <a:spcPct val="90000"/>
+              </a:lnSpc>
+              <a:spcBef>
+                <a:spcPts val="500"/>
+              </a:spcBef>
+              <a:buFont typeface="Arial" panose="020B0604020202020204" pitchFamily="34" charset="0"/>
+              <a:buChar char="•"/>
+              <a:defRPr sz="2000" kern="1200">
+                <a:solidFill>
+                  <a:schemeClr val="tx1"/>
+                </a:solidFill>
+                <a:latin typeface="+mn-lt"/>
+                <a:ea typeface="+mn-ea"/>
+                <a:cs typeface="+mn-cs"/>
+              </a:defRPr>
+            </a:lvl3pPr>
+            <a:lvl4pPr marL="1600200" indent="-228600" algn="l" defTabSz="914400" rtl="0" eaLnBrk="1" latinLnBrk="0" hangingPunct="1">
+              <a:lnSpc>
+                <a:spcPct val="90000"/>
+              </a:lnSpc>
+              <a:spcBef>
+                <a:spcPts val="500"/>
+              </a:spcBef>
+              <a:buFont typeface="Arial" panose="020B0604020202020204" pitchFamily="34" charset="0"/>
+              <a:buChar char="•"/>
+              <a:defRPr sz="1800" kern="1200">
+                <a:solidFill>
+                  <a:schemeClr val="tx1"/>
+                </a:solidFill>
+                <a:latin typeface="+mn-lt"/>
+                <a:ea typeface="+mn-ea"/>
+                <a:cs typeface="+mn-cs"/>
+              </a:defRPr>
+            </a:lvl4pPr>
+            <a:lvl5pPr marL="2057400" indent="-228600" algn="l" defTabSz="914400" rtl="0" eaLnBrk="1" latinLnBrk="0" hangingPunct="1">
+              <a:lnSpc>
+                <a:spcPct val="90000"/>
+              </a:lnSpc>
+              <a:spcBef>
+                <a:spcPts val="500"/>
+              </a:spcBef>
+              <a:buFont typeface="Arial" panose="020B0604020202020204" pitchFamily="34" charset="0"/>
+              <a:buChar char="•"/>
+              <a:defRPr sz="1800" kern="1200">
+                <a:solidFill>
+                  <a:schemeClr val="tx1"/>
+                </a:solidFill>
+                <a:latin typeface="+mn-lt"/>
+                <a:ea typeface="+mn-ea"/>
+                <a:cs typeface="+mn-cs"/>
+              </a:defRPr>
+            </a:lvl5pPr>
+            <a:lvl6pPr marL="2514600" indent="-228600" algn="l" defTabSz="914400" rtl="0" eaLnBrk="1" latinLnBrk="0" hangingPunct="1">
+              <a:lnSpc>
+                <a:spcPct val="90000"/>
+              </a:lnSpc>
+              <a:spcBef>
+                <a:spcPts val="500"/>
+              </a:spcBef>
+              <a:buFont typeface="Arial" panose="020B0604020202020204" pitchFamily="34" charset="0"/>
+              <a:buChar char="•"/>
+              <a:defRPr sz="1800" kern="1200">
+                <a:solidFill>
+                  <a:schemeClr val="tx1"/>
+                </a:solidFill>
+                <a:latin typeface="+mn-lt"/>
+                <a:ea typeface="+mn-ea"/>
+                <a:cs typeface="+mn-cs"/>
+              </a:defRPr>
+            </a:lvl6pPr>
+            <a:lvl7pPr marL="2971800" indent="-228600" algn="l" defTabSz="914400" rtl="0" eaLnBrk="1" latinLnBrk="0" hangingPunct="1">
+              <a:lnSpc>
+                <a:spcPct val="90000"/>
+              </a:lnSpc>
+              <a:spcBef>
+                <a:spcPts val="500"/>
+              </a:spcBef>
+              <a:buFont typeface="Arial" panose="020B0604020202020204" pitchFamily="34" charset="0"/>
+              <a:buChar char="•"/>
+              <a:defRPr sz="1800" kern="1200">
+                <a:solidFill>
+                  <a:schemeClr val="tx1"/>
+                </a:solidFill>
+                <a:latin typeface="+mn-lt"/>
+                <a:ea typeface="+mn-ea"/>
+                <a:cs typeface="+mn-cs"/>
+              </a:defRPr>
+            </a:lvl7pPr>
+            <a:lvl8pPr marL="3429000" indent="-228600" algn="l" defTabSz="914400" rtl="0" eaLnBrk="1" latinLnBrk="0" hangingPunct="1">
+              <a:lnSpc>
+                <a:spcPct val="90000"/>
+              </a:lnSpc>
+              <a:spcBef>
+                <a:spcPts val="500"/>
+              </a:spcBef>
+              <a:buFont typeface="Arial" panose="020B0604020202020204" pitchFamily="34" charset="0"/>
+              <a:buChar char="•"/>
+              <a:defRPr sz="1800" kern="1200">
+                <a:solidFill>
+                  <a:schemeClr val="tx1"/>
+                </a:solidFill>
+                <a:latin typeface="+mn-lt"/>
+                <a:ea typeface="+mn-ea"/>
+                <a:cs typeface="+mn-cs"/>
+              </a:defRPr>
+            </a:lvl8pPr>
+            <a:lvl9pPr marL="3886200" indent="-228600" algn="l" defTabSz="914400" rtl="0" eaLnBrk="1" latinLnBrk="0" hangingPunct="1">
+              <a:lnSpc>
+                <a:spcPct val="90000"/>
+              </a:lnSpc>
+              <a:spcBef>
+                <a:spcPts val="500"/>
+              </a:spcBef>
+              <a:buFont typeface="Arial" panose="020B0604020202020204" pitchFamily="34" charset="0"/>
+              <a:buChar char="•"/>
+              <a:defRPr sz="1800" kern="1200">
+                <a:solidFill>
+                  <a:schemeClr val="tx1"/>
+                </a:solidFill>
+                <a:latin typeface="+mn-lt"/>
+                <a:ea typeface="+mn-ea"/>
+                <a:cs typeface="+mn-cs"/>
+              </a:defRPr>
+            </a:lvl9pPr>
+          </a:lstStyle>
+          <a:p>
+            <a:r>
+              <a:rPr lang="de-CH"/>
+              <a:t>Ungebraucht:</a:t>
+            </a:r>
+          </a:p>
+          <a:p>
+            <a:pPr lvl="1">
+              <a:buAutoNum type="arabicPeriod"/>
+            </a:pPr>
+            <a:r>
+              <a:rPr lang="de-CH"/>
+              <a:t>Unity</a:t>
+            </a:r>
+          </a:p>
+          <a:p>
+            <a:pPr lvl="1">
+              <a:buAutoNum type="arabicPeriod"/>
+            </a:pPr>
+            <a:r>
+              <a:rPr lang="de-CH"/>
+              <a:t>Developer Hub (</a:t>
+            </a:r>
+            <a:r>
+              <a:rPr lang="de-CH" err="1"/>
+              <a:t>Meta</a:t>
+            </a:r>
+            <a:r>
+              <a:rPr lang="de-CH"/>
+              <a:t>)</a:t>
+            </a:r>
+          </a:p>
+          <a:p>
+            <a:pPr lvl="1">
+              <a:buFont typeface="Arial" panose="020B0604020202020204" pitchFamily="34" charset="0"/>
+              <a:buAutoNum type="arabicPeriod"/>
+            </a:pPr>
+            <a:endParaRPr lang="de-CH"/>
+          </a:p>
+          <a:p>
+            <a:pPr lvl="1">
+              <a:buFont typeface="Arial" panose="020B0604020202020204" pitchFamily="34" charset="0"/>
+              <a:buAutoNum type="arabicPeriod"/>
+            </a:pPr>
+            <a:endParaRPr lang="de-CH"/>
+          </a:p>
+          <a:p>
+            <a:pPr marL="914400" lvl="1" indent="-457200">
+              <a:buFont typeface="Arial" panose="020B0604020202020204" pitchFamily="34" charset="0"/>
+              <a:buAutoNum type="arabicPeriod"/>
+            </a:pPr>
+            <a:endParaRPr lang="de-CH"/>
+          </a:p>
+        </p:txBody>
+      </p:sp>
+      <p:pic>
+        <p:nvPicPr>
+          <p:cNvPr id="7" name="Picture 6" descr="Unreal Engine 5.7 is now available - Unreal Engine">
+            <a:extLst>
+              <a:ext uri="{FF2B5EF4-FFF2-40B4-BE49-F238E27FC236}">
+                <a16:creationId xmlns:a16="http://schemas.microsoft.com/office/drawing/2014/main" id="{D68F789F-672A-A77D-FC51-F190FF9FD261}"/>
+              </a:ext>
+            </a:extLst>
+          </p:cNvPr>
+          <p:cNvPicPr>
+            <a:picLocks noChangeAspect="1"/>
+          </p:cNvPicPr>
+          <p:nvPr/>
+        </p:nvPicPr>
+        <p:blipFill>
+          <a:blip r:embed="rId2"/>
+          <a:srcRect l="18741" r="17282"/>
+          <a:stretch>
+            <a:fillRect/>
+          </a:stretch>
+        </p:blipFill>
+        <p:spPr>
+          <a:xfrm>
+            <a:off x="3506722" y="1719544"/>
+            <a:ext cx="1061049" cy="872939"/>
+          </a:xfrm>
+          <a:prstGeom prst="rect">
+            <a:avLst/>
+          </a:prstGeom>
+        </p:spPr>
+      </p:pic>
+      <p:pic>
+        <p:nvPicPr>
+          <p:cNvPr id="8" name="Picture 7" descr="GitHub – Wikipedia">
+            <a:extLst>
+              <a:ext uri="{FF2B5EF4-FFF2-40B4-BE49-F238E27FC236}">
+                <a16:creationId xmlns:a16="http://schemas.microsoft.com/office/drawing/2014/main" id="{55442423-804C-E40A-7D91-E1682D0E84A4}"/>
+              </a:ext>
+            </a:extLst>
+          </p:cNvPr>
+          <p:cNvPicPr>
+            <a:picLocks noChangeAspect="1"/>
+          </p:cNvPicPr>
+          <p:nvPr/>
+        </p:nvPicPr>
+        <p:blipFill>
+          <a:blip r:embed="rId3"/>
+          <a:stretch>
+            <a:fillRect/>
+          </a:stretch>
+        </p:blipFill>
+        <p:spPr>
+          <a:xfrm>
+            <a:off x="4719638" y="2151250"/>
+            <a:ext cx="690843" cy="699808"/>
+          </a:xfrm>
+          <a:prstGeom prst="rect">
+            <a:avLst/>
+          </a:prstGeom>
+        </p:spPr>
+      </p:pic>
+      <p:pic>
+        <p:nvPicPr>
+          <p:cNvPr id="9" name="Picture 8" descr="Sketchfab - The best 3D viewer on the web">
+            <a:extLst>
+              <a:ext uri="{FF2B5EF4-FFF2-40B4-BE49-F238E27FC236}">
+                <a16:creationId xmlns:a16="http://schemas.microsoft.com/office/drawing/2014/main" id="{4C2AF0A9-D44E-09DD-C353-5565B48A3A7F}"/>
+              </a:ext>
+            </a:extLst>
+          </p:cNvPr>
+          <p:cNvPicPr>
+            <a:picLocks noChangeAspect="1"/>
+          </p:cNvPicPr>
+          <p:nvPr/>
+        </p:nvPicPr>
+        <p:blipFill>
+          <a:blip r:embed="rId4"/>
+          <a:stretch>
+            <a:fillRect/>
+          </a:stretch>
+        </p:blipFill>
+        <p:spPr>
+          <a:xfrm>
+            <a:off x="3706626" y="2778778"/>
+            <a:ext cx="654985" cy="654985"/>
+          </a:xfrm>
+          <a:prstGeom prst="rect">
+            <a:avLst/>
+          </a:prstGeom>
+        </p:spPr>
+      </p:pic>
+      <p:pic>
+        <p:nvPicPr>
+          <p:cNvPr id="10" name="Picture 9" descr="Download free Meta Quest Developer Hub for macOS">
+            <a:extLst>
+              <a:ext uri="{FF2B5EF4-FFF2-40B4-BE49-F238E27FC236}">
+                <a16:creationId xmlns:a16="http://schemas.microsoft.com/office/drawing/2014/main" id="{838D10CE-40F1-8C01-FDE2-42595FFF49C0}"/>
+              </a:ext>
+            </a:extLst>
+          </p:cNvPr>
+          <p:cNvPicPr>
+            <a:picLocks noChangeAspect="1"/>
+          </p:cNvPicPr>
+          <p:nvPr/>
+        </p:nvPicPr>
+        <p:blipFill>
+          <a:blip r:embed="rId5"/>
+          <a:stretch>
+            <a:fillRect/>
+          </a:stretch>
+        </p:blipFill>
+        <p:spPr>
+          <a:xfrm>
+            <a:off x="4576203" y="3101508"/>
+            <a:ext cx="1076325" cy="1076325"/>
+          </a:xfrm>
+          <a:prstGeom prst="rect">
+            <a:avLst/>
+          </a:prstGeom>
+        </p:spPr>
+      </p:pic>
+      <p:pic>
+        <p:nvPicPr>
+          <p:cNvPr id="17" name="Picture 16" descr="Unity (Spiel-Engine) – Wikipedia">
+            <a:extLst>
+              <a:ext uri="{FF2B5EF4-FFF2-40B4-BE49-F238E27FC236}">
+                <a16:creationId xmlns:a16="http://schemas.microsoft.com/office/drawing/2014/main" id="{F2B624DA-FCDE-A429-B7CF-8077A665D396}"/>
+              </a:ext>
+            </a:extLst>
+          </p:cNvPr>
+          <p:cNvPicPr>
+            <a:picLocks noChangeAspect="1"/>
+          </p:cNvPicPr>
+          <p:nvPr/>
+        </p:nvPicPr>
+        <p:blipFill>
+          <a:blip r:embed="rId6"/>
+          <a:stretch>
+            <a:fillRect/>
+          </a:stretch>
+        </p:blipFill>
+        <p:spPr>
+          <a:xfrm>
+            <a:off x="9133354" y="1462368"/>
+            <a:ext cx="1885950" cy="723900"/>
+          </a:xfrm>
+          <a:prstGeom prst="rect">
+            <a:avLst/>
+          </a:prstGeom>
+        </p:spPr>
+      </p:pic>
+      <p:pic>
+        <p:nvPicPr>
+          <p:cNvPr id="4" name="Picture 3" descr="Oculus Developer Hub 2.0 | Meta Horizon OS Developers">
+            <a:extLst>
+              <a:ext uri="{FF2B5EF4-FFF2-40B4-BE49-F238E27FC236}">
+                <a16:creationId xmlns:a16="http://schemas.microsoft.com/office/drawing/2014/main" id="{04BB6119-5ECC-0138-AF03-DC7F663871CF}"/>
+              </a:ext>
+            </a:extLst>
+          </p:cNvPr>
+          <p:cNvPicPr>
+            <a:picLocks noChangeAspect="1"/>
+          </p:cNvPicPr>
+          <p:nvPr/>
+        </p:nvPicPr>
+        <p:blipFill>
+          <a:blip r:embed="rId7"/>
+          <a:srcRect l="20186" t="13842" r="21088" b="8993"/>
+          <a:stretch>
+            <a:fillRect/>
+          </a:stretch>
+        </p:blipFill>
+        <p:spPr>
+          <a:xfrm>
+            <a:off x="9911751" y="2778777"/>
+            <a:ext cx="1107553" cy="999593"/>
+          </a:xfrm>
+          <a:prstGeom prst="rect">
+            <a:avLst/>
+          </a:prstGeom>
+        </p:spPr>
+      </p:pic>
     </p:spTree>
     <p:extLst>
       <p:ext uri="{BB962C8B-B14F-4D97-AF65-F5344CB8AC3E}">
@@ -4429,7 +5104,9 @@
         </p:nvSpPr>
         <p:spPr/>
         <p:txBody>
-          <a:bodyPr/>
+          <a:bodyPr vert="horz" lIns="91440" tIns="45720" rIns="91440" bIns="45720" rtlCol="0" anchor="t">
+            <a:normAutofit/>
+          </a:bodyPr>
           <a:lstStyle/>
           <a:p>
             <a:endParaRPr lang="en-US"/>
@@ -4939,23 +5616,6 @@
 </file>
 
 <file path=customXml/item1.xml><?xml version="1.0" encoding="utf-8"?>
-<?mso-contentType ?>
-<FormTemplates xmlns="http://schemas.microsoft.com/sharepoint/v3/contenttype/forms">
-  <Display>DocumentLibraryForm</Display>
-  <Edit>DocumentLibraryForm</Edit>
-  <New>DocumentLibraryForm</New>
-</FormTemplates>
-</file>
-
-<file path=customXml/item2.xml><?xml version="1.0" encoding="utf-8"?>
-<p:properties xmlns:p="http://schemas.microsoft.com/office/2006/metadata/properties" xmlns:xsi="http://www.w3.org/2001/XMLSchema-instance" xmlns:pc="http://schemas.microsoft.com/office/infopath/2007/PartnerControls">
-  <documentManagement>
-    <_activity xmlns="7b482e70-4f35-40a3-b75e-ffa04ee0c79f" xsi:nil="true"/>
-  </documentManagement>
-</p:properties>
-</file>
-
-<file path=customXml/item3.xml><?xml version="1.0" encoding="utf-8"?>
 <ct:contentTypeSchema xmlns:ct="http://schemas.microsoft.com/office/2006/metadata/contentType" xmlns:ma="http://schemas.microsoft.com/office/2006/metadata/properties/metaAttributes" ct:_="" ma:_="" ma:contentTypeName="Document" ma:contentTypeID="0x0101003A7443C7252A364EA82FF0EDB3C44616" ma:contentTypeVersion="16" ma:contentTypeDescription="Crée un document." ma:contentTypeScope="" ma:versionID="99dd13c5d007134322681d689c73e4af">
   <xsd:schema xmlns:xsd="http://www.w3.org/2001/XMLSchema" xmlns:xs="http://www.w3.org/2001/XMLSchema" xmlns:p="http://schemas.microsoft.com/office/2006/metadata/properties" xmlns:ns3="7b482e70-4f35-40a3-b75e-ffa04ee0c79f" xmlns:ns4="4582224d-bab5-40fa-bd6d-5f2de2104ce9" targetNamespace="http://schemas.microsoft.com/office/2006/metadata/properties" ma:root="true" ma:fieldsID="b16fc3d7505b8814540dfc36f1e50148" ns3:_="" ns4:_="">
     <xsd:import namespace="7b482e70-4f35-40a3-b75e-ffa04ee0c79f"/>
@@ -5196,32 +5856,24 @@
 </ct:contentTypeSchema>
 </file>
 
-<file path=customXml/itemProps1.xml><?xml version="1.0" encoding="utf-8"?>
-<ds:datastoreItem xmlns:ds="http://schemas.openxmlformats.org/officeDocument/2006/customXml" ds:itemID="{671C1D4C-DDB7-40E3-8640-20852E4CEA3E}">
-  <ds:schemaRefs>
-    <ds:schemaRef ds:uri="http://schemas.microsoft.com/sharepoint/v3/contenttype/forms"/>
-  </ds:schemaRefs>
-</ds:datastoreItem>
+<file path=customXml/item2.xml><?xml version="1.0" encoding="utf-8"?>
+<?mso-contentType ?>
+<FormTemplates xmlns="http://schemas.microsoft.com/sharepoint/v3/contenttype/forms">
+  <Display>DocumentLibraryForm</Display>
+  <Edit>DocumentLibraryForm</Edit>
+  <New>DocumentLibraryForm</New>
+</FormTemplates>
 </file>
 
-<file path=customXml/itemProps2.xml><?xml version="1.0" encoding="utf-8"?>
-<ds:datastoreItem xmlns:ds="http://schemas.openxmlformats.org/officeDocument/2006/customXml" ds:itemID="{1061F33B-DBCF-4D99-8A24-A37E84CD3907}">
-  <ds:schemaRefs>
-    <ds:schemaRef ds:uri="4582224d-bab5-40fa-bd6d-5f2de2104ce9"/>
-    <ds:schemaRef ds:uri="7b482e70-4f35-40a3-b75e-ffa04ee0c79f"/>
-    <ds:schemaRef ds:uri="http://purl.org/dc/dcmitype/"/>
-    <ds:schemaRef ds:uri="http://purl.org/dc/elements/1.1/"/>
-    <ds:schemaRef ds:uri="http://purl.org/dc/terms/"/>
-    <ds:schemaRef ds:uri="http://schemas.microsoft.com/office/2006/documentManagement/types"/>
-    <ds:schemaRef ds:uri="http://schemas.microsoft.com/office/2006/metadata/properties"/>
-    <ds:schemaRef ds:uri="http://schemas.microsoft.com/office/infopath/2007/PartnerControls"/>
-    <ds:schemaRef ds:uri="http://schemas.openxmlformats.org/package/2006/metadata/core-properties"/>
-    <ds:schemaRef ds:uri="http://www.w3.org/XML/1998/namespace"/>
-  </ds:schemaRefs>
-</ds:datastoreItem>
+<file path=customXml/item3.xml><?xml version="1.0" encoding="utf-8"?>
+<p:properties xmlns:p="http://schemas.microsoft.com/office/2006/metadata/properties" xmlns:xsi="http://www.w3.org/2001/XMLSchema-instance" xmlns:pc="http://schemas.microsoft.com/office/infopath/2007/PartnerControls">
+  <documentManagement>
+    <_activity xmlns="7b482e70-4f35-40a3-b75e-ffa04ee0c79f" xsi:nil="true"/>
+  </documentManagement>
+</p:properties>
 </file>
 
-<file path=customXml/itemProps3.xml><?xml version="1.0" encoding="utf-8"?>
+<file path=customXml/itemProps1.xml><?xml version="1.0" encoding="utf-8"?>
 <ds:datastoreItem xmlns:ds="http://schemas.openxmlformats.org/officeDocument/2006/customXml" ds:itemID="{8419668F-5759-4465-9DD6-CB2CD64ED883}">
   <ds:schemaRefs>
     <ds:schemaRef ds:uri="4582224d-bab5-40fa-bd6d-5f2de2104ce9"/>
@@ -5238,4 +5890,29 @@
     <ds:schemaRef ds:uri="http://www.w3.org/2001/XMLSchema"/>
   </ds:schemaRefs>
 </ds:datastoreItem>
+</file>
+
+<file path=customXml/itemProps2.xml><?xml version="1.0" encoding="utf-8"?>
+<ds:datastoreItem xmlns:ds="http://schemas.openxmlformats.org/officeDocument/2006/customXml" ds:itemID="{671C1D4C-DDB7-40E3-8640-20852E4CEA3E}">
+  <ds:schemaRefs>
+    <ds:schemaRef ds:uri="http://schemas.microsoft.com/sharepoint/v3/contenttype/forms"/>
+  </ds:schemaRefs>
+</ds:datastoreItem>
+</file>
+
+<file path=customXml/itemProps3.xml><?xml version="1.0" encoding="utf-8"?>
+<ds:datastoreItem xmlns:ds="http://schemas.openxmlformats.org/officeDocument/2006/customXml" ds:itemID="{1061F33B-DBCF-4D99-8A24-A37E84CD3907}">
+  <ds:schemaRefs>
+    <ds:schemaRef ds:uri="4582224d-bab5-40fa-bd6d-5f2de2104ce9"/>
+    <ds:schemaRef ds:uri="7b482e70-4f35-40a3-b75e-ffa04ee0c79f"/>
+    <ds:schemaRef ds:uri="http://purl.org/dc/dcmitype/"/>
+    <ds:schemaRef ds:uri="http://purl.org/dc/elements/1.1/"/>
+    <ds:schemaRef ds:uri="http://purl.org/dc/terms/"/>
+    <ds:schemaRef ds:uri="http://schemas.microsoft.com/office/2006/documentManagement/types"/>
+    <ds:schemaRef ds:uri="http://schemas.microsoft.com/office/2006/metadata/properties"/>
+    <ds:schemaRef ds:uri="http://schemas.microsoft.com/office/infopath/2007/PartnerControls"/>
+    <ds:schemaRef ds:uri="http://schemas.openxmlformats.org/package/2006/metadata/core-properties"/>
+    <ds:schemaRef ds:uri="http://www.w3.org/XML/1998/namespace"/>
+  </ds:schemaRefs>
+</ds:datastoreItem>
 </file>
--- a/Presentation/Unrealengine pp.pptx
+++ b/Presentation/Unrealengine pp.pptx
@@ -7,14 +7,16 @@
   <p:sldIdLst>
     <p:sldId id="256" r:id="rId5"/>
     <p:sldId id="263" r:id="rId6"/>
-    <p:sldId id="258" r:id="rId7"/>
+    <p:sldId id="271" r:id="rId7"/>
     <p:sldId id="257" r:id="rId8"/>
-    <p:sldId id="264" r:id="rId9"/>
-    <p:sldId id="265" r:id="rId10"/>
-    <p:sldId id="266" r:id="rId11"/>
-    <p:sldId id="267" r:id="rId12"/>
-    <p:sldId id="268" r:id="rId13"/>
-    <p:sldId id="269" r:id="rId14"/>
+    <p:sldId id="270" r:id="rId9"/>
+    <p:sldId id="264" r:id="rId10"/>
+    <p:sldId id="272" r:id="rId11"/>
+    <p:sldId id="265" r:id="rId12"/>
+    <p:sldId id="266" r:id="rId13"/>
+    <p:sldId id="267" r:id="rId14"/>
+    <p:sldId id="268" r:id="rId15"/>
+    <p:sldId id="269" r:id="rId16"/>
   </p:sldIdLst>
   <p:sldSz cx="12192000" cy="6858000"/>
   <p:notesSz cx="6858000" cy="9144000"/>
@@ -772,7 +774,7 @@
           <a:p>
             <a:fld id="{CE70ADAD-9187-47F9-A249-492AE8E7021B}" type="datetimeFigureOut">
               <a:rPr lang="de-CH" smtClean="0"/>
-              <a:t>11.02.2026</a:t>
+              <a:t>04.03.2026</a:t>
             </a:fld>
             <a:endParaRPr lang="de-CH"/>
           </a:p>
@@ -972,7 +974,7 @@
           <a:p>
             <a:fld id="{CE70ADAD-9187-47F9-A249-492AE8E7021B}" type="datetimeFigureOut">
               <a:rPr lang="de-CH" smtClean="0"/>
-              <a:t>11.02.2026</a:t>
+              <a:t>04.03.2026</a:t>
             </a:fld>
             <a:endParaRPr lang="de-CH"/>
           </a:p>
@@ -1182,7 +1184,7 @@
           <a:p>
             <a:fld id="{CE70ADAD-9187-47F9-A249-492AE8E7021B}" type="datetimeFigureOut">
               <a:rPr lang="de-CH" smtClean="0"/>
-              <a:t>11.02.2026</a:t>
+              <a:t>04.03.2026</a:t>
             </a:fld>
             <a:endParaRPr lang="de-CH"/>
           </a:p>
@@ -1382,7 +1384,7 @@
           <a:p>
             <a:fld id="{CE70ADAD-9187-47F9-A249-492AE8E7021B}" type="datetimeFigureOut">
               <a:rPr lang="de-CH" smtClean="0"/>
-              <a:t>11.02.2026</a:t>
+              <a:t>04.03.2026</a:t>
             </a:fld>
             <a:endParaRPr lang="de-CH"/>
           </a:p>
@@ -1658,7 +1660,7 @@
           <a:p>
             <a:fld id="{CE70ADAD-9187-47F9-A249-492AE8E7021B}" type="datetimeFigureOut">
               <a:rPr lang="de-CH" smtClean="0"/>
-              <a:t>11.02.2026</a:t>
+              <a:t>04.03.2026</a:t>
             </a:fld>
             <a:endParaRPr lang="de-CH"/>
           </a:p>
@@ -1926,7 +1928,7 @@
           <a:p>
             <a:fld id="{CE70ADAD-9187-47F9-A249-492AE8E7021B}" type="datetimeFigureOut">
               <a:rPr lang="de-CH" smtClean="0"/>
-              <a:t>11.02.2026</a:t>
+              <a:t>04.03.2026</a:t>
             </a:fld>
             <a:endParaRPr lang="de-CH"/>
           </a:p>
@@ -2341,7 +2343,7 @@
           <a:p>
             <a:fld id="{CE70ADAD-9187-47F9-A249-492AE8E7021B}" type="datetimeFigureOut">
               <a:rPr lang="de-CH" smtClean="0"/>
-              <a:t>11.02.2026</a:t>
+              <a:t>04.03.2026</a:t>
             </a:fld>
             <a:endParaRPr lang="de-CH"/>
           </a:p>
@@ -2483,7 +2485,7 @@
           <a:p>
             <a:fld id="{CE70ADAD-9187-47F9-A249-492AE8E7021B}" type="datetimeFigureOut">
               <a:rPr lang="de-CH" smtClean="0"/>
-              <a:t>11.02.2026</a:t>
+              <a:t>04.03.2026</a:t>
             </a:fld>
             <a:endParaRPr lang="de-CH"/>
           </a:p>
@@ -2596,7 +2598,7 @@
           <a:p>
             <a:fld id="{CE70ADAD-9187-47F9-A249-492AE8E7021B}" type="datetimeFigureOut">
               <a:rPr lang="de-CH" smtClean="0"/>
-              <a:t>11.02.2026</a:t>
+              <a:t>04.03.2026</a:t>
             </a:fld>
             <a:endParaRPr lang="de-CH"/>
           </a:p>
@@ -2909,7 +2911,7 @@
           <a:p>
             <a:fld id="{CE70ADAD-9187-47F9-A249-492AE8E7021B}" type="datetimeFigureOut">
               <a:rPr lang="de-CH" smtClean="0"/>
-              <a:t>11.02.2026</a:t>
+              <a:t>04.03.2026</a:t>
             </a:fld>
             <a:endParaRPr lang="de-CH"/>
           </a:p>
@@ -3198,7 +3200,7 @@
           <a:p>
             <a:fld id="{CE70ADAD-9187-47F9-A249-492AE8E7021B}" type="datetimeFigureOut">
               <a:rPr lang="de-CH" smtClean="0"/>
-              <a:t>11.02.2026</a:t>
+              <a:t>04.03.2026</a:t>
             </a:fld>
             <a:endParaRPr lang="de-CH"/>
           </a:p>
@@ -3441,7 +3443,7 @@
           <a:p>
             <a:fld id="{CE70ADAD-9187-47F9-A249-492AE8E7021B}" type="datetimeFigureOut">
               <a:rPr lang="de-CH" smtClean="0"/>
-              <a:t>11.02.2026</a:t>
+              <a:t>04.03.2026</a:t>
             </a:fld>
             <a:endParaRPr lang="de-CH"/>
           </a:p>
@@ -3880,8 +3882,8 @@
           <a:lstStyle/>
           <a:p>
             <a:r>
-              <a:rPr lang="de-CH"/>
-              <a:t>VR Game(Name)</a:t>
+              <a:rPr lang="de-CH" dirty="0"/>
+              <a:t>VR-Game(Name)</a:t>
             </a:r>
           </a:p>
         </p:txBody>
@@ -3908,22 +3910,17 @@
           <a:lstStyle/>
           <a:p>
             <a:r>
-              <a:rPr lang="de-CH"/>
+              <a:rPr lang="de-CH" dirty="0"/>
               <a:t>Elia, Tadej, Ben, </a:t>
             </a:r>
             <a:r>
-              <a:rPr lang="de-CH" err="1"/>
+              <a:rPr lang="de-CH" dirty="0" err="1"/>
               <a:t>Aurelien</a:t>
             </a:r>
             <a:r>
-              <a:rPr lang="de-CH"/>
-              <a:t>, </a:t>
-            </a:r>
-            <a:r>
-              <a:rPr lang="de-CH" err="1"/>
-              <a:t>Safal</a:t>
-            </a:r>
-            <a:endParaRPr lang="de-CH"/>
+              <a:rPr lang="de-CH" dirty="0"/>
+              <a:t>, Safal</a:t>
+            </a:r>
           </a:p>
         </p:txBody>
       </p:sp>
@@ -3962,6 +3959,193 @@
           <p:cNvPr id="2" name="Title 1">
             <a:extLst>
               <a:ext uri="{FF2B5EF4-FFF2-40B4-BE49-F238E27FC236}">
+                <a16:creationId xmlns:a16="http://schemas.microsoft.com/office/drawing/2014/main" id="{112B59C9-D7A8-0317-1968-38B52CCB7530}"/>
+              </a:ext>
+            </a:extLst>
+          </p:cNvPr>
+          <p:cNvSpPr>
+            <a:spLocks noGrp="1"/>
+          </p:cNvSpPr>
+          <p:nvPr>
+            <p:ph type="title"/>
+          </p:nvPr>
+        </p:nvSpPr>
+        <p:spPr/>
+        <p:txBody>
+          <a:bodyPr/>
+          <a:lstStyle/>
+          <a:p>
+            <a:r>
+              <a:rPr lang="en-US"/>
+              <a:t>Was hat </a:t>
+            </a:r>
+            <a:r>
+              <a:rPr lang="en-US" err="1"/>
+              <a:t>uns</a:t>
+            </a:r>
+            <a:r>
+              <a:rPr lang="en-US"/>
+              <a:t> überrascht?</a:t>
+            </a:r>
+          </a:p>
+        </p:txBody>
+      </p:sp>
+      <p:sp>
+        <p:nvSpPr>
+          <p:cNvPr id="3" name="Content Placeholder 2">
+            <a:extLst>
+              <a:ext uri="{FF2B5EF4-FFF2-40B4-BE49-F238E27FC236}">
+                <a16:creationId xmlns:a16="http://schemas.microsoft.com/office/drawing/2014/main" id="{2EDFF1AB-8964-7212-8FB4-CB8CDB97FAE3}"/>
+              </a:ext>
+            </a:extLst>
+          </p:cNvPr>
+          <p:cNvSpPr>
+            <a:spLocks noGrp="1"/>
+          </p:cNvSpPr>
+          <p:nvPr>
+            <p:ph idx="1"/>
+          </p:nvPr>
+        </p:nvSpPr>
+        <p:spPr/>
+        <p:txBody>
+          <a:bodyPr/>
+          <a:lstStyle/>
+          <a:p>
+            <a:r>
+              <a:rPr lang="en-US" dirty="0" err="1"/>
+              <a:t>Komplexität</a:t>
+            </a:r>
+            <a:r>
+              <a:rPr lang="en-US" dirty="0"/>
+              <a:t> von Software</a:t>
+            </a:r>
+          </a:p>
+          <a:p>
+            <a:endParaRPr lang="en-US" dirty="0"/>
+          </a:p>
+          <a:p>
+            <a:endParaRPr lang="en-US" dirty="0"/>
+          </a:p>
+        </p:txBody>
+      </p:sp>
+    </p:spTree>
+    <p:extLst>
+      <p:ext uri="{BB962C8B-B14F-4D97-AF65-F5344CB8AC3E}">
+        <p14:creationId xmlns:p14="http://schemas.microsoft.com/office/powerpoint/2010/main" val="761157137"/>
+      </p:ext>
+    </p:extLst>
+  </p:cSld>
+  <p:clrMapOvr>
+    <a:masterClrMapping/>
+  </p:clrMapOvr>
+</p:sld>
+</file>
+
+<file path=ppt/slides/slide11.xml><?xml version="1.0" encoding="utf-8"?>
+<p:sld xmlns:a="http://schemas.openxmlformats.org/drawingml/2006/main" xmlns:r="http://schemas.openxmlformats.org/officeDocument/2006/relationships" xmlns:p="http://schemas.openxmlformats.org/presentationml/2006/main">
+  <p:cSld>
+    <p:spTree>
+      <p:nvGrpSpPr>
+        <p:cNvPr id="1" name=""/>
+        <p:cNvGrpSpPr/>
+        <p:nvPr/>
+      </p:nvGrpSpPr>
+      <p:grpSpPr>
+        <a:xfrm>
+          <a:off x="0" y="0"/>
+          <a:ext cx="0" cy="0"/>
+          <a:chOff x="0" y="0"/>
+          <a:chExt cx="0" cy="0"/>
+        </a:xfrm>
+      </p:grpSpPr>
+      <p:sp>
+        <p:nvSpPr>
+          <p:cNvPr id="2" name="Title 1">
+            <a:extLst>
+              <a:ext uri="{FF2B5EF4-FFF2-40B4-BE49-F238E27FC236}">
+                <a16:creationId xmlns:a16="http://schemas.microsoft.com/office/drawing/2014/main" id="{AFF46E95-2E97-E61B-88B9-6E1A97F1EF1D}"/>
+              </a:ext>
+            </a:extLst>
+          </p:cNvPr>
+          <p:cNvSpPr>
+            <a:spLocks noGrp="1"/>
+          </p:cNvSpPr>
+          <p:nvPr>
+            <p:ph type="title"/>
+          </p:nvPr>
+        </p:nvSpPr>
+        <p:spPr/>
+        <p:txBody>
+          <a:bodyPr/>
+          <a:lstStyle/>
+          <a:p>
+            <a:r>
+              <a:rPr lang="en-US"/>
+              <a:t>Reflektion</a:t>
+            </a:r>
+          </a:p>
+        </p:txBody>
+      </p:sp>
+      <p:sp>
+        <p:nvSpPr>
+          <p:cNvPr id="3" name="Content Placeholder 2">
+            <a:extLst>
+              <a:ext uri="{FF2B5EF4-FFF2-40B4-BE49-F238E27FC236}">
+                <a16:creationId xmlns:a16="http://schemas.microsoft.com/office/drawing/2014/main" id="{617DA1C0-367D-6611-4054-E45F28C96540}"/>
+              </a:ext>
+            </a:extLst>
+          </p:cNvPr>
+          <p:cNvSpPr>
+            <a:spLocks noGrp="1"/>
+          </p:cNvSpPr>
+          <p:nvPr>
+            <p:ph idx="1"/>
+          </p:nvPr>
+        </p:nvSpPr>
+        <p:spPr/>
+        <p:txBody>
+          <a:bodyPr/>
+          <a:lstStyle/>
+          <a:p>
+            <a:endParaRPr lang="en-US"/>
+          </a:p>
+        </p:txBody>
+      </p:sp>
+    </p:spTree>
+    <p:extLst>
+      <p:ext uri="{BB962C8B-B14F-4D97-AF65-F5344CB8AC3E}">
+        <p14:creationId xmlns:p14="http://schemas.microsoft.com/office/powerpoint/2010/main" val="4211665210"/>
+      </p:ext>
+    </p:extLst>
+  </p:cSld>
+  <p:clrMapOvr>
+    <a:masterClrMapping/>
+  </p:clrMapOvr>
+</p:sld>
+</file>
+
+<file path=ppt/slides/slide12.xml><?xml version="1.0" encoding="utf-8"?>
+<p:sld xmlns:a="http://schemas.openxmlformats.org/drawingml/2006/main" xmlns:r="http://schemas.openxmlformats.org/officeDocument/2006/relationships" xmlns:p="http://schemas.openxmlformats.org/presentationml/2006/main">
+  <p:cSld>
+    <p:spTree>
+      <p:nvGrpSpPr>
+        <p:cNvPr id="1" name=""/>
+        <p:cNvGrpSpPr/>
+        <p:nvPr/>
+      </p:nvGrpSpPr>
+      <p:grpSpPr>
+        <a:xfrm>
+          <a:off x="0" y="0"/>
+          <a:ext cx="0" cy="0"/>
+          <a:chOff x="0" y="0"/>
+          <a:chExt cx="0" cy="0"/>
+        </a:xfrm>
+      </p:grpSpPr>
+      <p:sp>
+        <p:nvSpPr>
+          <p:cNvPr id="2" name="Title 1">
+            <a:extLst>
+              <a:ext uri="{FF2B5EF4-FFF2-40B4-BE49-F238E27FC236}">
                 <a16:creationId xmlns:a16="http://schemas.microsoft.com/office/drawing/2014/main" id="{1429A97F-47BB-2EB8-B91D-07FC48C2C457}"/>
               </a:ext>
             </a:extLst>
@@ -4157,10 +4341,10 @@
       </p:grpSpPr>
       <p:sp>
         <p:nvSpPr>
-          <p:cNvPr id="2" name="Titel 1">
-            <a:extLst>
-              <a:ext uri="{FF2B5EF4-FFF2-40B4-BE49-F238E27FC236}">
-                <a16:creationId xmlns:a16="http://schemas.microsoft.com/office/drawing/2014/main" id="{318F1F6D-40C5-1BD9-423A-1B72E93E2327}"/>
+          <p:cNvPr id="2" name="Title 1">
+            <a:extLst>
+              <a:ext uri="{FF2B5EF4-FFF2-40B4-BE49-F238E27FC236}">
+                <a16:creationId xmlns:a16="http://schemas.microsoft.com/office/drawing/2014/main" id="{55D94D8F-F6AF-EF62-987C-DC96360DD0CF}"/>
               </a:ext>
             </a:extLst>
           </p:cNvPr>
@@ -4178,17 +4362,18 @@
           <a:p>
             <a:r>
               <a:rPr lang="de-CH"/>
-              <a:t>Tools (Gebraucht, Ungebraucht)</a:t>
-            </a:r>
-          </a:p>
-        </p:txBody>
-      </p:sp>
-      <p:sp>
-        <p:nvSpPr>
-          <p:cNvPr id="3" name="Inhaltsplatzhalter 2">
-            <a:extLst>
-              <a:ext uri="{FF2B5EF4-FFF2-40B4-BE49-F238E27FC236}">
-                <a16:creationId xmlns:a16="http://schemas.microsoft.com/office/drawing/2014/main" id="{CED2D7B6-A038-20F8-8D13-6A3B6506ABBD}"/>
+              <a:t>Tool</a:t>
+            </a:r>
+            <a:endParaRPr lang="de-CH" dirty="0"/>
+          </a:p>
+        </p:txBody>
+      </p:sp>
+      <p:sp>
+        <p:nvSpPr>
+          <p:cNvPr id="3" name="Content Placeholder 2">
+            <a:extLst>
+              <a:ext uri="{FF2B5EF4-FFF2-40B4-BE49-F238E27FC236}">
+                <a16:creationId xmlns:a16="http://schemas.microsoft.com/office/drawing/2014/main" id="{27945FCD-689E-3852-2F6F-5480D4DC8B91}"/>
               </a:ext>
             </a:extLst>
           </p:cNvPr>
@@ -4199,337 +4384,48 @@
             <p:ph idx="1"/>
           </p:nvPr>
         </p:nvSpPr>
-        <p:spPr>
-          <a:xfrm>
-            <a:off x="838200" y="1825625"/>
-            <a:ext cx="4580965" cy="4351338"/>
-          </a:xfrm>
-        </p:spPr>
-        <p:txBody>
-          <a:bodyPr vert="horz" lIns="91440" tIns="45720" rIns="91440" bIns="45720" rtlCol="0" anchor="t">
-            <a:normAutofit/>
-          </a:bodyPr>
-          <a:lstStyle/>
-          <a:p>
-            <a:r>
-              <a:rPr lang="de-CH"/>
-              <a:t>Gebraucht:</a:t>
-            </a:r>
-          </a:p>
-          <a:p>
-            <a:pPr lvl="1">
-              <a:buAutoNum type="arabicPeriod"/>
-            </a:pPr>
+        <p:spPr/>
+        <p:txBody>
+          <a:bodyPr/>
+          <a:lstStyle/>
+          <a:p>
             <a:r>
               <a:rPr lang="de-CH"/>
               <a:t>Unreal Engine</a:t>
             </a:r>
           </a:p>
           <a:p>
-            <a:pPr lvl="1">
-              <a:buAutoNum type="arabicPeriod"/>
-            </a:pPr>
-            <a:r>
-              <a:rPr lang="de-CH" err="1"/>
+            <a:r>
+              <a:rPr lang="de-CH"/>
               <a:t>Github</a:t>
             </a:r>
+          </a:p>
+          <a:p>
+            <a:r>
+              <a:rPr lang="de-CH"/>
+              <a:t>Sketchla</a:t>
+            </a:r>
+          </a:p>
+          <a:p>
+            <a:r>
+              <a:rPr lang="de-CH"/>
+              <a:t>Meta Quest Link</a:t>
+            </a:r>
+          </a:p>
+          <a:p>
             <a:endParaRPr lang="de-CH"/>
           </a:p>
           <a:p>
-            <a:pPr lvl="1">
-              <a:buAutoNum type="arabicPeriod"/>
-            </a:pPr>
-            <a:r>
-              <a:rPr lang="de-CH" err="1"/>
-              <a:t>Sketchfab</a:t>
-            </a:r>
-            <a:endParaRPr lang="de-CH"/>
-          </a:p>
-          <a:p>
-            <a:pPr lvl="1">
-              <a:buAutoNum type="arabicPeriod"/>
-            </a:pPr>
-            <a:r>
-              <a:rPr lang="de-CH" err="1"/>
-              <a:t>Meta</a:t>
-            </a:r>
-            <a:r>
-              <a:rPr lang="de-CH"/>
-              <a:t> Quest Link</a:t>
-            </a:r>
-          </a:p>
-          <a:p>
-            <a:pPr lvl="1">
-              <a:buAutoNum type="arabicPeriod"/>
-            </a:pPr>
-            <a:endParaRPr lang="de-CH"/>
-          </a:p>
-          <a:p>
-            <a:pPr lvl="1">
-              <a:buAutoNum type="arabicPeriod"/>
-            </a:pPr>
-            <a:endParaRPr lang="de-CH"/>
-          </a:p>
-          <a:p>
-            <a:pPr marL="914400" lvl="1" indent="-457200">
-              <a:buAutoNum type="arabicPeriod"/>
-            </a:pPr>
-            <a:endParaRPr lang="de-CH"/>
-          </a:p>
-        </p:txBody>
-      </p:sp>
-      <p:sp>
-        <p:nvSpPr>
-          <p:cNvPr id="6" name="Inhaltsplatzhalter 2">
-            <a:extLst>
-              <a:ext uri="{FF2B5EF4-FFF2-40B4-BE49-F238E27FC236}">
-                <a16:creationId xmlns:a16="http://schemas.microsoft.com/office/drawing/2014/main" id="{9FB268C8-0FC4-4D48-DF3D-D03B5D380208}"/>
-              </a:ext>
-            </a:extLst>
-          </p:cNvPr>
-          <p:cNvSpPr txBox="1">
-            <a:spLocks/>
-          </p:cNvSpPr>
-          <p:nvPr/>
-        </p:nvSpPr>
-        <p:spPr>
-          <a:xfrm>
-            <a:off x="6091518" y="1718048"/>
-            <a:ext cx="4580965" cy="4351338"/>
-          </a:xfrm>
-          <a:prstGeom prst="rect">
-            <a:avLst/>
-          </a:prstGeom>
-        </p:spPr>
-        <p:txBody>
-          <a:bodyPr vert="horz" lIns="91440" tIns="45720" rIns="91440" bIns="45720" rtlCol="0" anchor="t">
-            <a:normAutofit/>
-          </a:bodyPr>
-          <a:lstStyle>
-            <a:lvl1pPr marL="228600" indent="-228600" algn="l" defTabSz="914400" rtl="0" eaLnBrk="1" latinLnBrk="0" hangingPunct="1">
-              <a:lnSpc>
-                <a:spcPct val="90000"/>
-              </a:lnSpc>
-              <a:spcBef>
-                <a:spcPts val="1000"/>
-              </a:spcBef>
-              <a:buFont typeface="Arial" panose="020B0604020202020204" pitchFamily="34" charset="0"/>
-              <a:buChar char="•"/>
-              <a:defRPr sz="2800" kern="1200">
-                <a:solidFill>
-                  <a:schemeClr val="tx1"/>
-                </a:solidFill>
-                <a:latin typeface="+mn-lt"/>
-                <a:ea typeface="+mn-ea"/>
-                <a:cs typeface="+mn-cs"/>
-              </a:defRPr>
-            </a:lvl1pPr>
-            <a:lvl2pPr marL="685800" indent="-228600" algn="l" defTabSz="914400" rtl="0" eaLnBrk="1" latinLnBrk="0" hangingPunct="1">
-              <a:lnSpc>
-                <a:spcPct val="90000"/>
-              </a:lnSpc>
-              <a:spcBef>
-                <a:spcPts val="500"/>
-              </a:spcBef>
-              <a:buFont typeface="Arial" panose="020B0604020202020204" pitchFamily="34" charset="0"/>
-              <a:buChar char="•"/>
-              <a:defRPr sz="2400" kern="1200">
-                <a:solidFill>
-                  <a:schemeClr val="tx1"/>
-                </a:solidFill>
-                <a:latin typeface="+mn-lt"/>
-                <a:ea typeface="+mn-ea"/>
-                <a:cs typeface="+mn-cs"/>
-              </a:defRPr>
-            </a:lvl2pPr>
-            <a:lvl3pPr marL="1143000" indent="-228600" algn="l" defTabSz="914400" rtl="0" eaLnBrk="1" latinLnBrk="0" hangingPunct="1">
-              <a:lnSpc>
-                <a:spcPct val="90000"/>
-              </a:lnSpc>
-              <a:spcBef>
-                <a:spcPts val="500"/>
-              </a:spcBef>
-              <a:buFont typeface="Arial" panose="020B0604020202020204" pitchFamily="34" charset="0"/>
-              <a:buChar char="•"/>
-              <a:defRPr sz="2000" kern="1200">
-                <a:solidFill>
-                  <a:schemeClr val="tx1"/>
-                </a:solidFill>
-                <a:latin typeface="+mn-lt"/>
-                <a:ea typeface="+mn-ea"/>
-                <a:cs typeface="+mn-cs"/>
-              </a:defRPr>
-            </a:lvl3pPr>
-            <a:lvl4pPr marL="1600200" indent="-228600" algn="l" defTabSz="914400" rtl="0" eaLnBrk="1" latinLnBrk="0" hangingPunct="1">
-              <a:lnSpc>
-                <a:spcPct val="90000"/>
-              </a:lnSpc>
-              <a:spcBef>
-                <a:spcPts val="500"/>
-              </a:spcBef>
-              <a:buFont typeface="Arial" panose="020B0604020202020204" pitchFamily="34" charset="0"/>
-              <a:buChar char="•"/>
-              <a:defRPr sz="1800" kern="1200">
-                <a:solidFill>
-                  <a:schemeClr val="tx1"/>
-                </a:solidFill>
-                <a:latin typeface="+mn-lt"/>
-                <a:ea typeface="+mn-ea"/>
-                <a:cs typeface="+mn-cs"/>
-              </a:defRPr>
-            </a:lvl4pPr>
-            <a:lvl5pPr marL="2057400" indent="-228600" algn="l" defTabSz="914400" rtl="0" eaLnBrk="1" latinLnBrk="0" hangingPunct="1">
-              <a:lnSpc>
-                <a:spcPct val="90000"/>
-              </a:lnSpc>
-              <a:spcBef>
-                <a:spcPts val="500"/>
-              </a:spcBef>
-              <a:buFont typeface="Arial" panose="020B0604020202020204" pitchFamily="34" charset="0"/>
-              <a:buChar char="•"/>
-              <a:defRPr sz="1800" kern="1200">
-                <a:solidFill>
-                  <a:schemeClr val="tx1"/>
-                </a:solidFill>
-                <a:latin typeface="+mn-lt"/>
-                <a:ea typeface="+mn-ea"/>
-                <a:cs typeface="+mn-cs"/>
-              </a:defRPr>
-            </a:lvl5pPr>
-            <a:lvl6pPr marL="2514600" indent="-228600" algn="l" defTabSz="914400" rtl="0" eaLnBrk="1" latinLnBrk="0" hangingPunct="1">
-              <a:lnSpc>
-                <a:spcPct val="90000"/>
-              </a:lnSpc>
-              <a:spcBef>
-                <a:spcPts val="500"/>
-              </a:spcBef>
-              <a:buFont typeface="Arial" panose="020B0604020202020204" pitchFamily="34" charset="0"/>
-              <a:buChar char="•"/>
-              <a:defRPr sz="1800" kern="1200">
-                <a:solidFill>
-                  <a:schemeClr val="tx1"/>
-                </a:solidFill>
-                <a:latin typeface="+mn-lt"/>
-                <a:ea typeface="+mn-ea"/>
-                <a:cs typeface="+mn-cs"/>
-              </a:defRPr>
-            </a:lvl6pPr>
-            <a:lvl7pPr marL="2971800" indent="-228600" algn="l" defTabSz="914400" rtl="0" eaLnBrk="1" latinLnBrk="0" hangingPunct="1">
-              <a:lnSpc>
-                <a:spcPct val="90000"/>
-              </a:lnSpc>
-              <a:spcBef>
-                <a:spcPts val="500"/>
-              </a:spcBef>
-              <a:buFont typeface="Arial" panose="020B0604020202020204" pitchFamily="34" charset="0"/>
-              <a:buChar char="•"/>
-              <a:defRPr sz="1800" kern="1200">
-                <a:solidFill>
-                  <a:schemeClr val="tx1"/>
-                </a:solidFill>
-                <a:latin typeface="+mn-lt"/>
-                <a:ea typeface="+mn-ea"/>
-                <a:cs typeface="+mn-cs"/>
-              </a:defRPr>
-            </a:lvl7pPr>
-            <a:lvl8pPr marL="3429000" indent="-228600" algn="l" defTabSz="914400" rtl="0" eaLnBrk="1" latinLnBrk="0" hangingPunct="1">
-              <a:lnSpc>
-                <a:spcPct val="90000"/>
-              </a:lnSpc>
-              <a:spcBef>
-                <a:spcPts val="500"/>
-              </a:spcBef>
-              <a:buFont typeface="Arial" panose="020B0604020202020204" pitchFamily="34" charset="0"/>
-              <a:buChar char="•"/>
-              <a:defRPr sz="1800" kern="1200">
-                <a:solidFill>
-                  <a:schemeClr val="tx1"/>
-                </a:solidFill>
-                <a:latin typeface="+mn-lt"/>
-                <a:ea typeface="+mn-ea"/>
-                <a:cs typeface="+mn-cs"/>
-              </a:defRPr>
-            </a:lvl8pPr>
-            <a:lvl9pPr marL="3886200" indent="-228600" algn="l" defTabSz="914400" rtl="0" eaLnBrk="1" latinLnBrk="0" hangingPunct="1">
-              <a:lnSpc>
-                <a:spcPct val="90000"/>
-              </a:lnSpc>
-              <a:spcBef>
-                <a:spcPts val="500"/>
-              </a:spcBef>
-              <a:buFont typeface="Arial" panose="020B0604020202020204" pitchFamily="34" charset="0"/>
-              <a:buChar char="•"/>
-              <a:defRPr sz="1800" kern="1200">
-                <a:solidFill>
-                  <a:schemeClr val="tx1"/>
-                </a:solidFill>
-                <a:latin typeface="+mn-lt"/>
-                <a:ea typeface="+mn-ea"/>
-                <a:cs typeface="+mn-cs"/>
-              </a:defRPr>
-            </a:lvl9pPr>
-          </a:lstStyle>
-          <a:p>
-            <a:r>
-              <a:rPr lang="de-CH"/>
-              <a:t>Ungebraucht:</a:t>
-            </a:r>
-          </a:p>
-          <a:p>
-            <a:pPr lvl="1">
-              <a:buAutoNum type="arabicPeriod"/>
-            </a:pPr>
-            <a:r>
-              <a:rPr lang="de-CH"/>
-              <a:t>Unity</a:t>
-            </a:r>
-          </a:p>
-          <a:p>
-            <a:pPr lvl="1">
-              <a:buAutoNum type="arabicPeriod"/>
-            </a:pPr>
-            <a:r>
-              <a:rPr lang="de-CH"/>
-              <a:t>Developer Hub (</a:t>
-            </a:r>
-            <a:r>
-              <a:rPr lang="de-CH" err="1"/>
-              <a:t>Meta</a:t>
-            </a:r>
-            <a:r>
-              <a:rPr lang="de-CH"/>
-              <a:t>)</a:t>
-            </a:r>
-          </a:p>
-          <a:p>
-            <a:pPr lvl="1">
-              <a:buFont typeface="Arial" panose="020B0604020202020204" pitchFamily="34" charset="0"/>
-              <a:buAutoNum type="arabicPeriod"/>
-            </a:pPr>
-            <a:endParaRPr lang="de-CH"/>
-          </a:p>
-          <a:p>
-            <a:pPr lvl="1">
-              <a:buFont typeface="Arial" panose="020B0604020202020204" pitchFamily="34" charset="0"/>
-              <a:buAutoNum type="arabicPeriod"/>
-            </a:pPr>
-            <a:endParaRPr lang="de-CH"/>
-          </a:p>
-          <a:p>
-            <a:pPr marL="914400" lvl="1" indent="-457200">
-              <a:buFont typeface="Arial" panose="020B0604020202020204" pitchFamily="34" charset="0"/>
-              <a:buAutoNum type="arabicPeriod"/>
-            </a:pPr>
-            <a:endParaRPr lang="de-CH"/>
+            <a:endParaRPr lang="de-CH" dirty="0"/>
           </a:p>
         </p:txBody>
       </p:sp>
       <p:pic>
         <p:nvPicPr>
-          <p:cNvPr id="7" name="Picture 6" descr="Unreal Engine 5.7 is now available - Unreal Engine">
-            <a:extLst>
-              <a:ext uri="{FF2B5EF4-FFF2-40B4-BE49-F238E27FC236}">
-                <a16:creationId xmlns:a16="http://schemas.microsoft.com/office/drawing/2014/main" id="{D68F789F-672A-A77D-FC51-F190FF9FD261}"/>
+          <p:cNvPr id="12" name="Picture 11" descr="Download free Meta Quest Developer Hub for macOS">
+            <a:extLst>
+              <a:ext uri="{FF2B5EF4-FFF2-40B4-BE49-F238E27FC236}">
+                <a16:creationId xmlns:a16="http://schemas.microsoft.com/office/drawing/2014/main" id="{3000DB78-6805-8E8E-9E58-65200798EF89}"/>
               </a:ext>
             </a:extLst>
           </p:cNvPr>
@@ -4540,15 +4436,15 @@
         </p:nvPicPr>
         <p:blipFill>
           <a:blip r:embed="rId2"/>
-          <a:srcRect l="18741" r="17282"/>
+          <a:srcRect t="41" r="-2" b="-2"/>
           <a:stretch>
             <a:fillRect/>
           </a:stretch>
         </p:blipFill>
         <p:spPr>
           <a:xfrm>
-            <a:off x="3506722" y="1719544"/>
-            <a:ext cx="1061049" cy="872939"/>
+            <a:off x="6518833" y="932787"/>
+            <a:ext cx="2481812" cy="2480799"/>
           </a:xfrm>
           <a:prstGeom prst="rect">
             <a:avLst/>
@@ -4557,10 +4453,10 @@
       </p:pic>
       <p:pic>
         <p:nvPicPr>
-          <p:cNvPr id="8" name="Picture 7" descr="GitHub – Wikipedia">
-            <a:extLst>
-              <a:ext uri="{FF2B5EF4-FFF2-40B4-BE49-F238E27FC236}">
-                <a16:creationId xmlns:a16="http://schemas.microsoft.com/office/drawing/2014/main" id="{55442423-804C-E40A-7D91-E1682D0E84A4}"/>
+          <p:cNvPr id="13" name="Picture 12" descr="GitHub – Wikipedia">
+            <a:extLst>
+              <a:ext uri="{FF2B5EF4-FFF2-40B4-BE49-F238E27FC236}">
+                <a16:creationId xmlns:a16="http://schemas.microsoft.com/office/drawing/2014/main" id="{0A9EFDB0-E03A-3F19-B0F5-AB41B642A33E}"/>
               </a:ext>
             </a:extLst>
           </p:cNvPr>
@@ -4571,14 +4467,15 @@
         </p:nvPicPr>
         <p:blipFill>
           <a:blip r:embed="rId3"/>
+          <a:srcRect l="651" r="-1" b="-1"/>
           <a:stretch>
             <a:fillRect/>
           </a:stretch>
         </p:blipFill>
         <p:spPr>
           <a:xfrm>
-            <a:off x="4719638" y="2151250"/>
-            <a:ext cx="690843" cy="699808"/>
+            <a:off x="9056394" y="919877"/>
+            <a:ext cx="2477468" cy="2493709"/>
           </a:xfrm>
           <a:prstGeom prst="rect">
             <a:avLst/>
@@ -4587,10 +4484,10 @@
       </p:pic>
       <p:pic>
         <p:nvPicPr>
-          <p:cNvPr id="9" name="Picture 8" descr="Sketchfab - The best 3D viewer on the web">
-            <a:extLst>
-              <a:ext uri="{FF2B5EF4-FFF2-40B4-BE49-F238E27FC236}">
-                <a16:creationId xmlns:a16="http://schemas.microsoft.com/office/drawing/2014/main" id="{4C2AF0A9-D44E-09DD-C353-5565B48A3A7F}"/>
+          <p:cNvPr id="14" name="Picture 13" descr="Sketchfab - The best 3D viewer on the web">
+            <a:extLst>
+              <a:ext uri="{FF2B5EF4-FFF2-40B4-BE49-F238E27FC236}">
+                <a16:creationId xmlns:a16="http://schemas.microsoft.com/office/drawing/2014/main" id="{1EB3D228-3F8F-3836-EC99-6BA10076E471}"/>
               </a:ext>
             </a:extLst>
           </p:cNvPr>
@@ -4601,14 +4498,15 @@
         </p:nvPicPr>
         <p:blipFill>
           <a:blip r:embed="rId4"/>
+          <a:srcRect t="41" r="-2" b="-2"/>
           <a:stretch>
             <a:fillRect/>
           </a:stretch>
         </p:blipFill>
         <p:spPr>
           <a:xfrm>
-            <a:off x="3706626" y="2778778"/>
-            <a:ext cx="654985" cy="654985"/>
+            <a:off x="6518833" y="3470432"/>
+            <a:ext cx="2481812" cy="2480799"/>
           </a:xfrm>
           <a:prstGeom prst="rect">
             <a:avLst/>
@@ -4617,10 +4515,10 @@
       </p:pic>
       <p:pic>
         <p:nvPicPr>
-          <p:cNvPr id="10" name="Picture 9" descr="Download free Meta Quest Developer Hub for macOS">
-            <a:extLst>
-              <a:ext uri="{FF2B5EF4-FFF2-40B4-BE49-F238E27FC236}">
-                <a16:creationId xmlns:a16="http://schemas.microsoft.com/office/drawing/2014/main" id="{838D10CE-40F1-8C01-FDE2-42595FFF49C0}"/>
+          <p:cNvPr id="18" name="Picture 17" descr="Unreal Engine 5.7 is now available - Unreal Engine">
+            <a:extLst>
+              <a:ext uri="{FF2B5EF4-FFF2-40B4-BE49-F238E27FC236}">
+                <a16:creationId xmlns:a16="http://schemas.microsoft.com/office/drawing/2014/main" id="{73DC1C2D-6C11-72D2-D27C-B29389F1B15D}"/>
               </a:ext>
             </a:extLst>
           </p:cNvPr>
@@ -4631,75 +4529,15 @@
         </p:nvPicPr>
         <p:blipFill>
           <a:blip r:embed="rId5"/>
+          <a:srcRect l="24609" r="23234" b="2"/>
           <a:stretch>
             <a:fillRect/>
           </a:stretch>
         </p:blipFill>
         <p:spPr>
           <a:xfrm>
-            <a:off x="4576203" y="3101508"/>
-            <a:ext cx="1076325" cy="1076325"/>
-          </a:xfrm>
-          <a:prstGeom prst="rect">
-            <a:avLst/>
-          </a:prstGeom>
-        </p:spPr>
-      </p:pic>
-      <p:pic>
-        <p:nvPicPr>
-          <p:cNvPr id="17" name="Picture 16" descr="Unity (Spiel-Engine) – Wikipedia">
-            <a:extLst>
-              <a:ext uri="{FF2B5EF4-FFF2-40B4-BE49-F238E27FC236}">
-                <a16:creationId xmlns:a16="http://schemas.microsoft.com/office/drawing/2014/main" id="{F2B624DA-FCDE-A429-B7CF-8077A665D396}"/>
-              </a:ext>
-            </a:extLst>
-          </p:cNvPr>
-          <p:cNvPicPr>
-            <a:picLocks noChangeAspect="1"/>
-          </p:cNvPicPr>
-          <p:nvPr/>
-        </p:nvPicPr>
-        <p:blipFill>
-          <a:blip r:embed="rId6"/>
-          <a:stretch>
-            <a:fillRect/>
-          </a:stretch>
-        </p:blipFill>
-        <p:spPr>
-          <a:xfrm>
-            <a:off x="9133354" y="1462368"/>
-            <a:ext cx="1885950" cy="723900"/>
-          </a:xfrm>
-          <a:prstGeom prst="rect">
-            <a:avLst/>
-          </a:prstGeom>
-        </p:spPr>
-      </p:pic>
-      <p:pic>
-        <p:nvPicPr>
-          <p:cNvPr id="4" name="Picture 3" descr="Oculus Developer Hub 2.0 | Meta Horizon OS Developers">
-            <a:extLst>
-              <a:ext uri="{FF2B5EF4-FFF2-40B4-BE49-F238E27FC236}">
-                <a16:creationId xmlns:a16="http://schemas.microsoft.com/office/drawing/2014/main" id="{04BB6119-5ECC-0138-AF03-DC7F663871CF}"/>
-              </a:ext>
-            </a:extLst>
-          </p:cNvPr>
-          <p:cNvPicPr>
-            <a:picLocks noChangeAspect="1"/>
-          </p:cNvPicPr>
-          <p:nvPr/>
-        </p:nvPicPr>
-        <p:blipFill>
-          <a:blip r:embed="rId7"/>
-          <a:srcRect l="20186" t="13842" r="21088" b="8993"/>
-          <a:stretch>
-            <a:fillRect/>
-          </a:stretch>
-        </p:blipFill>
-        <p:spPr>
-          <a:xfrm>
-            <a:off x="9911751" y="2778777"/>
-            <a:ext cx="1107553" cy="999593"/>
+            <a:off x="9056394" y="3463675"/>
+            <a:ext cx="2477468" cy="2493709"/>
           </a:xfrm>
           <a:prstGeom prst="rect">
             <a:avLst/>
@@ -4709,7 +4547,7 @@
     </p:spTree>
     <p:extLst>
       <p:ext uri="{BB962C8B-B14F-4D97-AF65-F5344CB8AC3E}">
-        <p14:creationId xmlns:p14="http://schemas.microsoft.com/office/powerpoint/2010/main" val="4025588667"/>
+        <p14:creationId xmlns:p14="http://schemas.microsoft.com/office/powerpoint/2010/main" val="3271530750"/>
       </p:ext>
     </p:extLst>
   </p:cSld>
@@ -4758,7 +4596,7 @@
           <a:lstStyle/>
           <a:p>
             <a:r>
-              <a:rPr lang="de-CH"/>
+              <a:rPr lang="de-CH" dirty="0"/>
               <a:t>Endresultat vs. Zielsetzung</a:t>
             </a:r>
           </a:p>
@@ -4787,15 +4625,75 @@
           </a:bodyPr>
           <a:lstStyle/>
           <a:p>
-            <a:r>
-              <a:rPr lang="de-CH"/>
+            <a:pPr marL="0" indent="0">
+              <a:buNone/>
+            </a:pPr>
+            <a:r>
+              <a:rPr lang="de-CH" dirty="0"/>
               <a:t>Wie hat sich das Projekt entwickelt?</a:t>
             </a:r>
           </a:p>
           <a:p>
-            <a:r>
-              <a:rPr lang="de-CH"/>
-              <a:t>Was wurde erreicht? Was nicht?</a:t>
+            <a:pPr lvl="1"/>
+            <a:r>
+              <a:rPr lang="de-CH" dirty="0"/>
+              <a:t>Erst war es schwierig (Unreal Engine)</a:t>
+            </a:r>
+          </a:p>
+          <a:p>
+            <a:pPr lvl="1"/>
+            <a:r>
+              <a:rPr lang="de-CH" dirty="0"/>
+              <a:t>Haben die Tutorials gesehen</a:t>
+            </a:r>
+          </a:p>
+          <a:p>
+            <a:pPr lvl="1"/>
+            <a:r>
+              <a:rPr lang="de-CH" dirty="0"/>
+              <a:t>Haben Assets von Sketchlab installiert:</a:t>
+            </a:r>
+          </a:p>
+          <a:p>
+            <a:pPr lvl="2"/>
+            <a:r>
+              <a:rPr lang="de-CH" dirty="0"/>
+              <a:t>Environment</a:t>
+            </a:r>
+          </a:p>
+          <a:p>
+            <a:pPr lvl="2"/>
+            <a:r>
+              <a:rPr lang="de-CH" dirty="0"/>
+              <a:t>Zombie</a:t>
+            </a:r>
+          </a:p>
+          <a:p>
+            <a:pPr lvl="2"/>
+            <a:r>
+              <a:rPr lang="de-CH" dirty="0"/>
+              <a:t>Waffe</a:t>
+            </a:r>
+          </a:p>
+          <a:p>
+            <a:pPr lvl="1"/>
+            <a:r>
+              <a:rPr lang="de-CH" dirty="0"/>
+              <a:t>Anwendung in Unreal</a:t>
+            </a:r>
+          </a:p>
+          <a:p>
+            <a:pPr lvl="1"/>
+            <a:r>
+              <a:rPr lang="de-CH" dirty="0"/>
+              <a:t>Lustige Moments</a:t>
+            </a:r>
+          </a:p>
+          <a:p>
+            <a:pPr lvl="1"/>
+            <a:r>
+              <a:rPr lang="de-CH" dirty="0"/>
+              <a:t>Am Ende das Produkt</a:t>
             </a:r>
           </a:p>
         </p:txBody>
@@ -4835,7 +4733,7 @@
           <p:cNvPr id="2" name="Title 1">
             <a:extLst>
               <a:ext uri="{FF2B5EF4-FFF2-40B4-BE49-F238E27FC236}">
-                <a16:creationId xmlns:a16="http://schemas.microsoft.com/office/drawing/2014/main" id="{3DB50063-4FF0-00D5-65F4-4D9CE7CEBEA7}"/>
+                <a16:creationId xmlns:a16="http://schemas.microsoft.com/office/drawing/2014/main" id="{6FA80357-5CE1-D7BF-974B-3F68E01B978F}"/>
               </a:ext>
             </a:extLst>
           </p:cNvPr>
@@ -4852,16 +4750,8 @@
           <a:lstStyle/>
           <a:p>
             <a:r>
-              <a:rPr lang="en-US"/>
-              <a:t>Was lief gut? / Wo gab es </a:t>
-            </a:r>
-            <a:r>
-              <a:rPr lang="en-US" err="1"/>
-              <a:t>Probleme</a:t>
-            </a:r>
-            <a:r>
-              <a:rPr lang="en-US"/>
-              <a:t>?</a:t>
+              <a:rPr lang="de-CH" dirty="0"/>
+              <a:t>Endresultat vs. Zielsetzung</a:t>
             </a:r>
           </a:p>
         </p:txBody>
@@ -4871,7 +4761,7 @@
           <p:cNvPr id="3" name="Content Placeholder 2">
             <a:extLst>
               <a:ext uri="{FF2B5EF4-FFF2-40B4-BE49-F238E27FC236}">
-                <a16:creationId xmlns:a16="http://schemas.microsoft.com/office/drawing/2014/main" id="{1C7C46DD-AC74-255F-912D-68F4AD95857D}"/>
+                <a16:creationId xmlns:a16="http://schemas.microsoft.com/office/drawing/2014/main" id="{586E4D9D-7817-5D55-78D1-D8F6CB4FC5E0}"/>
               </a:ext>
             </a:extLst>
           </p:cNvPr>
@@ -4887,14 +4777,20 @@
           <a:bodyPr/>
           <a:lstStyle/>
           <a:p>
-            <a:endParaRPr lang="en-US"/>
+            <a:pPr marL="0" indent="0">
+              <a:buNone/>
+            </a:pPr>
+            <a:r>
+              <a:rPr lang="de-CH" dirty="0"/>
+              <a:t>Was wurde erreicht? Was nicht?</a:t>
+            </a:r>
           </a:p>
         </p:txBody>
       </p:sp>
     </p:spTree>
     <p:extLst>
       <p:ext uri="{BB962C8B-B14F-4D97-AF65-F5344CB8AC3E}">
-        <p14:creationId xmlns:p14="http://schemas.microsoft.com/office/powerpoint/2010/main" val="2396213657"/>
+        <p14:creationId xmlns:p14="http://schemas.microsoft.com/office/powerpoint/2010/main" val="2764003610"/>
       </p:ext>
     </p:extLst>
   </p:cSld>
@@ -4926,7 +4822,7 @@
           <p:cNvPr id="2" name="Title 1">
             <a:extLst>
               <a:ext uri="{FF2B5EF4-FFF2-40B4-BE49-F238E27FC236}">
-                <a16:creationId xmlns:a16="http://schemas.microsoft.com/office/drawing/2014/main" id="{F561AD8C-36DD-7829-BD8E-DA31B4195134}"/>
+                <a16:creationId xmlns:a16="http://schemas.microsoft.com/office/drawing/2014/main" id="{3DB50063-4FF0-00D5-65F4-4D9CE7CEBEA7}"/>
               </a:ext>
             </a:extLst>
           </p:cNvPr>
@@ -4943,79 +4839,88 @@
           <a:lstStyle/>
           <a:p>
             <a:r>
-              <a:rPr lang="en-US" err="1"/>
-              <a:t>Worauf</a:t>
-            </a:r>
-            <a:r>
-              <a:rPr lang="en-US"/>
+              <a:rPr lang="en-US" dirty="0"/>
+              <a:t>Was lief gut?</a:t>
+            </a:r>
+          </a:p>
+        </p:txBody>
+      </p:sp>
+      <p:sp>
+        <p:nvSpPr>
+          <p:cNvPr id="3" name="Content Placeholder 2">
+            <a:extLst>
+              <a:ext uri="{FF2B5EF4-FFF2-40B4-BE49-F238E27FC236}">
+                <a16:creationId xmlns:a16="http://schemas.microsoft.com/office/drawing/2014/main" id="{1C7C46DD-AC74-255F-912D-68F4AD95857D}"/>
+              </a:ext>
+            </a:extLst>
+          </p:cNvPr>
+          <p:cNvSpPr>
+            <a:spLocks noGrp="1"/>
+          </p:cNvSpPr>
+          <p:nvPr>
+            <p:ph idx="1"/>
+          </p:nvPr>
+        </p:nvSpPr>
+        <p:spPr/>
+        <p:txBody>
+          <a:bodyPr/>
+          <a:lstStyle/>
+          <a:p>
+            <a:r>
+              <a:rPr lang="en-US" dirty="0"/>
+              <a:t>Waffen </a:t>
+            </a:r>
+            <a:r>
+              <a:rPr lang="en-US" dirty="0" err="1"/>
+              <a:t>schiessen</a:t>
+            </a:r>
+            <a:r>
+              <a:rPr lang="en-US" dirty="0"/>
+              <a:t> direct</a:t>
+            </a:r>
+          </a:p>
+          <a:p>
+            <a:r>
+              <a:rPr lang="en-US" dirty="0"/>
+              <a:t>Das </a:t>
+            </a:r>
+            <a:r>
+              <a:rPr lang="en-US" dirty="0" err="1"/>
+              <a:t>Skeket</a:t>
+            </a:r>
+            <a:r>
+              <a:rPr lang="en-US" dirty="0"/>
+              <a:t> des Zombies</a:t>
+            </a:r>
+          </a:p>
+          <a:p>
+            <a:r>
+              <a:rPr lang="en-US" dirty="0"/>
+              <a:t>Die Blueprints von Assets </a:t>
+            </a:r>
+            <a:r>
+              <a:rPr lang="en-US" dirty="0" err="1"/>
+              <a:t>funkioneren</a:t>
+            </a:r>
+            <a:r>
+              <a:rPr lang="en-US" dirty="0"/>
               <a:t> </a:t>
             </a:r>
             <a:r>
-              <a:rPr lang="en-US" err="1"/>
-              <a:t>sind</a:t>
-            </a:r>
-            <a:r>
-              <a:rPr lang="en-US"/>
-              <a:t> </a:t>
-            </a:r>
-            <a:r>
-              <a:rPr lang="en-US" err="1"/>
-              <a:t>wir</a:t>
-            </a:r>
-            <a:r>
-              <a:rPr lang="en-US"/>
-              <a:t> </a:t>
-            </a:r>
-            <a:r>
-              <a:rPr lang="de-CH"/>
-              <a:t>stolz</a:t>
-            </a:r>
-            <a:r>
-              <a:rPr lang="en-US"/>
-              <a:t> (</a:t>
-            </a:r>
-            <a:r>
-              <a:rPr lang="en-US" err="1"/>
-              <a:t>Lösungen</a:t>
-            </a:r>
-            <a:r>
-              <a:rPr lang="en-US"/>
-              <a:t>)?</a:t>
-            </a:r>
-          </a:p>
-        </p:txBody>
-      </p:sp>
-      <p:sp>
-        <p:nvSpPr>
-          <p:cNvPr id="3" name="Content Placeholder 2">
-            <a:extLst>
-              <a:ext uri="{FF2B5EF4-FFF2-40B4-BE49-F238E27FC236}">
-                <a16:creationId xmlns:a16="http://schemas.microsoft.com/office/drawing/2014/main" id="{5C0E5C13-2F42-8335-E515-AB0AED9C2F34}"/>
-              </a:ext>
-            </a:extLst>
-          </p:cNvPr>
-          <p:cNvSpPr>
-            <a:spLocks noGrp="1"/>
-          </p:cNvSpPr>
-          <p:nvPr>
-            <p:ph idx="1"/>
-          </p:nvPr>
-        </p:nvSpPr>
-        <p:spPr/>
-        <p:txBody>
-          <a:bodyPr vert="horz" lIns="91440" tIns="45720" rIns="91440" bIns="45720" rtlCol="0" anchor="t">
-            <a:normAutofit/>
-          </a:bodyPr>
-          <a:lstStyle/>
-          <a:p>
-            <a:endParaRPr lang="en-US" noProof="1"/>
+              <a:rPr lang="en-US" dirty="0" err="1"/>
+              <a:t>relativ</a:t>
+            </a:r>
+            <a:r>
+              <a:rPr lang="en-US" dirty="0"/>
+              <a:t> gut</a:t>
+            </a:r>
           </a:p>
         </p:txBody>
       </p:sp>
     </p:spTree>
     <p:extLst>
       <p:ext uri="{BB962C8B-B14F-4D97-AF65-F5344CB8AC3E}">
-        <p14:creationId xmlns:p14="http://schemas.microsoft.com/office/powerpoint/2010/main" val="297389937"/>
+        <p14:creationId xmlns:p14="http://schemas.microsoft.com/office/powerpoint/2010/main" val="2396213657"/>
       </p:ext>
     </p:extLst>
   </p:cSld>
@@ -5047,7 +4952,7 @@
           <p:cNvPr id="2" name="Title 1">
             <a:extLst>
               <a:ext uri="{FF2B5EF4-FFF2-40B4-BE49-F238E27FC236}">
-                <a16:creationId xmlns:a16="http://schemas.microsoft.com/office/drawing/2014/main" id="{1E28AFB1-8A7A-B172-D7B1-90A824228172}"/>
+                <a16:creationId xmlns:a16="http://schemas.microsoft.com/office/drawing/2014/main" id="{C509D8EE-FD03-E44D-78DF-BBC840618515}"/>
               </a:ext>
             </a:extLst>
           </p:cNvPr>
@@ -5064,25 +4969,18 @@
           <a:lstStyle/>
           <a:p>
             <a:r>
-              <a:rPr lang="en-US"/>
-              <a:t>Was </a:t>
-            </a:r>
-            <a:r>
-              <a:rPr lang="en-US" err="1"/>
-              <a:t>haben</a:t>
-            </a:r>
-            <a:r>
-              <a:rPr lang="en-US"/>
-              <a:t> </a:t>
-            </a:r>
-            <a:r>
-              <a:rPr lang="en-US" err="1"/>
-              <a:t>wir</a:t>
-            </a:r>
-            <a:r>
-              <a:rPr lang="en-US"/>
-              <a:t> gelernt?</a:t>
-            </a:r>
+              <a:rPr lang="en-US" dirty="0"/>
+              <a:t>Wo gab es </a:t>
+            </a:r>
+            <a:r>
+              <a:rPr lang="en-US" dirty="0" err="1"/>
+              <a:t>Probleme</a:t>
+            </a:r>
+            <a:r>
+              <a:rPr lang="en-US" dirty="0"/>
+              <a:t>?</a:t>
+            </a:r>
+            <a:endParaRPr lang="de-CH" dirty="0"/>
           </a:p>
         </p:txBody>
       </p:sp>
@@ -5091,7 +4989,7 @@
           <p:cNvPr id="3" name="Content Placeholder 2">
             <a:extLst>
               <a:ext uri="{FF2B5EF4-FFF2-40B4-BE49-F238E27FC236}">
-                <a16:creationId xmlns:a16="http://schemas.microsoft.com/office/drawing/2014/main" id="{A8AA9383-4EBA-9EBE-396A-538380AE735F}"/>
+                <a16:creationId xmlns:a16="http://schemas.microsoft.com/office/drawing/2014/main" id="{432D4058-0911-6FCC-922F-1388F0AC6705}"/>
               </a:ext>
             </a:extLst>
           </p:cNvPr>
@@ -5104,19 +5002,39 @@
         </p:nvSpPr>
         <p:spPr/>
         <p:txBody>
-          <a:bodyPr vert="horz" lIns="91440" tIns="45720" rIns="91440" bIns="45720" rtlCol="0" anchor="t">
-            <a:normAutofit/>
-          </a:bodyPr>
-          <a:lstStyle/>
-          <a:p>
-            <a:endParaRPr lang="en-US"/>
+          <a:bodyPr/>
+          <a:lstStyle/>
+          <a:p>
+            <a:r>
+              <a:rPr lang="en-US" dirty="0"/>
+              <a:t>Bullets </a:t>
+            </a:r>
+            <a:r>
+              <a:rPr lang="en-US" dirty="0" err="1"/>
+              <a:t>gehen</a:t>
+            </a:r>
+            <a:r>
+              <a:rPr lang="en-US" dirty="0"/>
+              <a:t> nicht </a:t>
+            </a:r>
+            <a:r>
+              <a:rPr lang="en-US" dirty="0" err="1"/>
+              <a:t>gerade</a:t>
+            </a:r>
+            <a:endParaRPr lang="en-US" dirty="0"/>
+          </a:p>
+          <a:p>
+            <a:r>
+              <a:rPr lang="en-US" dirty="0"/>
+              <a:t>Fucking Pivot</a:t>
+            </a:r>
           </a:p>
         </p:txBody>
       </p:sp>
     </p:spTree>
     <p:extLst>
       <p:ext uri="{BB962C8B-B14F-4D97-AF65-F5344CB8AC3E}">
-        <p14:creationId xmlns:p14="http://schemas.microsoft.com/office/powerpoint/2010/main" val="2624086703"/>
+        <p14:creationId xmlns:p14="http://schemas.microsoft.com/office/powerpoint/2010/main" val="3782719326"/>
       </p:ext>
     </p:extLst>
   </p:cSld>
@@ -5148,7 +5066,7 @@
           <p:cNvPr id="2" name="Title 1">
             <a:extLst>
               <a:ext uri="{FF2B5EF4-FFF2-40B4-BE49-F238E27FC236}">
-                <a16:creationId xmlns:a16="http://schemas.microsoft.com/office/drawing/2014/main" id="{112B59C9-D7A8-0317-1968-38B52CCB7530}"/>
+                <a16:creationId xmlns:a16="http://schemas.microsoft.com/office/drawing/2014/main" id="{F561AD8C-36DD-7829-BD8E-DA31B4195134}"/>
               </a:ext>
             </a:extLst>
           </p:cNvPr>
@@ -5165,16 +5083,44 @@
           <a:lstStyle/>
           <a:p>
             <a:r>
+              <a:rPr lang="en-US" err="1"/>
+              <a:t>Worauf</a:t>
+            </a:r>
+            <a:r>
               <a:rPr lang="en-US"/>
-              <a:t>Was hat </a:t>
+              <a:t> </a:t>
             </a:r>
             <a:r>
               <a:rPr lang="en-US" err="1"/>
-              <a:t>uns</a:t>
+              <a:t>sind</a:t>
             </a:r>
             <a:r>
               <a:rPr lang="en-US"/>
-              <a:t> überrascht?</a:t>
+              <a:t> </a:t>
+            </a:r>
+            <a:r>
+              <a:rPr lang="en-US" err="1"/>
+              <a:t>wir</a:t>
+            </a:r>
+            <a:r>
+              <a:rPr lang="en-US"/>
+              <a:t> </a:t>
+            </a:r>
+            <a:r>
+              <a:rPr lang="de-CH"/>
+              <a:t>stolz</a:t>
+            </a:r>
+            <a:r>
+              <a:rPr lang="en-US"/>
+              <a:t> (</a:t>
+            </a:r>
+            <a:r>
+              <a:rPr lang="en-US" err="1"/>
+              <a:t>Lösungen</a:t>
+            </a:r>
+            <a:r>
+              <a:rPr lang="en-US"/>
+              <a:t>)?</a:t>
             </a:r>
           </a:p>
         </p:txBody>
@@ -5184,7 +5130,7 @@
           <p:cNvPr id="3" name="Content Placeholder 2">
             <a:extLst>
               <a:ext uri="{FF2B5EF4-FFF2-40B4-BE49-F238E27FC236}">
-                <a16:creationId xmlns:a16="http://schemas.microsoft.com/office/drawing/2014/main" id="{2EDFF1AB-8964-7212-8FB4-CB8CDB97FAE3}"/>
+                <a16:creationId xmlns:a16="http://schemas.microsoft.com/office/drawing/2014/main" id="{5C0E5C13-2F42-8335-E515-AB0AED9C2F34}"/>
               </a:ext>
             </a:extLst>
           </p:cNvPr>
@@ -5197,17 +5143,31 @@
         </p:nvSpPr>
         <p:spPr/>
         <p:txBody>
-          <a:bodyPr/>
-          <a:lstStyle/>
-          <a:p>
-            <a:endParaRPr lang="en-US"/>
+          <a:bodyPr vert="horz" lIns="91440" tIns="45720" rIns="91440" bIns="45720" rtlCol="0" anchor="t">
+            <a:normAutofit/>
+          </a:bodyPr>
+          <a:lstStyle/>
+          <a:p>
+            <a:r>
+              <a:rPr lang="en-US" noProof="1"/>
+              <a:t>Auf alles (Gesamtes Projekt)</a:t>
+            </a:r>
+          </a:p>
+          <a:p>
+            <a:r>
+              <a:rPr lang="en-US" noProof="1"/>
+              <a:t>Blueprints lernen könnte</a:t>
+            </a:r>
+          </a:p>
+          <a:p>
+            <a:endParaRPr lang="en-US" noProof="1"/>
           </a:p>
         </p:txBody>
       </p:sp>
     </p:spTree>
     <p:extLst>
       <p:ext uri="{BB962C8B-B14F-4D97-AF65-F5344CB8AC3E}">
-        <p14:creationId xmlns:p14="http://schemas.microsoft.com/office/powerpoint/2010/main" val="761157137"/>
+        <p14:creationId xmlns:p14="http://schemas.microsoft.com/office/powerpoint/2010/main" val="297389937"/>
       </p:ext>
     </p:extLst>
   </p:cSld>
@@ -5239,7 +5199,7 @@
           <p:cNvPr id="2" name="Title 1">
             <a:extLst>
               <a:ext uri="{FF2B5EF4-FFF2-40B4-BE49-F238E27FC236}">
-                <a16:creationId xmlns:a16="http://schemas.microsoft.com/office/drawing/2014/main" id="{AFF46E95-2E97-E61B-88B9-6E1A97F1EF1D}"/>
+                <a16:creationId xmlns:a16="http://schemas.microsoft.com/office/drawing/2014/main" id="{1E28AFB1-8A7A-B172-D7B1-90A824228172}"/>
               </a:ext>
             </a:extLst>
           </p:cNvPr>
@@ -5257,7 +5217,23 @@
           <a:p>
             <a:r>
               <a:rPr lang="en-US"/>
-              <a:t>Reflektion</a:t>
+              <a:t>Was </a:t>
+            </a:r>
+            <a:r>
+              <a:rPr lang="en-US" err="1"/>
+              <a:t>haben</a:t>
+            </a:r>
+            <a:r>
+              <a:rPr lang="en-US"/>
+              <a:t> </a:t>
+            </a:r>
+            <a:r>
+              <a:rPr lang="en-US" err="1"/>
+              <a:t>wir</a:t>
+            </a:r>
+            <a:r>
+              <a:rPr lang="en-US"/>
+              <a:t> gelernt?</a:t>
             </a:r>
           </a:p>
         </p:txBody>
@@ -5267,7 +5243,7 @@
           <p:cNvPr id="3" name="Content Placeholder 2">
             <a:extLst>
               <a:ext uri="{FF2B5EF4-FFF2-40B4-BE49-F238E27FC236}">
-                <a16:creationId xmlns:a16="http://schemas.microsoft.com/office/drawing/2014/main" id="{617DA1C0-367D-6611-4054-E45F28C96540}"/>
+                <a16:creationId xmlns:a16="http://schemas.microsoft.com/office/drawing/2014/main" id="{A8AA9383-4EBA-9EBE-396A-538380AE735F}"/>
               </a:ext>
             </a:extLst>
           </p:cNvPr>
@@ -5280,17 +5256,47 @@
         </p:nvSpPr>
         <p:spPr/>
         <p:txBody>
-          <a:bodyPr/>
-          <a:lstStyle/>
-          <a:p>
-            <a:endParaRPr lang="en-US"/>
+          <a:bodyPr vert="horz" lIns="91440" tIns="45720" rIns="91440" bIns="45720" rtlCol="0" anchor="t">
+            <a:normAutofit/>
+          </a:bodyPr>
+          <a:lstStyle/>
+          <a:p>
+            <a:r>
+              <a:rPr lang="en-US" dirty="0"/>
+              <a:t>Wie man </a:t>
+            </a:r>
+            <a:r>
+              <a:rPr lang="en-US" dirty="0" err="1"/>
+              <a:t>mit</a:t>
+            </a:r>
+            <a:r>
+              <a:rPr lang="en-US" dirty="0"/>
+              <a:t> Unreal </a:t>
+            </a:r>
+            <a:r>
+              <a:rPr lang="en-US" dirty="0" err="1"/>
+              <a:t>umgeht</a:t>
+            </a:r>
+            <a:endParaRPr lang="en-US" dirty="0"/>
+          </a:p>
+          <a:p>
+            <a:r>
+              <a:rPr lang="en-US" dirty="0"/>
+              <a:t>Blueprint (Node Coding</a:t>
+            </a:r>
+          </a:p>
+          <a:p>
+            <a:r>
+              <a:rPr lang="en-US" dirty="0"/>
+              <a:t>Teamwork</a:t>
+            </a:r>
           </a:p>
         </p:txBody>
       </p:sp>
     </p:spTree>
     <p:extLst>
       <p:ext uri="{BB962C8B-B14F-4D97-AF65-F5344CB8AC3E}">
-        <p14:creationId xmlns:p14="http://schemas.microsoft.com/office/powerpoint/2010/main" val="4211665210"/>
+        <p14:creationId xmlns:p14="http://schemas.microsoft.com/office/powerpoint/2010/main" val="2624086703"/>
       </p:ext>
     </p:extLst>
   </p:cSld>
@@ -5616,6 +5622,23 @@
 </file>
 
 <file path=customXml/item1.xml><?xml version="1.0" encoding="utf-8"?>
+<p:properties xmlns:p="http://schemas.microsoft.com/office/2006/metadata/properties" xmlns:xsi="http://www.w3.org/2001/XMLSchema-instance" xmlns:pc="http://schemas.microsoft.com/office/infopath/2007/PartnerControls">
+  <documentManagement>
+    <_activity xmlns="7b482e70-4f35-40a3-b75e-ffa04ee0c79f" xsi:nil="true"/>
+  </documentManagement>
+</p:properties>
+</file>
+
+<file path=customXml/item2.xml><?xml version="1.0" encoding="utf-8"?>
+<?mso-contentType ?>
+<FormTemplates xmlns="http://schemas.microsoft.com/sharepoint/v3/contenttype/forms">
+  <Display>DocumentLibraryForm</Display>
+  <Edit>DocumentLibraryForm</Edit>
+  <New>DocumentLibraryForm</New>
+</FormTemplates>
+</file>
+
+<file path=customXml/item3.xml><?xml version="1.0" encoding="utf-8"?>
 <ct:contentTypeSchema xmlns:ct="http://schemas.microsoft.com/office/2006/metadata/contentType" xmlns:ma="http://schemas.microsoft.com/office/2006/metadata/properties/metaAttributes" ct:_="" ma:_="" ma:contentTypeName="Document" ma:contentTypeID="0x0101003A7443C7252A364EA82FF0EDB3C44616" ma:contentTypeVersion="16" ma:contentTypeDescription="Crée un document." ma:contentTypeScope="" ma:versionID="99dd13c5d007134322681d689c73e4af">
   <xsd:schema xmlns:xsd="http://www.w3.org/2001/XMLSchema" xmlns:xs="http://www.w3.org/2001/XMLSchema" xmlns:p="http://schemas.microsoft.com/office/2006/metadata/properties" xmlns:ns3="7b482e70-4f35-40a3-b75e-ffa04ee0c79f" xmlns:ns4="4582224d-bab5-40fa-bd6d-5f2de2104ce9" targetNamespace="http://schemas.microsoft.com/office/2006/metadata/properties" ma:root="true" ma:fieldsID="b16fc3d7505b8814540dfc36f1e50148" ns3:_="" ns4:_="">
     <xsd:import namespace="7b482e70-4f35-40a3-b75e-ffa04ee0c79f"/>
@@ -5856,24 +5879,32 @@
 </ct:contentTypeSchema>
 </file>
 
-<file path=customXml/item2.xml><?xml version="1.0" encoding="utf-8"?>
-<?mso-contentType ?>
-<FormTemplates xmlns="http://schemas.microsoft.com/sharepoint/v3/contenttype/forms">
-  <Display>DocumentLibraryForm</Display>
-  <Edit>DocumentLibraryForm</Edit>
-  <New>DocumentLibraryForm</New>
-</FormTemplates>
+<file path=customXml/itemProps1.xml><?xml version="1.0" encoding="utf-8"?>
+<ds:datastoreItem xmlns:ds="http://schemas.openxmlformats.org/officeDocument/2006/customXml" ds:itemID="{1061F33B-DBCF-4D99-8A24-A37E84CD3907}">
+  <ds:schemaRefs>
+    <ds:schemaRef ds:uri="4582224d-bab5-40fa-bd6d-5f2de2104ce9"/>
+    <ds:schemaRef ds:uri="7b482e70-4f35-40a3-b75e-ffa04ee0c79f"/>
+    <ds:schemaRef ds:uri="http://purl.org/dc/dcmitype/"/>
+    <ds:schemaRef ds:uri="http://purl.org/dc/elements/1.1/"/>
+    <ds:schemaRef ds:uri="http://purl.org/dc/terms/"/>
+    <ds:schemaRef ds:uri="http://schemas.microsoft.com/office/2006/documentManagement/types"/>
+    <ds:schemaRef ds:uri="http://schemas.microsoft.com/office/2006/metadata/properties"/>
+    <ds:schemaRef ds:uri="http://schemas.microsoft.com/office/infopath/2007/PartnerControls"/>
+    <ds:schemaRef ds:uri="http://schemas.openxmlformats.org/package/2006/metadata/core-properties"/>
+    <ds:schemaRef ds:uri="http://www.w3.org/XML/1998/namespace"/>
+  </ds:schemaRefs>
+</ds:datastoreItem>
 </file>
 
-<file path=customXml/item3.xml><?xml version="1.0" encoding="utf-8"?>
-<p:properties xmlns:p="http://schemas.microsoft.com/office/2006/metadata/properties" xmlns:xsi="http://www.w3.org/2001/XMLSchema-instance" xmlns:pc="http://schemas.microsoft.com/office/infopath/2007/PartnerControls">
-  <documentManagement>
-    <_activity xmlns="7b482e70-4f35-40a3-b75e-ffa04ee0c79f" xsi:nil="true"/>
-  </documentManagement>
-</p:properties>
+<file path=customXml/itemProps2.xml><?xml version="1.0" encoding="utf-8"?>
+<ds:datastoreItem xmlns:ds="http://schemas.openxmlformats.org/officeDocument/2006/customXml" ds:itemID="{671C1D4C-DDB7-40E3-8640-20852E4CEA3E}">
+  <ds:schemaRefs>
+    <ds:schemaRef ds:uri="http://schemas.microsoft.com/sharepoint/v3/contenttype/forms"/>
+  </ds:schemaRefs>
+</ds:datastoreItem>
 </file>
 
-<file path=customXml/itemProps1.xml><?xml version="1.0" encoding="utf-8"?>
+<file path=customXml/itemProps3.xml><?xml version="1.0" encoding="utf-8"?>
 <ds:datastoreItem xmlns:ds="http://schemas.openxmlformats.org/officeDocument/2006/customXml" ds:itemID="{8419668F-5759-4465-9DD6-CB2CD64ED883}">
   <ds:schemaRefs>
     <ds:schemaRef ds:uri="4582224d-bab5-40fa-bd6d-5f2de2104ce9"/>
@@ -5890,29 +5921,4 @@
     <ds:schemaRef ds:uri="http://www.w3.org/2001/XMLSchema"/>
   </ds:schemaRefs>
 </ds:datastoreItem>
-</file>
-
-<file path=customXml/itemProps2.xml><?xml version="1.0" encoding="utf-8"?>
-<ds:datastoreItem xmlns:ds="http://schemas.openxmlformats.org/officeDocument/2006/customXml" ds:itemID="{671C1D4C-DDB7-40E3-8640-20852E4CEA3E}">
-  <ds:schemaRefs>
-    <ds:schemaRef ds:uri="http://schemas.microsoft.com/sharepoint/v3/contenttype/forms"/>
-  </ds:schemaRefs>
-</ds:datastoreItem>
-</file>
-
-<file path=customXml/itemProps3.xml><?xml version="1.0" encoding="utf-8"?>
-<ds:datastoreItem xmlns:ds="http://schemas.openxmlformats.org/officeDocument/2006/customXml" ds:itemID="{1061F33B-DBCF-4D99-8A24-A37E84CD3907}">
-  <ds:schemaRefs>
-    <ds:schemaRef ds:uri="4582224d-bab5-40fa-bd6d-5f2de2104ce9"/>
-    <ds:schemaRef ds:uri="7b482e70-4f35-40a3-b75e-ffa04ee0c79f"/>
-    <ds:schemaRef ds:uri="http://purl.org/dc/dcmitype/"/>
-    <ds:schemaRef ds:uri="http://purl.org/dc/elements/1.1/"/>
-    <ds:schemaRef ds:uri="http://purl.org/dc/terms/"/>
-    <ds:schemaRef ds:uri="http://schemas.microsoft.com/office/2006/documentManagement/types"/>
-    <ds:schemaRef ds:uri="http://schemas.microsoft.com/office/2006/metadata/properties"/>
-    <ds:schemaRef ds:uri="http://schemas.microsoft.com/office/infopath/2007/PartnerControls"/>
-    <ds:schemaRef ds:uri="http://schemas.openxmlformats.org/package/2006/metadata/core-properties"/>
-    <ds:schemaRef ds:uri="http://www.w3.org/XML/1998/namespace"/>
-  </ds:schemaRefs>
-</ds:datastoreItem>
 </file>
--- a/Presentation/Unrealengine pp.pptx
+++ b/Presentation/Unrealengine pp.pptx
@@ -115,6 +115,11 @@
       </a:defRPr>
     </a:lvl9pPr>
   </p:defaultTextStyle>
+  <p:extLst>
+    <p:ext uri="{EFAFB233-063F-42B5-8137-9DF3F51BA10A}">
+      <p15:sldGuideLst xmlns:p15="http://schemas.microsoft.com/office/powerpoint/2012/main"/>
+    </p:ext>
+  </p:extLst>
 </p:presentation>
 </file>
 
@@ -4868,6 +4873,13 @@
           <a:p>
             <a:r>
               <a:rPr lang="en-US" dirty="0"/>
+              <a:t>Tadaj:</a:t>
+            </a:r>
+          </a:p>
+          <a:p>
+            <a:pPr lvl="1"/>
+            <a:r>
+              <a:rPr lang="en-US" dirty="0"/>
               <a:t>Waffen </a:t>
             </a:r>
             <a:r>
@@ -4881,6 +4893,17 @@
           </a:p>
           <a:p>
             <a:r>
+              <a:rPr lang="de-CH" dirty="0" err="1"/>
+              <a:t>Aurelien</a:t>
+            </a:r>
+            <a:r>
+              <a:rPr lang="de-CH" dirty="0"/>
+              <a:t>:</a:t>
+            </a:r>
+          </a:p>
+          <a:p>
+            <a:pPr lvl="1"/>
+            <a:r>
               <a:rPr lang="en-US" dirty="0"/>
               <a:t>Das </a:t>
             </a:r>
@@ -4894,6 +4917,7 @@
             </a:r>
           </a:p>
           <a:p>
+            <a:pPr lvl="1"/>
             <a:r>
               <a:rPr lang="en-US" dirty="0"/>
               <a:t>Die Blueprints von Assets </a:t>
@@ -4914,6 +4938,39 @@
               <a:rPr lang="en-US" dirty="0"/>
               <a:t> gut</a:t>
             </a:r>
+          </a:p>
+          <a:p>
+            <a:r>
+              <a:rPr lang="en-US" dirty="0"/>
+              <a:t>Ben: </a:t>
+            </a:r>
+          </a:p>
+          <a:p>
+            <a:pPr lvl="1"/>
+            <a:r>
+              <a:rPr lang="en-US" dirty="0"/>
+              <a:t>Assets </a:t>
+            </a:r>
+            <a:r>
+              <a:rPr lang="en-US" dirty="0" err="1"/>
+              <a:t>finden</a:t>
+            </a:r>
+            <a:endParaRPr lang="en-US" dirty="0"/>
+          </a:p>
+          <a:p>
+            <a:pPr lvl="1"/>
+            <a:r>
+              <a:rPr lang="en-US" dirty="0"/>
+              <a:t>Assets in Welt </a:t>
+            </a:r>
+            <a:r>
+              <a:rPr lang="en-US" dirty="0" err="1"/>
+              <a:t>ziehen</a:t>
+            </a:r>
+            <a:endParaRPr lang="en-US" dirty="0"/>
+          </a:p>
+          <a:p>
+            <a:endParaRPr lang="en-US" dirty="0"/>
           </a:p>
         </p:txBody>
       </p:sp>
@@ -5007,6 +5064,13 @@
           <a:p>
             <a:r>
               <a:rPr lang="en-US" dirty="0"/>
+              <a:t>Tadaj:</a:t>
+            </a:r>
+          </a:p>
+          <a:p>
+            <a:pPr lvl="1"/>
+            <a:r>
+              <a:rPr lang="en-US" dirty="0"/>
               <a:t>Bullets </a:t>
             </a:r>
             <a:r>
@@ -5025,8 +5089,43 @@
           </a:p>
           <a:p>
             <a:r>
+              <a:rPr lang="de-CH" dirty="0" err="1"/>
+              <a:t>Aurelien</a:t>
+            </a:r>
+            <a:r>
+              <a:rPr lang="de-CH" dirty="0"/>
+              <a:t>: </a:t>
+            </a:r>
+          </a:p>
+          <a:p>
+            <a:pPr lvl="1"/>
+            <a:r>
+              <a:rPr lang="en-US" dirty="0" err="1"/>
+              <a:t>Scheisse</a:t>
+            </a:r>
+            <a:r>
               <a:rPr lang="en-US" dirty="0"/>
-              <a:t>Fucking Pivot</a:t>
+              <a:t> Pivot</a:t>
+            </a:r>
+          </a:p>
+          <a:p>
+            <a:r>
+              <a:rPr lang="en-US" dirty="0"/>
+              <a:t>Ben: </a:t>
+            </a:r>
+          </a:p>
+          <a:p>
+            <a:pPr lvl="1"/>
+            <a:r>
+              <a:rPr lang="en-US" dirty="0"/>
+              <a:t>Size Scaling</a:t>
+            </a:r>
+          </a:p>
+          <a:p>
+            <a:pPr lvl="1"/>
+            <a:r>
+              <a:rPr lang="en-US" dirty="0"/>
+              <a:t>Teleport Zone</a:t>
             </a:r>
           </a:p>
         </p:txBody>

--- a/Presentation/Unrealengine pp.pptx
+++ b/Presentation/Unrealengine pp.pptx
@@ -779,7 +779,7 @@
           <a:p>
             <a:fld id="{CE70ADAD-9187-47F9-A249-492AE8E7021B}" type="datetimeFigureOut">
               <a:rPr lang="de-CH" smtClean="0"/>
-              <a:t>04.03.2026</a:t>
+              <a:t>18.03.2026</a:t>
             </a:fld>
             <a:endParaRPr lang="de-CH"/>
           </a:p>
@@ -979,7 +979,7 @@
           <a:p>
             <a:fld id="{CE70ADAD-9187-47F9-A249-492AE8E7021B}" type="datetimeFigureOut">
               <a:rPr lang="de-CH" smtClean="0"/>
-              <a:t>04.03.2026</a:t>
+              <a:t>18.03.2026</a:t>
             </a:fld>
             <a:endParaRPr lang="de-CH"/>
           </a:p>
@@ -1189,7 +1189,7 @@
           <a:p>
             <a:fld id="{CE70ADAD-9187-47F9-A249-492AE8E7021B}" type="datetimeFigureOut">
               <a:rPr lang="de-CH" smtClean="0"/>
-              <a:t>04.03.2026</a:t>
+              <a:t>18.03.2026</a:t>
             </a:fld>
             <a:endParaRPr lang="de-CH"/>
           </a:p>
@@ -1389,7 +1389,7 @@
           <a:p>
             <a:fld id="{CE70ADAD-9187-47F9-A249-492AE8E7021B}" type="datetimeFigureOut">
               <a:rPr lang="de-CH" smtClean="0"/>
-              <a:t>04.03.2026</a:t>
+              <a:t>18.03.2026</a:t>
             </a:fld>
             <a:endParaRPr lang="de-CH"/>
           </a:p>
@@ -1665,7 +1665,7 @@
           <a:p>
             <a:fld id="{CE70ADAD-9187-47F9-A249-492AE8E7021B}" type="datetimeFigureOut">
               <a:rPr lang="de-CH" smtClean="0"/>
-              <a:t>04.03.2026</a:t>
+              <a:t>18.03.2026</a:t>
             </a:fld>
             <a:endParaRPr lang="de-CH"/>
           </a:p>
@@ -1933,7 +1933,7 @@
           <a:p>
             <a:fld id="{CE70ADAD-9187-47F9-A249-492AE8E7021B}" type="datetimeFigureOut">
               <a:rPr lang="de-CH" smtClean="0"/>
-              <a:t>04.03.2026</a:t>
+              <a:t>18.03.2026</a:t>
             </a:fld>
             <a:endParaRPr lang="de-CH"/>
           </a:p>
@@ -2348,7 +2348,7 @@
           <a:p>
             <a:fld id="{CE70ADAD-9187-47F9-A249-492AE8E7021B}" type="datetimeFigureOut">
               <a:rPr lang="de-CH" smtClean="0"/>
-              <a:t>04.03.2026</a:t>
+              <a:t>18.03.2026</a:t>
             </a:fld>
             <a:endParaRPr lang="de-CH"/>
           </a:p>
@@ -2490,7 +2490,7 @@
           <a:p>
             <a:fld id="{CE70ADAD-9187-47F9-A249-492AE8E7021B}" type="datetimeFigureOut">
               <a:rPr lang="de-CH" smtClean="0"/>
-              <a:t>04.03.2026</a:t>
+              <a:t>18.03.2026</a:t>
             </a:fld>
             <a:endParaRPr lang="de-CH"/>
           </a:p>
@@ -2603,7 +2603,7 @@
           <a:p>
             <a:fld id="{CE70ADAD-9187-47F9-A249-492AE8E7021B}" type="datetimeFigureOut">
               <a:rPr lang="de-CH" smtClean="0"/>
-              <a:t>04.03.2026</a:t>
+              <a:t>18.03.2026</a:t>
             </a:fld>
             <a:endParaRPr lang="de-CH"/>
           </a:p>
@@ -2916,7 +2916,7 @@
           <a:p>
             <a:fld id="{CE70ADAD-9187-47F9-A249-492AE8E7021B}" type="datetimeFigureOut">
               <a:rPr lang="de-CH" smtClean="0"/>
-              <a:t>04.03.2026</a:t>
+              <a:t>18.03.2026</a:t>
             </a:fld>
             <a:endParaRPr lang="de-CH"/>
           </a:p>
@@ -3205,7 +3205,7 @@
           <a:p>
             <a:fld id="{CE70ADAD-9187-47F9-A249-492AE8E7021B}" type="datetimeFigureOut">
               <a:rPr lang="de-CH" smtClean="0"/>
-              <a:t>04.03.2026</a:t>
+              <a:t>18.03.2026</a:t>
             </a:fld>
             <a:endParaRPr lang="de-CH"/>
           </a:p>
@@ -3448,7 +3448,7 @@
           <a:p>
             <a:fld id="{CE70ADAD-9187-47F9-A249-492AE8E7021B}" type="datetimeFigureOut">
               <a:rPr lang="de-CH" smtClean="0"/>
-              <a:t>04.03.2026</a:t>
+              <a:t>18.03.2026</a:t>
             </a:fld>
             <a:endParaRPr lang="de-CH"/>
           </a:p>
@@ -3888,7 +3888,15 @@
           <a:p>
             <a:r>
               <a:rPr lang="de-CH" dirty="0"/>
-              <a:t>VR-Game(Name)</a:t>
+              <a:t>VR-Game(</a:t>
+            </a:r>
+            <a:r>
+              <a:rPr lang="de-CH"/>
+              <a:t>Strong tanding</a:t>
+            </a:r>
+            <a:r>
+              <a:rPr lang="de-CH" dirty="0"/>
+              <a:t>)</a:t>
             </a:r>
           </a:p>
         </p:txBody>
@@ -5721,23 +5729,6 @@
 </file>
 
 <file path=customXml/item1.xml><?xml version="1.0" encoding="utf-8"?>
-<p:properties xmlns:p="http://schemas.microsoft.com/office/2006/metadata/properties" xmlns:xsi="http://www.w3.org/2001/XMLSchema-instance" xmlns:pc="http://schemas.microsoft.com/office/infopath/2007/PartnerControls">
-  <documentManagement>
-    <_activity xmlns="7b482e70-4f35-40a3-b75e-ffa04ee0c79f" xsi:nil="true"/>
-  </documentManagement>
-</p:properties>
-</file>
-
-<file path=customXml/item2.xml><?xml version="1.0" encoding="utf-8"?>
-<?mso-contentType ?>
-<FormTemplates xmlns="http://schemas.microsoft.com/sharepoint/v3/contenttype/forms">
-  <Display>DocumentLibraryForm</Display>
-  <Edit>DocumentLibraryForm</Edit>
-  <New>DocumentLibraryForm</New>
-</FormTemplates>
-</file>
-
-<file path=customXml/item3.xml><?xml version="1.0" encoding="utf-8"?>
 <ct:contentTypeSchema xmlns:ct="http://schemas.microsoft.com/office/2006/metadata/contentType" xmlns:ma="http://schemas.microsoft.com/office/2006/metadata/properties/metaAttributes" ct:_="" ma:_="" ma:contentTypeName="Document" ma:contentTypeID="0x0101003A7443C7252A364EA82FF0EDB3C44616" ma:contentTypeVersion="16" ma:contentTypeDescription="Crée un document." ma:contentTypeScope="" ma:versionID="99dd13c5d007134322681d689c73e4af">
   <xsd:schema xmlns:xsd="http://www.w3.org/2001/XMLSchema" xmlns:xs="http://www.w3.org/2001/XMLSchema" xmlns:p="http://schemas.microsoft.com/office/2006/metadata/properties" xmlns:ns3="7b482e70-4f35-40a3-b75e-ffa04ee0c79f" xmlns:ns4="4582224d-bab5-40fa-bd6d-5f2de2104ce9" targetNamespace="http://schemas.microsoft.com/office/2006/metadata/properties" ma:root="true" ma:fieldsID="b16fc3d7505b8814540dfc36f1e50148" ns3:_="" ns4:_="">
     <xsd:import namespace="7b482e70-4f35-40a3-b75e-ffa04ee0c79f"/>
@@ -5978,32 +5969,24 @@
 </ct:contentTypeSchema>
 </file>
 
-<file path=customXml/itemProps1.xml><?xml version="1.0" encoding="utf-8"?>
-<ds:datastoreItem xmlns:ds="http://schemas.openxmlformats.org/officeDocument/2006/customXml" ds:itemID="{1061F33B-DBCF-4D99-8A24-A37E84CD3907}">
-  <ds:schemaRefs>
-    <ds:schemaRef ds:uri="4582224d-bab5-40fa-bd6d-5f2de2104ce9"/>
-    <ds:schemaRef ds:uri="7b482e70-4f35-40a3-b75e-ffa04ee0c79f"/>
-    <ds:schemaRef ds:uri="http://purl.org/dc/dcmitype/"/>
-    <ds:schemaRef ds:uri="http://purl.org/dc/elements/1.1/"/>
-    <ds:schemaRef ds:uri="http://purl.org/dc/terms/"/>
-    <ds:schemaRef ds:uri="http://schemas.microsoft.com/office/2006/documentManagement/types"/>
-    <ds:schemaRef ds:uri="http://schemas.microsoft.com/office/2006/metadata/properties"/>
-    <ds:schemaRef ds:uri="http://schemas.microsoft.com/office/infopath/2007/PartnerControls"/>
-    <ds:schemaRef ds:uri="http://schemas.openxmlformats.org/package/2006/metadata/core-properties"/>
-    <ds:schemaRef ds:uri="http://www.w3.org/XML/1998/namespace"/>
-  </ds:schemaRefs>
-</ds:datastoreItem>
+<file path=customXml/item2.xml><?xml version="1.0" encoding="utf-8"?>
+<?mso-contentType ?>
+<FormTemplates xmlns="http://schemas.microsoft.com/sharepoint/v3/contenttype/forms">
+  <Display>DocumentLibraryForm</Display>
+  <Edit>DocumentLibraryForm</Edit>
+  <New>DocumentLibraryForm</New>
+</FormTemplates>
 </file>
 
-<file path=customXml/itemProps2.xml><?xml version="1.0" encoding="utf-8"?>
-<ds:datastoreItem xmlns:ds="http://schemas.openxmlformats.org/officeDocument/2006/customXml" ds:itemID="{671C1D4C-DDB7-40E3-8640-20852E4CEA3E}">
-  <ds:schemaRefs>
-    <ds:schemaRef ds:uri="http://schemas.microsoft.com/sharepoint/v3/contenttype/forms"/>
-  </ds:schemaRefs>
-</ds:datastoreItem>
+<file path=customXml/item3.xml><?xml version="1.0" encoding="utf-8"?>
+<p:properties xmlns:p="http://schemas.microsoft.com/office/2006/metadata/properties" xmlns:xsi="http://www.w3.org/2001/XMLSchema-instance" xmlns:pc="http://schemas.microsoft.com/office/infopath/2007/PartnerControls">
+  <documentManagement>
+    <_activity xmlns="7b482e70-4f35-40a3-b75e-ffa04ee0c79f" xsi:nil="true"/>
+  </documentManagement>
+</p:properties>
 </file>
 
-<file path=customXml/itemProps3.xml><?xml version="1.0" encoding="utf-8"?>
+<file path=customXml/itemProps1.xml><?xml version="1.0" encoding="utf-8"?>
 <ds:datastoreItem xmlns:ds="http://schemas.openxmlformats.org/officeDocument/2006/customXml" ds:itemID="{8419668F-5759-4465-9DD6-CB2CD64ED883}">
   <ds:schemaRefs>
     <ds:schemaRef ds:uri="4582224d-bab5-40fa-bd6d-5f2de2104ce9"/>
@@ -6020,4 +6003,29 @@
     <ds:schemaRef ds:uri="http://www.w3.org/2001/XMLSchema"/>
   </ds:schemaRefs>
 </ds:datastoreItem>
+</file>
+
+<file path=customXml/itemProps2.xml><?xml version="1.0" encoding="utf-8"?>
+<ds:datastoreItem xmlns:ds="http://schemas.openxmlformats.org/officeDocument/2006/customXml" ds:itemID="{671C1D4C-DDB7-40E3-8640-20852E4CEA3E}">
+  <ds:schemaRefs>
+    <ds:schemaRef ds:uri="http://schemas.microsoft.com/sharepoint/v3/contenttype/forms"/>
+  </ds:schemaRefs>
+</ds:datastoreItem>
+</file>
+
+<file path=customXml/itemProps3.xml><?xml version="1.0" encoding="utf-8"?>
+<ds:datastoreItem xmlns:ds="http://schemas.openxmlformats.org/officeDocument/2006/customXml" ds:itemID="{1061F33B-DBCF-4D99-8A24-A37E84CD3907}">
+  <ds:schemaRefs>
+    <ds:schemaRef ds:uri="4582224d-bab5-40fa-bd6d-5f2de2104ce9"/>
+    <ds:schemaRef ds:uri="7b482e70-4f35-40a3-b75e-ffa04ee0c79f"/>
+    <ds:schemaRef ds:uri="http://purl.org/dc/dcmitype/"/>
+    <ds:schemaRef ds:uri="http://purl.org/dc/elements/1.1/"/>
+    <ds:schemaRef ds:uri="http://purl.org/dc/terms/"/>
+    <ds:schemaRef ds:uri="http://schemas.microsoft.com/office/2006/documentManagement/types"/>
+    <ds:schemaRef ds:uri="http://schemas.microsoft.com/office/2006/metadata/properties"/>
+    <ds:schemaRef ds:uri="http://schemas.microsoft.com/office/infopath/2007/PartnerControls"/>
+    <ds:schemaRef ds:uri="http://schemas.openxmlformats.org/package/2006/metadata/core-properties"/>
+    <ds:schemaRef ds:uri="http://www.w3.org/XML/1998/namespace"/>
+  </ds:schemaRefs>
+</ds:datastoreItem>
 </file>